--- a/output/wordlabs-react-3day.pptx
+++ b/output/wordlabs-react-3day.pptx
@@ -5622,7 +5622,7 @@
                 <a:ea typeface="Trebuchet MS" pitchFamily="34" charset="-122"/>
                 <a:cs typeface="Trebuchet MS" pitchFamily="34" charset="-120"/>
               </a:rPr>
-              <a:t>2</a:t>
+              <a:t>1</a:t>
             </a:r>
             <a:pPr algn="ctr" indent="0" marL="0">
               <a:buNone/>
@@ -5636,7 +5636,7 @@
                 <a:ea typeface="Trebuchet MS" pitchFamily="34" charset="-122"/>
                 <a:cs typeface="Trebuchet MS" pitchFamily="34" charset="-120"/>
               </a:rPr>
-              <a:t>  punctuation marks</a:t>
+              <a:t>  punctuation mark</a:t>
             </a:r>
             <a:endParaRPr lang="en-US" sz="2800" dirty="0"/>
           </a:p>
@@ -6040,7 +6040,7 @@
                 <a:ea typeface="Calibri" pitchFamily="34" charset="-122"/>
                 <a:cs typeface="Calibri" pitchFamily="34" charset="-120"/>
               </a:rPr>
-              <a:t>How did you </a:t>
+              <a:t>The scientist studied the chemical </a:t>
             </a:r>
             <a:pPr algn="l" indent="0" marL="0">
               <a:buNone/>
@@ -6057,7 +6057,7 @@
                 <a:ea typeface="Calibri" pitchFamily="34" charset="-122"/>
                 <a:cs typeface="Calibri" pitchFamily="34" charset="-120"/>
               </a:rPr>
-              <a:t>react</a:t>
+              <a:t>reaction</a:t>
             </a:r>
             <a:pPr algn="l" indent="0" marL="0">
               <a:buNone/>
@@ -6071,7 +6071,7 @@
                 <a:ea typeface="Calibri" pitchFamily="34" charset="-122"/>
                 <a:cs typeface="Calibri" pitchFamily="34" charset="-120"/>
               </a:rPr>
-              <a:t> to the news, and was your </a:t>
+              <a:t> carefully, noting how quickly the liquid would </a:t>
             </a:r>
             <a:pPr algn="l" indent="0" marL="0">
               <a:buNone/>
@@ -6088,7 +6088,7 @@
                 <a:ea typeface="Calibri" pitchFamily="34" charset="-122"/>
                 <a:cs typeface="Calibri" pitchFamily="34" charset="-120"/>
               </a:rPr>
-              <a:t>reaction</a:t>
+              <a:t>react</a:t>
             </a:r>
             <a:pPr algn="l" indent="0" marL="0">
               <a:buNone/>
@@ -6102,7 +6102,7 @@
                 <a:ea typeface="Calibri" pitchFamily="34" charset="-122"/>
                 <a:cs typeface="Calibri" pitchFamily="34" charset="-120"/>
               </a:rPr>
-              <a:t> surprising to others?</a:t>
+              <a:t> to heat.</a:t>
             </a:r>
             <a:endParaRPr lang="en-US" sz="1800" dirty="0"/>
           </a:p>
@@ -6257,7 +6257,7 @@
                 <a:ea typeface="Trebuchet MS" pitchFamily="34" charset="-122"/>
                 <a:cs typeface="Trebuchet MS" pitchFamily="34" charset="-120"/>
               </a:rPr>
-              <a:t>react</a:t>
+              <a:t>reaction</a:t>
             </a:r>
             <a:endParaRPr lang="en-US" sz="1400" dirty="0"/>
           </a:p>
@@ -6385,7 +6385,7 @@
                 <a:ea typeface="Trebuchet MS" pitchFamily="34" charset="-122"/>
                 <a:cs typeface="Trebuchet MS" pitchFamily="34" charset="-120"/>
               </a:rPr>
-              <a:t>reaction</a:t>
+              <a:t>react</a:t>
             </a:r>
             <a:endParaRPr lang="en-US" sz="1400" dirty="0"/>
           </a:p>
@@ -6855,7 +6855,7 @@
                 <a:ea typeface="Trebuchet MS" pitchFamily="34" charset="-122"/>
                 <a:cs typeface="Trebuchet MS" pitchFamily="34" charset="-120"/>
               </a:rPr>
-              <a:t>react</a:t>
+              <a:t>reaction</a:t>
             </a:r>
             <a:endParaRPr lang="en-US" sz="2800" dirty="0"/>
           </a:p>
@@ -7682,7 +7682,7 @@
                 <a:ea typeface="Trebuchet MS" pitchFamily="34" charset="-122"/>
                 <a:cs typeface="Trebuchet MS" pitchFamily="34" charset="-120"/>
               </a:rPr>
-              <a:t>react</a:t>
+              <a:t>reaction</a:t>
             </a:r>
             <a:endParaRPr lang="en-US" sz="2800" dirty="0"/>
           </a:p>
@@ -7762,7 +7762,7 @@
         </p:nvSpPr>
         <p:spPr>
           <a:xfrm>
-            <a:off x="2938272" y="2258568"/>
+            <a:off x="2221992" y="2258568"/>
             <a:ext cx="1828800" cy="292608"/>
           </a:xfrm>
           <a:prstGeom prst="rect">
@@ -7796,7 +7796,7 @@
         </p:nvSpPr>
         <p:spPr>
           <a:xfrm>
-            <a:off x="2938272" y="2258568"/>
+            <a:off x="2221992" y="2258568"/>
             <a:ext cx="1828800" cy="292608"/>
           </a:xfrm>
           <a:prstGeom prst="rect">
@@ -7835,7 +7835,7 @@
         </p:nvSpPr>
         <p:spPr>
           <a:xfrm>
-            <a:off x="2938272" y="2569464"/>
+            <a:off x="2221992" y="2569464"/>
             <a:ext cx="1828800" cy="201168"/>
           </a:xfrm>
           <a:prstGeom prst="rect">
@@ -7860,7 +7860,7 @@
                 <a:ea typeface="Calibri" pitchFamily="34" charset="-122"/>
                 <a:cs typeface="Calibri" pitchFamily="34" charset="-120"/>
               </a:rPr>
-              <a:t>again, back</a:t>
+              <a:t>back, again</a:t>
             </a:r>
             <a:endParaRPr lang="en-US" sz="850" dirty="0"/>
           </a:p>
@@ -7874,7 +7874,7 @@
         </p:nvSpPr>
         <p:spPr>
           <a:xfrm>
-            <a:off x="5803392" y="2258568"/>
+            <a:off x="4370832" y="2258568"/>
             <a:ext cx="1828800" cy="292608"/>
           </a:xfrm>
           <a:prstGeom prst="rect">
@@ -7908,7 +7908,7 @@
         </p:nvSpPr>
         <p:spPr>
           <a:xfrm>
-            <a:off x="5803392" y="2258568"/>
+            <a:off x="4370832" y="2258568"/>
             <a:ext cx="1828800" cy="292608"/>
           </a:xfrm>
           <a:prstGeom prst="rect">
@@ -7947,7 +7947,7 @@
         </p:nvSpPr>
         <p:spPr>
           <a:xfrm>
-            <a:off x="5803392" y="2569464"/>
+            <a:off x="4370832" y="2569464"/>
             <a:ext cx="1828800" cy="201168"/>
           </a:xfrm>
           <a:prstGeom prst="rect">
@@ -7972,7 +7972,7 @@
                 <a:ea typeface="Calibri" pitchFamily="34" charset="-122"/>
                 <a:cs typeface="Calibri" pitchFamily="34" charset="-120"/>
               </a:rPr>
-              <a:t>to do, to act</a:t>
+              <a:t>to do, to drive</a:t>
             </a:r>
             <a:endParaRPr lang="en-US" sz="850" dirty="0"/>
           </a:p>
@@ -7981,6 +7981,118 @@
       <p:sp>
         <p:nvSpPr>
           <p:cNvPr id="22" name="Shape 20"/>
+          <p:cNvSpPr/>
+          <p:nvPr/>
+        </p:nvSpPr>
+        <p:spPr>
+          <a:xfrm>
+            <a:off x="6519672" y="2258568"/>
+            <a:ext cx="1828800" cy="292608"/>
+          </a:xfrm>
+          <a:prstGeom prst="rect">
+            <a:avLst>
+              <a:gd name="adj" fmla="val 25000"/>
+            </a:avLst>
+          </a:prstGeom>
+          <a:solidFill>
+            <a:srgbClr val="FCE7F3"/>
+          </a:solidFill>
+          <a:ln w="19050">
+            <a:solidFill>
+              <a:srgbClr val="DB2777"/>
+            </a:solidFill>
+            <a:prstDash val="solid"/>
+          </a:ln>
+          <a:effectLst>
+            <a:outerShdw sx="100000" sy="100000" kx="0" ky="0" algn="bl" rotWithShape="0" blurRad="101600" dist="38100" dir="8100000">
+              <a:srgbClr val="000000">
+                <a:alpha val="12000"/>
+              </a:srgbClr>
+            </a:outerShdw>
+          </a:effectLst>
+        </p:spPr>
+      </p:sp>
+      <p:sp>
+        <p:nvSpPr>
+          <p:cNvPr id="23" name="Text 21"/>
+          <p:cNvSpPr/>
+          <p:nvPr/>
+        </p:nvSpPr>
+        <p:spPr>
+          <a:xfrm>
+            <a:off x="6519672" y="2258568"/>
+            <a:ext cx="1828800" cy="292608"/>
+          </a:xfrm>
+          <a:prstGeom prst="rect">
+            <a:avLst/>
+          </a:prstGeom>
+          <a:noFill/>
+          <a:ln/>
+        </p:spPr>
+        <p:txBody>
+          <a:bodyPr wrap="square" lIns="0" tIns="0" rIns="0" bIns="0" rtlCol="0" anchor="ctr"/>
+          <a:lstStyle/>
+          <a:p>
+            <a:pPr algn="ctr" indent="0" marL="0">
+              <a:buNone/>
+            </a:pPr>
+            <a:r>
+              <a:rPr lang="en-US" sz="1300" b="1" dirty="0">
+                <a:solidFill>
+                  <a:srgbClr val="9D174D"/>
+                </a:solidFill>
+                <a:latin typeface="Trebuchet MS" pitchFamily="34" charset="0"/>
+                <a:ea typeface="Trebuchet MS" pitchFamily="34" charset="-122"/>
+                <a:cs typeface="Trebuchet MS" pitchFamily="34" charset="-120"/>
+              </a:rPr>
+              <a:t>ion</a:t>
+            </a:r>
+            <a:endParaRPr lang="en-US" sz="1300" dirty="0"/>
+          </a:p>
+        </p:txBody>
+      </p:sp>
+      <p:sp>
+        <p:nvSpPr>
+          <p:cNvPr id="24" name="Text 22"/>
+          <p:cNvSpPr/>
+          <p:nvPr/>
+        </p:nvSpPr>
+        <p:spPr>
+          <a:xfrm>
+            <a:off x="6519672" y="2569464"/>
+            <a:ext cx="1828800" cy="201168"/>
+          </a:xfrm>
+          <a:prstGeom prst="rect">
+            <a:avLst/>
+          </a:prstGeom>
+          <a:noFill/>
+          <a:ln/>
+        </p:spPr>
+        <p:txBody>
+          <a:bodyPr wrap="square" lIns="0" tIns="0" rIns="0" bIns="0" rtlCol="0" anchor="t"/>
+          <a:lstStyle/>
+          <a:p>
+            <a:pPr algn="ctr" indent="0" marL="0">
+              <a:buNone/>
+            </a:pPr>
+            <a:r>
+              <a:rPr lang="en-US" sz="850" dirty="0">
+                <a:solidFill>
+                  <a:srgbClr val="475569"/>
+                </a:solidFill>
+                <a:latin typeface="Calibri" pitchFamily="34" charset="0"/>
+                <a:ea typeface="Calibri" pitchFamily="34" charset="-122"/>
+                <a:cs typeface="Calibri" pitchFamily="34" charset="-120"/>
+              </a:rPr>
+              <a:t>state or process of</a:t>
+            </a:r>
+            <a:endParaRPr lang="en-US" sz="850" dirty="0"/>
+          </a:p>
+        </p:txBody>
+      </p:sp>
+      <p:sp>
+        <p:nvSpPr>
+          <p:cNvPr id="25" name="Shape 23"/>
           <p:cNvSpPr/>
           <p:nvPr/>
         </p:nvSpPr>
@@ -8007,7 +8119,7 @@
       </p:sp>
       <p:sp>
         <p:nvSpPr>
-          <p:cNvPr id="23" name="Text 21"/>
+          <p:cNvPr id="26" name="Text 24"/>
           <p:cNvSpPr/>
           <p:nvPr/>
         </p:nvSpPr>
@@ -8046,7 +8158,7 @@
       </p:sp>
       <p:sp>
         <p:nvSpPr>
-          <p:cNvPr id="24" name="Shape 22"/>
+          <p:cNvPr id="27" name="Shape 25"/>
           <p:cNvSpPr/>
           <p:nvPr/>
         </p:nvSpPr>
@@ -8073,7 +8185,7 @@
       </p:sp>
       <p:sp>
         <p:nvSpPr>
-          <p:cNvPr id="25" name="Text 23"/>
+          <p:cNvPr id="28" name="Text 26"/>
           <p:cNvSpPr/>
           <p:nvPr/>
         </p:nvSpPr>
@@ -8112,7 +8224,7 @@
       </p:sp>
       <p:sp>
         <p:nvSpPr>
-          <p:cNvPr id="26" name="Shape 24"/>
+          <p:cNvPr id="29" name="Shape 27"/>
           <p:cNvSpPr/>
           <p:nvPr/>
         </p:nvSpPr>
@@ -8139,7 +8251,7 @@
       </p:sp>
       <p:sp>
         <p:nvSpPr>
-          <p:cNvPr id="27" name="Text 25"/>
+          <p:cNvPr id="30" name="Text 28"/>
           <p:cNvSpPr/>
           <p:nvPr/>
         </p:nvSpPr>
@@ -8178,7 +8290,7 @@
       </p:sp>
       <p:sp>
         <p:nvSpPr>
-          <p:cNvPr id="28" name="Shape 26"/>
+          <p:cNvPr id="31" name="Shape 29"/>
           <p:cNvSpPr/>
           <p:nvPr/>
         </p:nvSpPr>
@@ -8205,7 +8317,7 @@
       </p:sp>
       <p:sp>
         <p:nvSpPr>
-          <p:cNvPr id="29" name="Text 27"/>
+          <p:cNvPr id="32" name="Text 30"/>
           <p:cNvSpPr/>
           <p:nvPr/>
         </p:nvSpPr>
@@ -8667,7 +8779,7 @@
                 <a:ea typeface="Trebuchet MS" pitchFamily="34" charset="-122"/>
                 <a:cs typeface="Trebuchet MS" pitchFamily="34" charset="-120"/>
               </a:rPr>
-              <a:t>react</a:t>
+              <a:t>reaction</a:t>
             </a:r>
             <a:endParaRPr lang="en-US" sz="2800" dirty="0"/>
           </a:p>
@@ -8747,7 +8859,7 @@
         </p:nvSpPr>
         <p:spPr>
           <a:xfrm>
-            <a:off x="2938272" y="2258568"/>
+            <a:off x="2221992" y="2258568"/>
             <a:ext cx="1828800" cy="292608"/>
           </a:xfrm>
           <a:prstGeom prst="rect">
@@ -8781,7 +8893,7 @@
         </p:nvSpPr>
         <p:spPr>
           <a:xfrm>
-            <a:off x="2938272" y="2258568"/>
+            <a:off x="2221992" y="2258568"/>
             <a:ext cx="1828800" cy="292608"/>
           </a:xfrm>
           <a:prstGeom prst="rect">
@@ -8820,7 +8932,7 @@
         </p:nvSpPr>
         <p:spPr>
           <a:xfrm>
-            <a:off x="2938272" y="2569464"/>
+            <a:off x="2221992" y="2569464"/>
             <a:ext cx="1828800" cy="201168"/>
           </a:xfrm>
           <a:prstGeom prst="rect">
@@ -8845,7 +8957,7 @@
                 <a:ea typeface="Calibri" pitchFamily="34" charset="-122"/>
                 <a:cs typeface="Calibri" pitchFamily="34" charset="-120"/>
               </a:rPr>
-              <a:t>again, back</a:t>
+              <a:t>back, again</a:t>
             </a:r>
             <a:endParaRPr lang="en-US" sz="850" dirty="0"/>
           </a:p>
@@ -8859,7 +8971,7 @@
         </p:nvSpPr>
         <p:spPr>
           <a:xfrm>
-            <a:off x="5803392" y="2258568"/>
+            <a:off x="4370832" y="2258568"/>
             <a:ext cx="1828800" cy="292608"/>
           </a:xfrm>
           <a:prstGeom prst="rect">
@@ -8893,7 +9005,7 @@
         </p:nvSpPr>
         <p:spPr>
           <a:xfrm>
-            <a:off x="5803392" y="2258568"/>
+            <a:off x="4370832" y="2258568"/>
             <a:ext cx="1828800" cy="292608"/>
           </a:xfrm>
           <a:prstGeom prst="rect">
@@ -8932,7 +9044,7 @@
         </p:nvSpPr>
         <p:spPr>
           <a:xfrm>
-            <a:off x="5803392" y="2569464"/>
+            <a:off x="4370832" y="2569464"/>
             <a:ext cx="1828800" cy="201168"/>
           </a:xfrm>
           <a:prstGeom prst="rect">
@@ -8957,7 +9069,7 @@
                 <a:ea typeface="Calibri" pitchFamily="34" charset="-122"/>
                 <a:cs typeface="Calibri" pitchFamily="34" charset="-120"/>
               </a:rPr>
-              <a:t>to do, to act</a:t>
+              <a:t>to do, to drive</a:t>
             </a:r>
             <a:endParaRPr lang="en-US" sz="850" dirty="0"/>
           </a:p>
@@ -8966,6 +9078,118 @@
       <p:sp>
         <p:nvSpPr>
           <p:cNvPr id="22" name="Shape 20"/>
+          <p:cNvSpPr/>
+          <p:nvPr/>
+        </p:nvSpPr>
+        <p:spPr>
+          <a:xfrm>
+            <a:off x="6519672" y="2258568"/>
+            <a:ext cx="1828800" cy="292608"/>
+          </a:xfrm>
+          <a:prstGeom prst="rect">
+            <a:avLst>
+              <a:gd name="adj" fmla="val 25000"/>
+            </a:avLst>
+          </a:prstGeom>
+          <a:solidFill>
+            <a:srgbClr val="FCE7F3"/>
+          </a:solidFill>
+          <a:ln w="19050">
+            <a:solidFill>
+              <a:srgbClr val="DB2777"/>
+            </a:solidFill>
+            <a:prstDash val="solid"/>
+          </a:ln>
+          <a:effectLst>
+            <a:outerShdw sx="100000" sy="100000" kx="0" ky="0" algn="bl" rotWithShape="0" blurRad="101600" dist="38100" dir="8100000">
+              <a:srgbClr val="000000">
+                <a:alpha val="12000"/>
+              </a:srgbClr>
+            </a:outerShdw>
+          </a:effectLst>
+        </p:spPr>
+      </p:sp>
+      <p:sp>
+        <p:nvSpPr>
+          <p:cNvPr id="23" name="Text 21"/>
+          <p:cNvSpPr/>
+          <p:nvPr/>
+        </p:nvSpPr>
+        <p:spPr>
+          <a:xfrm>
+            <a:off x="6519672" y="2258568"/>
+            <a:ext cx="1828800" cy="292608"/>
+          </a:xfrm>
+          <a:prstGeom prst="rect">
+            <a:avLst/>
+          </a:prstGeom>
+          <a:noFill/>
+          <a:ln/>
+        </p:spPr>
+        <p:txBody>
+          <a:bodyPr wrap="square" lIns="0" tIns="0" rIns="0" bIns="0" rtlCol="0" anchor="ctr"/>
+          <a:lstStyle/>
+          <a:p>
+            <a:pPr algn="ctr" indent="0" marL="0">
+              <a:buNone/>
+            </a:pPr>
+            <a:r>
+              <a:rPr lang="en-US" sz="1300" b="1" dirty="0">
+                <a:solidFill>
+                  <a:srgbClr val="9D174D"/>
+                </a:solidFill>
+                <a:latin typeface="Trebuchet MS" pitchFamily="34" charset="0"/>
+                <a:ea typeface="Trebuchet MS" pitchFamily="34" charset="-122"/>
+                <a:cs typeface="Trebuchet MS" pitchFamily="34" charset="-120"/>
+              </a:rPr>
+              <a:t>ion</a:t>
+            </a:r>
+            <a:endParaRPr lang="en-US" sz="1300" dirty="0"/>
+          </a:p>
+        </p:txBody>
+      </p:sp>
+      <p:sp>
+        <p:nvSpPr>
+          <p:cNvPr id="24" name="Text 22"/>
+          <p:cNvSpPr/>
+          <p:nvPr/>
+        </p:nvSpPr>
+        <p:spPr>
+          <a:xfrm>
+            <a:off x="6519672" y="2569464"/>
+            <a:ext cx="1828800" cy="201168"/>
+          </a:xfrm>
+          <a:prstGeom prst="rect">
+            <a:avLst/>
+          </a:prstGeom>
+          <a:noFill/>
+          <a:ln/>
+        </p:spPr>
+        <p:txBody>
+          <a:bodyPr wrap="square" lIns="0" tIns="0" rIns="0" bIns="0" rtlCol="0" anchor="t"/>
+          <a:lstStyle/>
+          <a:p>
+            <a:pPr algn="ctr" indent="0" marL="0">
+              <a:buNone/>
+            </a:pPr>
+            <a:r>
+              <a:rPr lang="en-US" sz="850" dirty="0">
+                <a:solidFill>
+                  <a:srgbClr val="475569"/>
+                </a:solidFill>
+                <a:latin typeface="Calibri" pitchFamily="34" charset="0"/>
+                <a:ea typeface="Calibri" pitchFamily="34" charset="-122"/>
+                <a:cs typeface="Calibri" pitchFamily="34" charset="-120"/>
+              </a:rPr>
+              <a:t>state or process of</a:t>
+            </a:r>
+            <a:endParaRPr lang="en-US" sz="850" dirty="0"/>
+          </a:p>
+        </p:txBody>
+      </p:sp>
+      <p:sp>
+        <p:nvSpPr>
+          <p:cNvPr id="25" name="Shape 23"/>
           <p:cNvSpPr/>
           <p:nvPr/>
         </p:nvSpPr>
@@ -8992,7 +9216,7 @@
       </p:sp>
       <p:sp>
         <p:nvSpPr>
-          <p:cNvPr id="23" name="Text 21"/>
+          <p:cNvPr id="26" name="Text 24"/>
           <p:cNvSpPr/>
           <p:nvPr/>
         </p:nvSpPr>
@@ -9031,7 +9255,7 @@
       </p:sp>
       <p:sp>
         <p:nvSpPr>
-          <p:cNvPr id="24" name="Shape 22"/>
+          <p:cNvPr id="27" name="Shape 25"/>
           <p:cNvSpPr/>
           <p:nvPr/>
         </p:nvSpPr>
@@ -9058,13 +9282,13 @@
       </p:sp>
       <p:sp>
         <p:nvSpPr>
-          <p:cNvPr id="25" name="Shape 23"/>
-          <p:cNvSpPr/>
-          <p:nvPr/>
-        </p:nvSpPr>
-        <p:spPr>
-          <a:xfrm>
-            <a:off x="2999232" y="3364992"/>
+          <p:cNvPr id="28" name="Shape 26"/>
+          <p:cNvSpPr/>
+          <p:nvPr/>
+        </p:nvSpPr>
+        <p:spPr>
+          <a:xfrm>
+            <a:off x="2313432" y="3364992"/>
             <a:ext cx="1645920" cy="475488"/>
           </a:xfrm>
           <a:prstGeom prst="rect">
@@ -9085,13 +9309,13 @@
       </p:sp>
       <p:sp>
         <p:nvSpPr>
-          <p:cNvPr id="26" name="Text 24"/>
-          <p:cNvSpPr/>
-          <p:nvPr/>
-        </p:nvSpPr>
-        <p:spPr>
-          <a:xfrm>
-            <a:off x="2999232" y="3364992"/>
+          <p:cNvPr id="29" name="Text 27"/>
+          <p:cNvSpPr/>
+          <p:nvPr/>
+        </p:nvSpPr>
+        <p:spPr>
+          <a:xfrm>
+            <a:off x="2313432" y="3364992"/>
             <a:ext cx="1645920" cy="475488"/>
           </a:xfrm>
           <a:prstGeom prst="rect">
@@ -9124,14 +9348,14 @@
       </p:sp>
       <p:sp>
         <p:nvSpPr>
-          <p:cNvPr id="27" name="Text 25"/>
-          <p:cNvSpPr/>
-          <p:nvPr/>
-        </p:nvSpPr>
-        <p:spPr>
-          <a:xfrm>
-            <a:off x="4645152" y="3364992"/>
-            <a:ext cx="1097280" cy="475488"/>
+          <p:cNvPr id="30" name="Text 28"/>
+          <p:cNvSpPr/>
+          <p:nvPr/>
+        </p:nvSpPr>
+        <p:spPr>
+          <a:xfrm>
+            <a:off x="3959352" y="3364992"/>
+            <a:ext cx="411480" cy="475488"/>
           </a:xfrm>
           <a:prstGeom prst="rect">
             <a:avLst/>
@@ -9163,13 +9387,13 @@
       </p:sp>
       <p:sp>
         <p:nvSpPr>
-          <p:cNvPr id="28" name="Shape 26"/>
-          <p:cNvSpPr/>
-          <p:nvPr/>
-        </p:nvSpPr>
-        <p:spPr>
-          <a:xfrm>
-            <a:off x="5742432" y="3364992"/>
+          <p:cNvPr id="31" name="Shape 29"/>
+          <p:cNvSpPr/>
+          <p:nvPr/>
+        </p:nvSpPr>
+        <p:spPr>
+          <a:xfrm>
+            <a:off x="4370832" y="3364992"/>
             <a:ext cx="1645920" cy="475488"/>
           </a:xfrm>
           <a:prstGeom prst="rect">
@@ -9190,13 +9414,13 @@
       </p:sp>
       <p:sp>
         <p:nvSpPr>
-          <p:cNvPr id="29" name="Text 27"/>
-          <p:cNvSpPr/>
-          <p:nvPr/>
-        </p:nvSpPr>
-        <p:spPr>
-          <a:xfrm>
-            <a:off x="5742432" y="3364992"/>
+          <p:cNvPr id="32" name="Text 30"/>
+          <p:cNvSpPr/>
+          <p:nvPr/>
+        </p:nvSpPr>
+        <p:spPr>
+          <a:xfrm>
+            <a:off x="4370832" y="3364992"/>
             <a:ext cx="1645920" cy="475488"/>
           </a:xfrm>
           <a:prstGeom prst="rect">
@@ -9221,7 +9445,7 @@
                 <a:ea typeface="Trebuchet MS" pitchFamily="34" charset="-122"/>
                 <a:cs typeface="Trebuchet MS" pitchFamily="34" charset="-120"/>
               </a:rPr>
-              <a:t>act</a:t>
+              <a:t>ac</a:t>
             </a:r>
             <a:endParaRPr lang="en-US" sz="1400" dirty="0"/>
           </a:p>
@@ -9229,7 +9453,112 @@
       </p:sp>
       <p:sp>
         <p:nvSpPr>
-          <p:cNvPr id="30" name="Shape 28"/>
+          <p:cNvPr id="33" name="Text 31"/>
+          <p:cNvSpPr/>
+          <p:nvPr/>
+        </p:nvSpPr>
+        <p:spPr>
+          <a:xfrm>
+            <a:off x="6016752" y="3364992"/>
+            <a:ext cx="411480" cy="475488"/>
+          </a:xfrm>
+          <a:prstGeom prst="rect">
+            <a:avLst/>
+          </a:prstGeom>
+          <a:noFill/>
+          <a:ln/>
+        </p:spPr>
+        <p:txBody>
+          <a:bodyPr wrap="square" lIns="0" tIns="0" rIns="0" bIns="0" rtlCol="0" anchor="ctr"/>
+          <a:lstStyle/>
+          <a:p>
+            <a:pPr algn="ctr" indent="0" marL="0">
+              <a:buNone/>
+            </a:pPr>
+            <a:r>
+              <a:rPr lang="en-US" sz="1600" b="1" dirty="0">
+                <a:solidFill>
+                  <a:srgbClr val="0D9488"/>
+                </a:solidFill>
+                <a:latin typeface="Trebuchet MS" pitchFamily="34" charset="0"/>
+                <a:ea typeface="Trebuchet MS" pitchFamily="34" charset="-122"/>
+                <a:cs typeface="Trebuchet MS" pitchFamily="34" charset="-120"/>
+              </a:rPr>
+              <a:t>·</a:t>
+            </a:r>
+            <a:endParaRPr lang="en-US" sz="1600" dirty="0"/>
+          </a:p>
+        </p:txBody>
+      </p:sp>
+      <p:sp>
+        <p:nvSpPr>
+          <p:cNvPr id="34" name="Shape 32"/>
+          <p:cNvSpPr/>
+          <p:nvPr/>
+        </p:nvSpPr>
+        <p:spPr>
+          <a:xfrm>
+            <a:off x="6428232" y="3364992"/>
+            <a:ext cx="1645920" cy="475488"/>
+          </a:xfrm>
+          <a:prstGeom prst="rect">
+            <a:avLst>
+              <a:gd name="adj" fmla="val 9615"/>
+            </a:avLst>
+          </a:prstGeom>
+          <a:solidFill>
+            <a:srgbClr val="FFFFFF"/>
+          </a:solidFill>
+          <a:ln w="12700">
+            <a:solidFill>
+              <a:srgbClr val="0D9488"/>
+            </a:solidFill>
+            <a:prstDash val="solid"/>
+          </a:ln>
+        </p:spPr>
+      </p:sp>
+      <p:sp>
+        <p:nvSpPr>
+          <p:cNvPr id="35" name="Text 33"/>
+          <p:cNvSpPr/>
+          <p:nvPr/>
+        </p:nvSpPr>
+        <p:spPr>
+          <a:xfrm>
+            <a:off x="6428232" y="3364992"/>
+            <a:ext cx="1645920" cy="475488"/>
+          </a:xfrm>
+          <a:prstGeom prst="rect">
+            <a:avLst/>
+          </a:prstGeom>
+          <a:noFill/>
+          <a:ln/>
+        </p:spPr>
+        <p:txBody>
+          <a:bodyPr wrap="square" lIns="0" tIns="0" rIns="0" bIns="0" rtlCol="0" anchor="ctr"/>
+          <a:lstStyle/>
+          <a:p>
+            <a:pPr algn="ctr" indent="0" marL="0">
+              <a:buNone/>
+            </a:pPr>
+            <a:r>
+              <a:rPr lang="en-US" sz="1400" b="1" dirty="0">
+                <a:solidFill>
+                  <a:srgbClr val="0D9488"/>
+                </a:solidFill>
+                <a:latin typeface="Trebuchet MS" pitchFamily="34" charset="0"/>
+                <a:ea typeface="Trebuchet MS" pitchFamily="34" charset="-122"/>
+                <a:cs typeface="Trebuchet MS" pitchFamily="34" charset="-120"/>
+              </a:rPr>
+              <a:t>tion</a:t>
+            </a:r>
+            <a:endParaRPr lang="en-US" sz="1400" dirty="0"/>
+          </a:p>
+        </p:txBody>
+      </p:sp>
+      <p:sp>
+        <p:nvSpPr>
+          <p:cNvPr id="36" name="Shape 34"/>
           <p:cNvSpPr/>
           <p:nvPr/>
         </p:nvSpPr>
@@ -9256,7 +9585,7 @@
       </p:sp>
       <p:sp>
         <p:nvSpPr>
-          <p:cNvPr id="31" name="Text 29"/>
+          <p:cNvPr id="37" name="Text 35"/>
           <p:cNvSpPr/>
           <p:nvPr/>
         </p:nvSpPr>
@@ -9295,7 +9624,7 @@
       </p:sp>
       <p:sp>
         <p:nvSpPr>
-          <p:cNvPr id="32" name="Shape 30"/>
+          <p:cNvPr id="38" name="Shape 36"/>
           <p:cNvSpPr/>
           <p:nvPr/>
         </p:nvSpPr>
@@ -9322,7 +9651,7 @@
       </p:sp>
       <p:sp>
         <p:nvSpPr>
-          <p:cNvPr id="33" name="Text 31"/>
+          <p:cNvPr id="39" name="Text 37"/>
           <p:cNvSpPr/>
           <p:nvPr/>
         </p:nvSpPr>
@@ -9784,7 +10113,7 @@
                 <a:ea typeface="Trebuchet MS" pitchFamily="34" charset="-122"/>
                 <a:cs typeface="Trebuchet MS" pitchFamily="34" charset="-120"/>
               </a:rPr>
-              <a:t>react</a:t>
+              <a:t>reaction</a:t>
             </a:r>
             <a:endParaRPr lang="en-US" sz="2800" dirty="0"/>
           </a:p>
@@ -9864,7 +10193,7 @@
         </p:nvSpPr>
         <p:spPr>
           <a:xfrm>
-            <a:off x="2938272" y="2258568"/>
+            <a:off x="2221992" y="2258568"/>
             <a:ext cx="1828800" cy="292608"/>
           </a:xfrm>
           <a:prstGeom prst="rect">
@@ -9898,7 +10227,7 @@
         </p:nvSpPr>
         <p:spPr>
           <a:xfrm>
-            <a:off x="2938272" y="2258568"/>
+            <a:off x="2221992" y="2258568"/>
             <a:ext cx="1828800" cy="292608"/>
           </a:xfrm>
           <a:prstGeom prst="rect">
@@ -9937,7 +10266,7 @@
         </p:nvSpPr>
         <p:spPr>
           <a:xfrm>
-            <a:off x="2938272" y="2569464"/>
+            <a:off x="2221992" y="2569464"/>
             <a:ext cx="1828800" cy="201168"/>
           </a:xfrm>
           <a:prstGeom prst="rect">
@@ -9962,7 +10291,7 @@
                 <a:ea typeface="Calibri" pitchFamily="34" charset="-122"/>
                 <a:cs typeface="Calibri" pitchFamily="34" charset="-120"/>
               </a:rPr>
-              <a:t>again, back</a:t>
+              <a:t>back, again</a:t>
             </a:r>
             <a:endParaRPr lang="en-US" sz="850" dirty="0"/>
           </a:p>
@@ -9976,7 +10305,7 @@
         </p:nvSpPr>
         <p:spPr>
           <a:xfrm>
-            <a:off x="5803392" y="2258568"/>
+            <a:off x="4370832" y="2258568"/>
             <a:ext cx="1828800" cy="292608"/>
           </a:xfrm>
           <a:prstGeom prst="rect">
@@ -10010,7 +10339,7 @@
         </p:nvSpPr>
         <p:spPr>
           <a:xfrm>
-            <a:off x="5803392" y="2258568"/>
+            <a:off x="4370832" y="2258568"/>
             <a:ext cx="1828800" cy="292608"/>
           </a:xfrm>
           <a:prstGeom prst="rect">
@@ -10049,7 +10378,7 @@
         </p:nvSpPr>
         <p:spPr>
           <a:xfrm>
-            <a:off x="5803392" y="2569464"/>
+            <a:off x="4370832" y="2569464"/>
             <a:ext cx="1828800" cy="201168"/>
           </a:xfrm>
           <a:prstGeom prst="rect">
@@ -10074,7 +10403,7 @@
                 <a:ea typeface="Calibri" pitchFamily="34" charset="-122"/>
                 <a:cs typeface="Calibri" pitchFamily="34" charset="-120"/>
               </a:rPr>
-              <a:t>to do, to act</a:t>
+              <a:t>to do, to drive</a:t>
             </a:r>
             <a:endParaRPr lang="en-US" sz="850" dirty="0"/>
           </a:p>
@@ -10083,6 +10412,118 @@
       <p:sp>
         <p:nvSpPr>
           <p:cNvPr id="22" name="Shape 20"/>
+          <p:cNvSpPr/>
+          <p:nvPr/>
+        </p:nvSpPr>
+        <p:spPr>
+          <a:xfrm>
+            <a:off x="6519672" y="2258568"/>
+            <a:ext cx="1828800" cy="292608"/>
+          </a:xfrm>
+          <a:prstGeom prst="rect">
+            <a:avLst>
+              <a:gd name="adj" fmla="val 25000"/>
+            </a:avLst>
+          </a:prstGeom>
+          <a:solidFill>
+            <a:srgbClr val="FCE7F3"/>
+          </a:solidFill>
+          <a:ln w="19050">
+            <a:solidFill>
+              <a:srgbClr val="DB2777"/>
+            </a:solidFill>
+            <a:prstDash val="solid"/>
+          </a:ln>
+          <a:effectLst>
+            <a:outerShdw sx="100000" sy="100000" kx="0" ky="0" algn="bl" rotWithShape="0" blurRad="101600" dist="38100" dir="8100000">
+              <a:srgbClr val="000000">
+                <a:alpha val="12000"/>
+              </a:srgbClr>
+            </a:outerShdw>
+          </a:effectLst>
+        </p:spPr>
+      </p:sp>
+      <p:sp>
+        <p:nvSpPr>
+          <p:cNvPr id="23" name="Text 21"/>
+          <p:cNvSpPr/>
+          <p:nvPr/>
+        </p:nvSpPr>
+        <p:spPr>
+          <a:xfrm>
+            <a:off x="6519672" y="2258568"/>
+            <a:ext cx="1828800" cy="292608"/>
+          </a:xfrm>
+          <a:prstGeom prst="rect">
+            <a:avLst/>
+          </a:prstGeom>
+          <a:noFill/>
+          <a:ln/>
+        </p:spPr>
+        <p:txBody>
+          <a:bodyPr wrap="square" lIns="0" tIns="0" rIns="0" bIns="0" rtlCol="0" anchor="ctr"/>
+          <a:lstStyle/>
+          <a:p>
+            <a:pPr algn="ctr" indent="0" marL="0">
+              <a:buNone/>
+            </a:pPr>
+            <a:r>
+              <a:rPr lang="en-US" sz="1300" b="1" dirty="0">
+                <a:solidFill>
+                  <a:srgbClr val="9D174D"/>
+                </a:solidFill>
+                <a:latin typeface="Trebuchet MS" pitchFamily="34" charset="0"/>
+                <a:ea typeface="Trebuchet MS" pitchFamily="34" charset="-122"/>
+                <a:cs typeface="Trebuchet MS" pitchFamily="34" charset="-120"/>
+              </a:rPr>
+              <a:t>ion</a:t>
+            </a:r>
+            <a:endParaRPr lang="en-US" sz="1300" dirty="0"/>
+          </a:p>
+        </p:txBody>
+      </p:sp>
+      <p:sp>
+        <p:nvSpPr>
+          <p:cNvPr id="24" name="Text 22"/>
+          <p:cNvSpPr/>
+          <p:nvPr/>
+        </p:nvSpPr>
+        <p:spPr>
+          <a:xfrm>
+            <a:off x="6519672" y="2569464"/>
+            <a:ext cx="1828800" cy="201168"/>
+          </a:xfrm>
+          <a:prstGeom prst="rect">
+            <a:avLst/>
+          </a:prstGeom>
+          <a:noFill/>
+          <a:ln/>
+        </p:spPr>
+        <p:txBody>
+          <a:bodyPr wrap="square" lIns="0" tIns="0" rIns="0" bIns="0" rtlCol="0" anchor="t"/>
+          <a:lstStyle/>
+          <a:p>
+            <a:pPr algn="ctr" indent="0" marL="0">
+              <a:buNone/>
+            </a:pPr>
+            <a:r>
+              <a:rPr lang="en-US" sz="850" dirty="0">
+                <a:solidFill>
+                  <a:srgbClr val="475569"/>
+                </a:solidFill>
+                <a:latin typeface="Calibri" pitchFamily="34" charset="0"/>
+                <a:ea typeface="Calibri" pitchFamily="34" charset="-122"/>
+                <a:cs typeface="Calibri" pitchFamily="34" charset="-120"/>
+              </a:rPr>
+              <a:t>state or process of</a:t>
+            </a:r>
+            <a:endParaRPr lang="en-US" sz="850" dirty="0"/>
+          </a:p>
+        </p:txBody>
+      </p:sp>
+      <p:sp>
+        <p:nvSpPr>
+          <p:cNvPr id="25" name="Shape 23"/>
           <p:cNvSpPr/>
           <p:nvPr/>
         </p:nvSpPr>
@@ -10109,7 +10550,7 @@
       </p:sp>
       <p:sp>
         <p:nvSpPr>
-          <p:cNvPr id="23" name="Text 21"/>
+          <p:cNvPr id="26" name="Text 24"/>
           <p:cNvSpPr/>
           <p:nvPr/>
         </p:nvSpPr>
@@ -10148,7 +10589,7 @@
       </p:sp>
       <p:sp>
         <p:nvSpPr>
-          <p:cNvPr id="24" name="Shape 22"/>
+          <p:cNvPr id="27" name="Shape 25"/>
           <p:cNvSpPr/>
           <p:nvPr/>
         </p:nvSpPr>
@@ -10175,13 +10616,13 @@
       </p:sp>
       <p:sp>
         <p:nvSpPr>
-          <p:cNvPr id="25" name="Shape 23"/>
-          <p:cNvSpPr/>
-          <p:nvPr/>
-        </p:nvSpPr>
-        <p:spPr>
-          <a:xfrm>
-            <a:off x="2999232" y="3364992"/>
+          <p:cNvPr id="28" name="Shape 26"/>
+          <p:cNvSpPr/>
+          <p:nvPr/>
+        </p:nvSpPr>
+        <p:spPr>
+          <a:xfrm>
+            <a:off x="2313432" y="3364992"/>
             <a:ext cx="1645920" cy="475488"/>
           </a:xfrm>
           <a:prstGeom prst="rect">
@@ -10202,13 +10643,13 @@
       </p:sp>
       <p:sp>
         <p:nvSpPr>
-          <p:cNvPr id="26" name="Text 24"/>
-          <p:cNvSpPr/>
-          <p:nvPr/>
-        </p:nvSpPr>
-        <p:spPr>
-          <a:xfrm>
-            <a:off x="2999232" y="3364992"/>
+          <p:cNvPr id="29" name="Text 27"/>
+          <p:cNvSpPr/>
+          <p:nvPr/>
+        </p:nvSpPr>
+        <p:spPr>
+          <a:xfrm>
+            <a:off x="2313432" y="3364992"/>
             <a:ext cx="1645920" cy="475488"/>
           </a:xfrm>
           <a:prstGeom prst="rect">
@@ -10241,14 +10682,14 @@
       </p:sp>
       <p:sp>
         <p:nvSpPr>
-          <p:cNvPr id="27" name="Text 25"/>
-          <p:cNvSpPr/>
-          <p:nvPr/>
-        </p:nvSpPr>
-        <p:spPr>
-          <a:xfrm>
-            <a:off x="4645152" y="3364992"/>
-            <a:ext cx="1097280" cy="475488"/>
+          <p:cNvPr id="30" name="Text 28"/>
+          <p:cNvSpPr/>
+          <p:nvPr/>
+        </p:nvSpPr>
+        <p:spPr>
+          <a:xfrm>
+            <a:off x="3959352" y="3364992"/>
+            <a:ext cx="411480" cy="475488"/>
           </a:xfrm>
           <a:prstGeom prst="rect">
             <a:avLst/>
@@ -10280,13 +10721,13 @@
       </p:sp>
       <p:sp>
         <p:nvSpPr>
-          <p:cNvPr id="28" name="Shape 26"/>
-          <p:cNvSpPr/>
-          <p:nvPr/>
-        </p:nvSpPr>
-        <p:spPr>
-          <a:xfrm>
-            <a:off x="5742432" y="3364992"/>
+          <p:cNvPr id="31" name="Shape 29"/>
+          <p:cNvSpPr/>
+          <p:nvPr/>
+        </p:nvSpPr>
+        <p:spPr>
+          <a:xfrm>
+            <a:off x="4370832" y="3364992"/>
             <a:ext cx="1645920" cy="475488"/>
           </a:xfrm>
           <a:prstGeom prst="rect">
@@ -10307,13 +10748,13 @@
       </p:sp>
       <p:sp>
         <p:nvSpPr>
-          <p:cNvPr id="29" name="Text 27"/>
-          <p:cNvSpPr/>
-          <p:nvPr/>
-        </p:nvSpPr>
-        <p:spPr>
-          <a:xfrm>
-            <a:off x="5742432" y="3364992"/>
+          <p:cNvPr id="32" name="Text 30"/>
+          <p:cNvSpPr/>
+          <p:nvPr/>
+        </p:nvSpPr>
+        <p:spPr>
+          <a:xfrm>
+            <a:off x="4370832" y="3364992"/>
             <a:ext cx="1645920" cy="475488"/>
           </a:xfrm>
           <a:prstGeom prst="rect">
@@ -10338,7 +10779,7 @@
                 <a:ea typeface="Trebuchet MS" pitchFamily="34" charset="-122"/>
                 <a:cs typeface="Trebuchet MS" pitchFamily="34" charset="-120"/>
               </a:rPr>
-              <a:t>act</a:t>
+              <a:t>ac</a:t>
             </a:r>
             <a:endParaRPr lang="en-US" sz="1400" dirty="0"/>
           </a:p>
@@ -10346,7 +10787,112 @@
       </p:sp>
       <p:sp>
         <p:nvSpPr>
-          <p:cNvPr id="30" name="Shape 28"/>
+          <p:cNvPr id="33" name="Text 31"/>
+          <p:cNvSpPr/>
+          <p:nvPr/>
+        </p:nvSpPr>
+        <p:spPr>
+          <a:xfrm>
+            <a:off x="6016752" y="3364992"/>
+            <a:ext cx="411480" cy="475488"/>
+          </a:xfrm>
+          <a:prstGeom prst="rect">
+            <a:avLst/>
+          </a:prstGeom>
+          <a:noFill/>
+          <a:ln/>
+        </p:spPr>
+        <p:txBody>
+          <a:bodyPr wrap="square" lIns="0" tIns="0" rIns="0" bIns="0" rtlCol="0" anchor="ctr"/>
+          <a:lstStyle/>
+          <a:p>
+            <a:pPr algn="ctr" indent="0" marL="0">
+              <a:buNone/>
+            </a:pPr>
+            <a:r>
+              <a:rPr lang="en-US" sz="1600" b="1" dirty="0">
+                <a:solidFill>
+                  <a:srgbClr val="0D9488"/>
+                </a:solidFill>
+                <a:latin typeface="Trebuchet MS" pitchFamily="34" charset="0"/>
+                <a:ea typeface="Trebuchet MS" pitchFamily="34" charset="-122"/>
+                <a:cs typeface="Trebuchet MS" pitchFamily="34" charset="-120"/>
+              </a:rPr>
+              <a:t>·</a:t>
+            </a:r>
+            <a:endParaRPr lang="en-US" sz="1600" dirty="0"/>
+          </a:p>
+        </p:txBody>
+      </p:sp>
+      <p:sp>
+        <p:nvSpPr>
+          <p:cNvPr id="34" name="Shape 32"/>
+          <p:cNvSpPr/>
+          <p:nvPr/>
+        </p:nvSpPr>
+        <p:spPr>
+          <a:xfrm>
+            <a:off x="6428232" y="3364992"/>
+            <a:ext cx="1645920" cy="475488"/>
+          </a:xfrm>
+          <a:prstGeom prst="rect">
+            <a:avLst>
+              <a:gd name="adj" fmla="val 9615"/>
+            </a:avLst>
+          </a:prstGeom>
+          <a:solidFill>
+            <a:srgbClr val="FFFFFF"/>
+          </a:solidFill>
+          <a:ln w="12700">
+            <a:solidFill>
+              <a:srgbClr val="0D9488"/>
+            </a:solidFill>
+            <a:prstDash val="solid"/>
+          </a:ln>
+        </p:spPr>
+      </p:sp>
+      <p:sp>
+        <p:nvSpPr>
+          <p:cNvPr id="35" name="Text 33"/>
+          <p:cNvSpPr/>
+          <p:nvPr/>
+        </p:nvSpPr>
+        <p:spPr>
+          <a:xfrm>
+            <a:off x="6428232" y="3364992"/>
+            <a:ext cx="1645920" cy="475488"/>
+          </a:xfrm>
+          <a:prstGeom prst="rect">
+            <a:avLst/>
+          </a:prstGeom>
+          <a:noFill/>
+          <a:ln/>
+        </p:spPr>
+        <p:txBody>
+          <a:bodyPr wrap="square" lIns="0" tIns="0" rIns="0" bIns="0" rtlCol="0" anchor="ctr"/>
+          <a:lstStyle/>
+          <a:p>
+            <a:pPr algn="ctr" indent="0" marL="0">
+              <a:buNone/>
+            </a:pPr>
+            <a:r>
+              <a:rPr lang="en-US" sz="1400" b="1" dirty="0">
+                <a:solidFill>
+                  <a:srgbClr val="0D9488"/>
+                </a:solidFill>
+                <a:latin typeface="Trebuchet MS" pitchFamily="34" charset="0"/>
+                <a:ea typeface="Trebuchet MS" pitchFamily="34" charset="-122"/>
+                <a:cs typeface="Trebuchet MS" pitchFamily="34" charset="-120"/>
+              </a:rPr>
+              <a:t>tion</a:t>
+            </a:r>
+            <a:endParaRPr lang="en-US" sz="1400" dirty="0"/>
+          </a:p>
+        </p:txBody>
+      </p:sp>
+      <p:sp>
+        <p:nvSpPr>
+          <p:cNvPr id="36" name="Shape 34"/>
           <p:cNvSpPr/>
           <p:nvPr/>
         </p:nvSpPr>
@@ -10373,7 +10919,7 @@
       </p:sp>
       <p:sp>
         <p:nvSpPr>
-          <p:cNvPr id="31" name="Text 29"/>
+          <p:cNvPr id="37" name="Text 35"/>
           <p:cNvSpPr/>
           <p:nvPr/>
         </p:nvSpPr>
@@ -10412,7 +10958,7 @@
       </p:sp>
       <p:sp>
         <p:nvSpPr>
-          <p:cNvPr id="32" name="Shape 30"/>
+          <p:cNvPr id="38" name="Shape 36"/>
           <p:cNvSpPr/>
           <p:nvPr/>
         </p:nvSpPr>
@@ -10439,13 +10985,13 @@
       </p:sp>
       <p:sp>
         <p:nvSpPr>
-          <p:cNvPr id="33" name="Shape 31"/>
-          <p:cNvSpPr/>
-          <p:nvPr/>
-        </p:nvSpPr>
-        <p:spPr>
-          <a:xfrm>
-            <a:off x="2427732" y="4169664"/>
+          <p:cNvPr id="39" name="Shape 37"/>
+          <p:cNvSpPr/>
+          <p:nvPr/>
+        </p:nvSpPr>
+        <p:spPr>
+          <a:xfrm>
+            <a:off x="2124837" y="4169664"/>
             <a:ext cx="685800" cy="384048"/>
           </a:xfrm>
           <a:prstGeom prst="rect">
@@ -10466,13 +11012,13 @@
       </p:sp>
       <p:sp>
         <p:nvSpPr>
-          <p:cNvPr id="34" name="Text 32"/>
-          <p:cNvSpPr/>
-          <p:nvPr/>
-        </p:nvSpPr>
-        <p:spPr>
-          <a:xfrm>
-            <a:off x="2427732" y="4169664"/>
+          <p:cNvPr id="40" name="Text 38"/>
+          <p:cNvSpPr/>
+          <p:nvPr/>
+        </p:nvSpPr>
+        <p:spPr>
+          <a:xfrm>
+            <a:off x="2124837" y="4169664"/>
             <a:ext cx="685800" cy="384048"/>
           </a:xfrm>
           <a:prstGeom prst="rect">
@@ -10505,13 +11051,13 @@
       </p:sp>
       <p:sp>
         <p:nvSpPr>
-          <p:cNvPr id="35" name="Shape 33"/>
-          <p:cNvSpPr/>
-          <p:nvPr/>
-        </p:nvSpPr>
-        <p:spPr>
-          <a:xfrm>
-            <a:off x="3639312" y="4169664"/>
+          <p:cNvPr id="41" name="Shape 39"/>
+          <p:cNvSpPr/>
+          <p:nvPr/>
+        </p:nvSpPr>
+        <p:spPr>
+          <a:xfrm>
+            <a:off x="3033522" y="4169664"/>
             <a:ext cx="685800" cy="384048"/>
           </a:xfrm>
           <a:prstGeom prst="rect">
@@ -10532,13 +11078,13 @@
       </p:sp>
       <p:sp>
         <p:nvSpPr>
-          <p:cNvPr id="36" name="Text 34"/>
-          <p:cNvSpPr/>
-          <p:nvPr/>
-        </p:nvSpPr>
-        <p:spPr>
-          <a:xfrm>
-            <a:off x="3639312" y="4169664"/>
+          <p:cNvPr id="42" name="Text 40"/>
+          <p:cNvSpPr/>
+          <p:nvPr/>
+        </p:nvSpPr>
+        <p:spPr>
+          <a:xfrm>
+            <a:off x="3033522" y="4169664"/>
             <a:ext cx="685800" cy="384048"/>
           </a:xfrm>
           <a:prstGeom prst="rect">
@@ -10571,13 +11117,13 @@
       </p:sp>
       <p:sp>
         <p:nvSpPr>
-          <p:cNvPr id="37" name="Shape 35"/>
-          <p:cNvSpPr/>
-          <p:nvPr/>
-        </p:nvSpPr>
-        <p:spPr>
-          <a:xfrm>
-            <a:off x="4850892" y="4169664"/>
+          <p:cNvPr id="43" name="Shape 41"/>
+          <p:cNvSpPr/>
+          <p:nvPr/>
+        </p:nvSpPr>
+        <p:spPr>
+          <a:xfrm>
+            <a:off x="3942207" y="4169664"/>
             <a:ext cx="685800" cy="384048"/>
           </a:xfrm>
           <a:prstGeom prst="rect">
@@ -10598,13 +11144,13 @@
       </p:sp>
       <p:sp>
         <p:nvSpPr>
-          <p:cNvPr id="38" name="Text 36"/>
-          <p:cNvSpPr/>
-          <p:nvPr/>
-        </p:nvSpPr>
-        <p:spPr>
-          <a:xfrm>
-            <a:off x="4850892" y="4169664"/>
+          <p:cNvPr id="44" name="Text 42"/>
+          <p:cNvSpPr/>
+          <p:nvPr/>
+        </p:nvSpPr>
+        <p:spPr>
+          <a:xfrm>
+            <a:off x="3942207" y="4169664"/>
             <a:ext cx="685800" cy="384048"/>
           </a:xfrm>
           <a:prstGeom prst="rect">
@@ -10637,13 +11183,13 @@
       </p:sp>
       <p:sp>
         <p:nvSpPr>
-          <p:cNvPr id="39" name="Shape 37"/>
-          <p:cNvSpPr/>
-          <p:nvPr/>
-        </p:nvSpPr>
-        <p:spPr>
-          <a:xfrm>
-            <a:off x="6062472" y="4169664"/>
+          <p:cNvPr id="45" name="Shape 43"/>
+          <p:cNvSpPr/>
+          <p:nvPr/>
+        </p:nvSpPr>
+        <p:spPr>
+          <a:xfrm>
+            <a:off x="4850892" y="4169664"/>
             <a:ext cx="685800" cy="384048"/>
           </a:xfrm>
           <a:prstGeom prst="rect">
@@ -10664,13 +11210,13 @@
       </p:sp>
       <p:sp>
         <p:nvSpPr>
-          <p:cNvPr id="40" name="Text 38"/>
-          <p:cNvSpPr/>
-          <p:nvPr/>
-        </p:nvSpPr>
-        <p:spPr>
-          <a:xfrm>
-            <a:off x="6062472" y="4169664"/>
+          <p:cNvPr id="46" name="Text 44"/>
+          <p:cNvSpPr/>
+          <p:nvPr/>
+        </p:nvSpPr>
+        <p:spPr>
+          <a:xfrm>
+            <a:off x="4850892" y="4169664"/>
             <a:ext cx="685800" cy="384048"/>
           </a:xfrm>
           <a:prstGeom prst="rect">
@@ -10703,13 +11249,145 @@
       </p:sp>
       <p:sp>
         <p:nvSpPr>
-          <p:cNvPr id="41" name="Text 39"/>
-          <p:cNvSpPr/>
-          <p:nvPr/>
-        </p:nvSpPr>
-        <p:spPr>
-          <a:xfrm>
-            <a:off x="6062472" y="4572000"/>
+          <p:cNvPr id="47" name="Shape 45"/>
+          <p:cNvSpPr/>
+          <p:nvPr/>
+        </p:nvSpPr>
+        <p:spPr>
+          <a:xfrm>
+            <a:off x="5759577" y="4169664"/>
+            <a:ext cx="685800" cy="384048"/>
+          </a:xfrm>
+          <a:prstGeom prst="rect">
+            <a:avLst>
+              <a:gd name="adj" fmla="val 9524"/>
+            </a:avLst>
+          </a:prstGeom>
+          <a:solidFill>
+            <a:srgbClr val="FFFFFF"/>
+          </a:solidFill>
+          <a:ln w="12700">
+            <a:solidFill>
+              <a:srgbClr val="DB2777"/>
+            </a:solidFill>
+            <a:prstDash val="solid"/>
+          </a:ln>
+        </p:spPr>
+      </p:sp>
+      <p:sp>
+        <p:nvSpPr>
+          <p:cNvPr id="48" name="Text 46"/>
+          <p:cNvSpPr/>
+          <p:nvPr/>
+        </p:nvSpPr>
+        <p:spPr>
+          <a:xfrm>
+            <a:off x="5759577" y="4169664"/>
+            <a:ext cx="685800" cy="384048"/>
+          </a:xfrm>
+          <a:prstGeom prst="rect">
+            <a:avLst/>
+          </a:prstGeom>
+          <a:noFill/>
+          <a:ln/>
+        </p:spPr>
+        <p:txBody>
+          <a:bodyPr wrap="square" lIns="0" tIns="0" rIns="0" bIns="0" rtlCol="0" anchor="ctr"/>
+          <a:lstStyle/>
+          <a:p>
+            <a:pPr algn="ctr" indent="0" marL="0">
+              <a:buNone/>
+            </a:pPr>
+            <a:r>
+              <a:rPr lang="en-US" sz="900" b="1" dirty="0">
+                <a:solidFill>
+                  <a:srgbClr val="9D174D"/>
+                </a:solidFill>
+                <a:latin typeface="Trebuchet MS" pitchFamily="34" charset="0"/>
+                <a:ea typeface="Trebuchet MS" pitchFamily="34" charset="-122"/>
+                <a:cs typeface="Trebuchet MS" pitchFamily="34" charset="-120"/>
+              </a:rPr>
+              <a:t>t</a:t>
+            </a:r>
+            <a:endParaRPr lang="en-US" sz="900" dirty="0"/>
+          </a:p>
+        </p:txBody>
+      </p:sp>
+      <p:sp>
+        <p:nvSpPr>
+          <p:cNvPr id="49" name="Shape 47"/>
+          <p:cNvSpPr/>
+          <p:nvPr/>
+        </p:nvSpPr>
+        <p:spPr>
+          <a:xfrm>
+            <a:off x="6668262" y="4169664"/>
+            <a:ext cx="685800" cy="384048"/>
+          </a:xfrm>
+          <a:prstGeom prst="rect">
+            <a:avLst>
+              <a:gd name="adj" fmla="val 9524"/>
+            </a:avLst>
+          </a:prstGeom>
+          <a:solidFill>
+            <a:srgbClr val="FFFFFF"/>
+          </a:solidFill>
+          <a:ln w="12700">
+            <a:solidFill>
+              <a:srgbClr val="DB2777"/>
+            </a:solidFill>
+            <a:prstDash val="solid"/>
+          </a:ln>
+        </p:spPr>
+      </p:sp>
+      <p:sp>
+        <p:nvSpPr>
+          <p:cNvPr id="50" name="Text 48"/>
+          <p:cNvSpPr/>
+          <p:nvPr/>
+        </p:nvSpPr>
+        <p:spPr>
+          <a:xfrm>
+            <a:off x="6668262" y="4169664"/>
+            <a:ext cx="685800" cy="384048"/>
+          </a:xfrm>
+          <a:prstGeom prst="rect">
+            <a:avLst/>
+          </a:prstGeom>
+          <a:noFill/>
+          <a:ln/>
+        </p:spPr>
+        <p:txBody>
+          <a:bodyPr wrap="square" lIns="0" tIns="0" rIns="0" bIns="0" rtlCol="0" anchor="ctr"/>
+          <a:lstStyle/>
+          <a:p>
+            <a:pPr algn="ctr" indent="0" marL="0">
+              <a:buNone/>
+            </a:pPr>
+            <a:r>
+              <a:rPr lang="en-US" sz="900" b="1" dirty="0">
+                <a:solidFill>
+                  <a:srgbClr val="9D174D"/>
+                </a:solidFill>
+                <a:latin typeface="Trebuchet MS" pitchFamily="34" charset="0"/>
+                <a:ea typeface="Trebuchet MS" pitchFamily="34" charset="-122"/>
+                <a:cs typeface="Trebuchet MS" pitchFamily="34" charset="-120"/>
+              </a:rPr>
+              <a:t>io</a:t>
+            </a:r>
+            <a:endParaRPr lang="en-US" sz="900" dirty="0"/>
+          </a:p>
+        </p:txBody>
+      </p:sp>
+      <p:sp>
+        <p:nvSpPr>
+          <p:cNvPr id="51" name="Text 49"/>
+          <p:cNvSpPr/>
+          <p:nvPr/>
+        </p:nvSpPr>
+        <p:spPr>
+          <a:xfrm>
+            <a:off x="6668262" y="4572000"/>
             <a:ext cx="685800" cy="219456"/>
           </a:xfrm>
           <a:prstGeom prst="rect">
@@ -10734,7 +11412,7 @@
                 <a:ea typeface="Calibri" pitchFamily="34" charset="-122"/>
                 <a:cs typeface="Calibri" pitchFamily="34" charset="-120"/>
               </a:rPr>
-              <a:t>/k/</a:t>
+              <a:t>/sh/</a:t>
             </a:r>
             <a:endParaRPr lang="en-US" sz="750" dirty="0"/>
           </a:p>
@@ -10742,13 +11420,13 @@
       </p:sp>
       <p:sp>
         <p:nvSpPr>
-          <p:cNvPr id="42" name="Shape 40"/>
-          <p:cNvSpPr/>
-          <p:nvPr/>
-        </p:nvSpPr>
-        <p:spPr>
-          <a:xfrm>
-            <a:off x="7274052" y="4169664"/>
+          <p:cNvPr id="52" name="Shape 50"/>
+          <p:cNvSpPr/>
+          <p:nvPr/>
+        </p:nvSpPr>
+        <p:spPr>
+          <a:xfrm>
+            <a:off x="7576947" y="4169664"/>
             <a:ext cx="685800" cy="384048"/>
           </a:xfrm>
           <a:prstGeom prst="rect">
@@ -10769,13 +11447,13 @@
       </p:sp>
       <p:sp>
         <p:nvSpPr>
-          <p:cNvPr id="43" name="Text 41"/>
-          <p:cNvSpPr/>
-          <p:nvPr/>
-        </p:nvSpPr>
-        <p:spPr>
-          <a:xfrm>
-            <a:off x="7274052" y="4169664"/>
+          <p:cNvPr id="53" name="Text 51"/>
+          <p:cNvSpPr/>
+          <p:nvPr/>
+        </p:nvSpPr>
+        <p:spPr>
+          <a:xfrm>
+            <a:off x="7576947" y="4169664"/>
             <a:ext cx="685800" cy="384048"/>
           </a:xfrm>
           <a:prstGeom prst="rect">
@@ -10800,7 +11478,7 @@
                 <a:ea typeface="Trebuchet MS" pitchFamily="34" charset="-122"/>
                 <a:cs typeface="Trebuchet MS" pitchFamily="34" charset="-120"/>
               </a:rPr>
-              <a:t>t</a:t>
+              <a:t>n</a:t>
             </a:r>
             <a:endParaRPr lang="en-US" sz="900" dirty="0"/>
           </a:p>
@@ -11231,7 +11909,7 @@
                 <a:ea typeface="Trebuchet MS" pitchFamily="34" charset="-122"/>
                 <a:cs typeface="Trebuchet MS" pitchFamily="34" charset="-120"/>
               </a:rPr>
-              <a:t>reaction</a:t>
+              <a:t>react</a:t>
             </a:r>
             <a:endParaRPr lang="en-US" sz="2800" dirty="0"/>
           </a:p>
@@ -12058,7 +12736,7 @@
                 <a:ea typeface="Trebuchet MS" pitchFamily="34" charset="-122"/>
                 <a:cs typeface="Trebuchet MS" pitchFamily="34" charset="-120"/>
               </a:rPr>
-              <a:t>reaction</a:t>
+              <a:t>react</a:t>
             </a:r>
             <a:endParaRPr lang="en-US" sz="2800" dirty="0"/>
           </a:p>
@@ -12138,7 +12816,7 @@
         </p:nvSpPr>
         <p:spPr>
           <a:xfrm>
-            <a:off x="2221992" y="2258568"/>
+            <a:off x="2938272" y="2258568"/>
             <a:ext cx="1828800" cy="292608"/>
           </a:xfrm>
           <a:prstGeom prst="rect">
@@ -12172,7 +12850,7 @@
         </p:nvSpPr>
         <p:spPr>
           <a:xfrm>
-            <a:off x="2221992" y="2258568"/>
+            <a:off x="2938272" y="2258568"/>
             <a:ext cx="1828800" cy="292608"/>
           </a:xfrm>
           <a:prstGeom prst="rect">
@@ -12211,7 +12889,7 @@
         </p:nvSpPr>
         <p:spPr>
           <a:xfrm>
-            <a:off x="2221992" y="2569464"/>
+            <a:off x="2938272" y="2569464"/>
             <a:ext cx="1828800" cy="201168"/>
           </a:xfrm>
           <a:prstGeom prst="rect">
@@ -12236,7 +12914,7 @@
                 <a:ea typeface="Calibri" pitchFamily="34" charset="-122"/>
                 <a:cs typeface="Calibri" pitchFamily="34" charset="-120"/>
               </a:rPr>
-              <a:t>again, back</a:t>
+              <a:t>back, again</a:t>
             </a:r>
             <a:endParaRPr lang="en-US" sz="850" dirty="0"/>
           </a:p>
@@ -12250,7 +12928,7 @@
         </p:nvSpPr>
         <p:spPr>
           <a:xfrm>
-            <a:off x="4370832" y="2258568"/>
+            <a:off x="5803392" y="2258568"/>
             <a:ext cx="1828800" cy="292608"/>
           </a:xfrm>
           <a:prstGeom prst="rect">
@@ -12284,7 +12962,7 @@
         </p:nvSpPr>
         <p:spPr>
           <a:xfrm>
-            <a:off x="4370832" y="2258568"/>
+            <a:off x="5803392" y="2258568"/>
             <a:ext cx="1828800" cy="292608"/>
           </a:xfrm>
           <a:prstGeom prst="rect">
@@ -12323,7 +13001,7 @@
         </p:nvSpPr>
         <p:spPr>
           <a:xfrm>
-            <a:off x="4370832" y="2569464"/>
+            <a:off x="5803392" y="2569464"/>
             <a:ext cx="1828800" cy="201168"/>
           </a:xfrm>
           <a:prstGeom prst="rect">
@@ -12348,7 +13026,7 @@
                 <a:ea typeface="Calibri" pitchFamily="34" charset="-122"/>
                 <a:cs typeface="Calibri" pitchFamily="34" charset="-120"/>
               </a:rPr>
-              <a:t>to do, to act</a:t>
+              <a:t>to do, to drive</a:t>
             </a:r>
             <a:endParaRPr lang="en-US" sz="850" dirty="0"/>
           </a:p>
@@ -12362,30 +13040,23 @@
         </p:nvSpPr>
         <p:spPr>
           <a:xfrm>
-            <a:off x="6519672" y="2258568"/>
-            <a:ext cx="1828800" cy="292608"/>
+            <a:off x="365760" y="3273552"/>
+            <a:ext cx="1371600" cy="658368"/>
           </a:xfrm>
           <a:prstGeom prst="rect">
             <a:avLst>
-              <a:gd name="adj" fmla="val 25000"/>
+              <a:gd name="adj" fmla="val 8333"/>
             </a:avLst>
           </a:prstGeom>
           <a:solidFill>
-            <a:srgbClr val="FCE7F3"/>
-          </a:solidFill>
-          <a:ln w="19050">
-            <a:solidFill>
-              <a:srgbClr val="DB2777"/>
-            </a:solidFill>
-            <a:prstDash val="solid"/>
-          </a:ln>
-          <a:effectLst>
-            <a:outerShdw sx="100000" sy="100000" kx="0" ky="0" algn="bl" rotWithShape="0" blurRad="101600" dist="38100" dir="8100000">
-              <a:srgbClr val="000000">
-                <a:alpha val="12000"/>
-              </a:srgbClr>
-            </a:outerShdw>
-          </a:effectLst>
+            <a:srgbClr val="E2E8F0"/>
+          </a:solidFill>
+          <a:ln w="12700">
+            <a:solidFill>
+              <a:srgbClr val="E2E8F0"/>
+            </a:solidFill>
+            <a:prstDash val="solid"/>
+          </a:ln>
         </p:spPr>
       </p:sp>
       <p:sp>
@@ -12396,112 +13067,100 @@
         </p:nvSpPr>
         <p:spPr>
           <a:xfrm>
-            <a:off x="6519672" y="2258568"/>
-            <a:ext cx="1828800" cy="292608"/>
-          </a:xfrm>
-          <a:prstGeom prst="rect">
-            <a:avLst/>
-          </a:prstGeom>
-          <a:noFill/>
-          <a:ln/>
-        </p:spPr>
-        <p:txBody>
-          <a:bodyPr wrap="square" lIns="0" tIns="0" rIns="0" bIns="0" rtlCol="0" anchor="ctr"/>
-          <a:lstStyle/>
-          <a:p>
-            <a:pPr algn="ctr" indent="0" marL="0">
-              <a:buNone/>
-            </a:pPr>
-            <a:r>
-              <a:rPr lang="en-US" sz="1300" b="1" dirty="0">
-                <a:solidFill>
-                  <a:srgbClr val="9D174D"/>
+            <a:off x="365760" y="3273552"/>
+            <a:ext cx="1371600" cy="658368"/>
+          </a:xfrm>
+          <a:prstGeom prst="rect">
+            <a:avLst/>
+          </a:prstGeom>
+          <a:noFill/>
+          <a:ln/>
+        </p:spPr>
+        <p:txBody>
+          <a:bodyPr wrap="square" lIns="0" tIns="0" rIns="0" bIns="0" rtlCol="0" anchor="ctr"/>
+          <a:lstStyle/>
+          <a:p>
+            <a:pPr algn="ctr" indent="0" marL="0">
+              <a:buNone/>
+            </a:pPr>
+            <a:r>
+              <a:rPr lang="en-US" sz="1100" b="1" dirty="0">
+                <a:solidFill>
+                  <a:srgbClr val="475569"/>
                 </a:solidFill>
                 <a:latin typeface="Trebuchet MS" pitchFamily="34" charset="0"/>
                 <a:ea typeface="Trebuchet MS" pitchFamily="34" charset="-122"/>
                 <a:cs typeface="Trebuchet MS" pitchFamily="34" charset="-120"/>
               </a:rPr>
-              <a:t>ion</a:t>
-            </a:r>
-            <a:endParaRPr lang="en-US" sz="1300" dirty="0"/>
-          </a:p>
-        </p:txBody>
-      </p:sp>
-      <p:sp>
-        <p:nvSpPr>
-          <p:cNvPr id="24" name="Text 22"/>
-          <p:cNvSpPr/>
-          <p:nvPr/>
-        </p:nvSpPr>
-        <p:spPr>
-          <a:xfrm>
-            <a:off x="6519672" y="2569464"/>
-            <a:ext cx="1828800" cy="201168"/>
-          </a:xfrm>
-          <a:prstGeom prst="rect">
-            <a:avLst/>
-          </a:prstGeom>
-          <a:noFill/>
-          <a:ln/>
-        </p:spPr>
-        <p:txBody>
-          <a:bodyPr wrap="square" lIns="0" tIns="0" rIns="0" bIns="0" rtlCol="0" anchor="t"/>
-          <a:lstStyle/>
-          <a:p>
-            <a:pPr algn="ctr" indent="0" marL="0">
-              <a:buNone/>
-            </a:pPr>
-            <a:r>
-              <a:rPr lang="en-US" sz="850" dirty="0">
-                <a:solidFill>
-                  <a:srgbClr val="475569"/>
+              <a:t>Syllables</a:t>
+            </a:r>
+            <a:endParaRPr lang="en-US" sz="1100" dirty="0"/>
+          </a:p>
+        </p:txBody>
+      </p:sp>
+      <p:sp>
+        <p:nvSpPr>
+          <p:cNvPr id="24" name="Shape 22"/>
+          <p:cNvSpPr/>
+          <p:nvPr/>
+        </p:nvSpPr>
+        <p:spPr>
+          <a:xfrm>
+            <a:off x="1874520" y="3273552"/>
+            <a:ext cx="6903720" cy="658368"/>
+          </a:xfrm>
+          <a:prstGeom prst="rect">
+            <a:avLst>
+              <a:gd name="adj" fmla="val 8333"/>
+            </a:avLst>
+          </a:prstGeom>
+          <a:solidFill>
+            <a:srgbClr val="F8FAFC"/>
+          </a:solidFill>
+          <a:ln w="12700">
+            <a:solidFill>
+              <a:srgbClr val="E2E8F0"/>
+            </a:solidFill>
+            <a:prstDash val="dash"/>
+          </a:ln>
+        </p:spPr>
+      </p:sp>
+      <p:sp>
+        <p:nvSpPr>
+          <p:cNvPr id="25" name="Text 23"/>
+          <p:cNvSpPr/>
+          <p:nvPr/>
+        </p:nvSpPr>
+        <p:spPr>
+          <a:xfrm>
+            <a:off x="1874520" y="3273552"/>
+            <a:ext cx="6903720" cy="658368"/>
+          </a:xfrm>
+          <a:prstGeom prst="rect">
+            <a:avLst/>
+          </a:prstGeom>
+          <a:noFill/>
+          <a:ln/>
+        </p:spPr>
+        <p:txBody>
+          <a:bodyPr wrap="square" rtlCol="0" anchor="ctr"/>
+          <a:lstStyle/>
+          <a:p>
+            <a:pPr algn="ctr" indent="0" marL="0">
+              <a:buNone/>
+            </a:pPr>
+            <a:r>
+              <a:rPr lang="en-US" sz="1100" i="1" dirty="0">
+                <a:solidFill>
+                  <a:srgbClr val="CBD5E1"/>
                 </a:solidFill>
                 <a:latin typeface="Calibri" pitchFamily="34" charset="0"/>
                 <a:ea typeface="Calibri" pitchFamily="34" charset="-122"/>
                 <a:cs typeface="Calibri" pitchFamily="34" charset="-120"/>
               </a:rPr>
-              <a:t>the act or result of</a:t>
-            </a:r>
-            <a:endParaRPr lang="en-US" sz="850" dirty="0"/>
-          </a:p>
-        </p:txBody>
-      </p:sp>
-      <p:sp>
-        <p:nvSpPr>
-          <p:cNvPr id="25" name="Text 23"/>
-          <p:cNvSpPr/>
-          <p:nvPr/>
-        </p:nvSpPr>
-        <p:spPr>
-          <a:xfrm>
-            <a:off x="6519672" y="2752344"/>
-            <a:ext cx="1828800" cy="182880"/>
-          </a:xfrm>
-          <a:prstGeom prst="rect">
-            <a:avLst/>
-          </a:prstGeom>
-          <a:noFill/>
-          <a:ln/>
-        </p:spPr>
-        <p:txBody>
-          <a:bodyPr wrap="square" lIns="0" tIns="0" rIns="0" bIns="0" rtlCol="0" anchor="t"/>
-          <a:lstStyle/>
-          <a:p>
-            <a:pPr algn="ctr" indent="0" marL="0">
-              <a:buNone/>
-            </a:pPr>
-            <a:r>
-              <a:rPr lang="en-US" sz="700" i="1" dirty="0">
-                <a:solidFill>
-                  <a:srgbClr val="94A3B8"/>
-                </a:solidFill>
-                <a:latin typeface="Calibri" pitchFamily="34" charset="0"/>
-                <a:ea typeface="Calibri" pitchFamily="34" charset="-122"/>
-                <a:cs typeface="Calibri" pitchFamily="34" charset="-120"/>
-              </a:rPr>
-              <a:t>'t' + 'ion' makes /shun/</a:t>
-            </a:r>
-            <a:endParaRPr lang="en-US" sz="700" dirty="0"/>
+              <a:t>Write here...</a:t>
+            </a:r>
+            <a:endParaRPr lang="en-US" sz="1100" dirty="0"/>
           </a:p>
         </p:txBody>
       </p:sp>
@@ -12513,12 +13172,12 @@
         </p:nvSpPr>
         <p:spPr>
           <a:xfrm>
-            <a:off x="365760" y="3273552"/>
-            <a:ext cx="1371600" cy="658368"/>
+            <a:off x="365760" y="4096512"/>
+            <a:ext cx="1371600" cy="804672"/>
           </a:xfrm>
           <a:prstGeom prst="rect">
             <a:avLst>
-              <a:gd name="adj" fmla="val 8333"/>
+              <a:gd name="adj" fmla="val 6818"/>
             </a:avLst>
           </a:prstGeom>
           <a:solidFill>
@@ -12540,8 +13199,8 @@
         </p:nvSpPr>
         <p:spPr>
           <a:xfrm>
-            <a:off x="365760" y="3273552"/>
-            <a:ext cx="1371600" cy="658368"/>
+            <a:off x="365760" y="4096512"/>
+            <a:ext cx="1371600" cy="804672"/>
           </a:xfrm>
           <a:prstGeom prst="rect">
             <a:avLst/>
@@ -12565,7 +13224,7 @@
                 <a:ea typeface="Trebuchet MS" pitchFamily="34" charset="-122"/>
                 <a:cs typeface="Trebuchet MS" pitchFamily="34" charset="-120"/>
               </a:rPr>
-              <a:t>Syllables</a:t>
+              <a:t>Phonemes</a:t>
             </a:r>
             <a:endParaRPr lang="en-US" sz="1100" dirty="0"/>
           </a:p>
@@ -12579,74 +13238,8 @@
         </p:nvSpPr>
         <p:spPr>
           <a:xfrm>
-            <a:off x="1874520" y="3273552"/>
-            <a:ext cx="6903720" cy="658368"/>
-          </a:xfrm>
-          <a:prstGeom prst="rect">
-            <a:avLst>
-              <a:gd name="adj" fmla="val 8333"/>
-            </a:avLst>
-          </a:prstGeom>
-          <a:solidFill>
-            <a:srgbClr val="F8FAFC"/>
-          </a:solidFill>
-          <a:ln w="12700">
-            <a:solidFill>
-              <a:srgbClr val="E2E8F0"/>
-            </a:solidFill>
-            <a:prstDash val="dash"/>
-          </a:ln>
-        </p:spPr>
-      </p:sp>
-      <p:sp>
-        <p:nvSpPr>
-          <p:cNvPr id="29" name="Text 27"/>
-          <p:cNvSpPr/>
-          <p:nvPr/>
-        </p:nvSpPr>
-        <p:spPr>
-          <a:xfrm>
-            <a:off x="1874520" y="3273552"/>
-            <a:ext cx="6903720" cy="658368"/>
-          </a:xfrm>
-          <a:prstGeom prst="rect">
-            <a:avLst/>
-          </a:prstGeom>
-          <a:noFill/>
-          <a:ln/>
-        </p:spPr>
-        <p:txBody>
-          <a:bodyPr wrap="square" rtlCol="0" anchor="ctr"/>
-          <a:lstStyle/>
-          <a:p>
-            <a:pPr algn="ctr" indent="0" marL="0">
-              <a:buNone/>
-            </a:pPr>
-            <a:r>
-              <a:rPr lang="en-US" sz="1100" i="1" dirty="0">
-                <a:solidFill>
-                  <a:srgbClr val="CBD5E1"/>
-                </a:solidFill>
-                <a:latin typeface="Calibri" pitchFamily="34" charset="0"/>
-                <a:ea typeface="Calibri" pitchFamily="34" charset="-122"/>
-                <a:cs typeface="Calibri" pitchFamily="34" charset="-120"/>
-              </a:rPr>
-              <a:t>Write here...</a:t>
-            </a:r>
-            <a:endParaRPr lang="en-US" sz="1100" dirty="0"/>
-          </a:p>
-        </p:txBody>
-      </p:sp>
-      <p:sp>
-        <p:nvSpPr>
-          <p:cNvPr id="30" name="Shape 28"/>
-          <p:cNvSpPr/>
-          <p:nvPr/>
-        </p:nvSpPr>
-        <p:spPr>
-          <a:xfrm>
-            <a:off x="365760" y="4096512"/>
-            <a:ext cx="1371600" cy="804672"/>
+            <a:off x="1874520" y="4096512"/>
+            <a:ext cx="6903720" cy="804672"/>
           </a:xfrm>
           <a:prstGeom prst="rect">
             <a:avLst>
@@ -12654,85 +13247,19 @@
             </a:avLst>
           </a:prstGeom>
           <a:solidFill>
-            <a:srgbClr val="E2E8F0"/>
+            <a:srgbClr val="F8FAFC"/>
           </a:solidFill>
           <a:ln w="12700">
             <a:solidFill>
               <a:srgbClr val="E2E8F0"/>
             </a:solidFill>
-            <a:prstDash val="solid"/>
-          </a:ln>
-        </p:spPr>
-      </p:sp>
-      <p:sp>
-        <p:nvSpPr>
-          <p:cNvPr id="31" name="Text 29"/>
-          <p:cNvSpPr/>
-          <p:nvPr/>
-        </p:nvSpPr>
-        <p:spPr>
-          <a:xfrm>
-            <a:off x="365760" y="4096512"/>
-            <a:ext cx="1371600" cy="804672"/>
-          </a:xfrm>
-          <a:prstGeom prst="rect">
-            <a:avLst/>
-          </a:prstGeom>
-          <a:noFill/>
-          <a:ln/>
-        </p:spPr>
-        <p:txBody>
-          <a:bodyPr wrap="square" lIns="0" tIns="0" rIns="0" bIns="0" rtlCol="0" anchor="ctr"/>
-          <a:lstStyle/>
-          <a:p>
-            <a:pPr algn="ctr" indent="0" marL="0">
-              <a:buNone/>
-            </a:pPr>
-            <a:r>
-              <a:rPr lang="en-US" sz="1100" b="1" dirty="0">
-                <a:solidFill>
-                  <a:srgbClr val="475569"/>
-                </a:solidFill>
-                <a:latin typeface="Trebuchet MS" pitchFamily="34" charset="0"/>
-                <a:ea typeface="Trebuchet MS" pitchFamily="34" charset="-122"/>
-                <a:cs typeface="Trebuchet MS" pitchFamily="34" charset="-120"/>
-              </a:rPr>
-              <a:t>Phonemes</a:t>
-            </a:r>
-            <a:endParaRPr lang="en-US" sz="1100" dirty="0"/>
-          </a:p>
-        </p:txBody>
-      </p:sp>
-      <p:sp>
-        <p:nvSpPr>
-          <p:cNvPr id="32" name="Shape 30"/>
-          <p:cNvSpPr/>
-          <p:nvPr/>
-        </p:nvSpPr>
-        <p:spPr>
-          <a:xfrm>
-            <a:off x="1874520" y="4096512"/>
-            <a:ext cx="6903720" cy="804672"/>
-          </a:xfrm>
-          <a:prstGeom prst="rect">
-            <a:avLst>
-              <a:gd name="adj" fmla="val 6818"/>
-            </a:avLst>
-          </a:prstGeom>
-          <a:solidFill>
-            <a:srgbClr val="F8FAFC"/>
-          </a:solidFill>
-          <a:ln w="12700">
-            <a:solidFill>
-              <a:srgbClr val="E2E8F0"/>
-            </a:solidFill>
             <a:prstDash val="dash"/>
           </a:ln>
         </p:spPr>
       </p:sp>
       <p:sp>
         <p:nvSpPr>
-          <p:cNvPr id="33" name="Text 31"/>
+          <p:cNvPr id="29" name="Text 27"/>
           <p:cNvSpPr/>
           <p:nvPr/>
         </p:nvSpPr>
@@ -13194,7 +13721,7 @@
                 <a:ea typeface="Trebuchet MS" pitchFamily="34" charset="-122"/>
                 <a:cs typeface="Trebuchet MS" pitchFamily="34" charset="-120"/>
               </a:rPr>
-              <a:t>reaction</a:t>
+              <a:t>react</a:t>
             </a:r>
             <a:endParaRPr lang="en-US" sz="2800" dirty="0"/>
           </a:p>
@@ -13274,7 +13801,7 @@
         </p:nvSpPr>
         <p:spPr>
           <a:xfrm>
-            <a:off x="2221992" y="2258568"/>
+            <a:off x="2938272" y="2258568"/>
             <a:ext cx="1828800" cy="292608"/>
           </a:xfrm>
           <a:prstGeom prst="rect">
@@ -13308,7 +13835,7 @@
         </p:nvSpPr>
         <p:spPr>
           <a:xfrm>
-            <a:off x="2221992" y="2258568"/>
+            <a:off x="2938272" y="2258568"/>
             <a:ext cx="1828800" cy="292608"/>
           </a:xfrm>
           <a:prstGeom prst="rect">
@@ -13347,7 +13874,7 @@
         </p:nvSpPr>
         <p:spPr>
           <a:xfrm>
-            <a:off x="2221992" y="2569464"/>
+            <a:off x="2938272" y="2569464"/>
             <a:ext cx="1828800" cy="201168"/>
           </a:xfrm>
           <a:prstGeom prst="rect">
@@ -13372,7 +13899,7 @@
                 <a:ea typeface="Calibri" pitchFamily="34" charset="-122"/>
                 <a:cs typeface="Calibri" pitchFamily="34" charset="-120"/>
               </a:rPr>
-              <a:t>again, back</a:t>
+              <a:t>back, again</a:t>
             </a:r>
             <a:endParaRPr lang="en-US" sz="850" dirty="0"/>
           </a:p>
@@ -13386,7 +13913,7 @@
         </p:nvSpPr>
         <p:spPr>
           <a:xfrm>
-            <a:off x="4370832" y="2258568"/>
+            <a:off x="5803392" y="2258568"/>
             <a:ext cx="1828800" cy="292608"/>
           </a:xfrm>
           <a:prstGeom prst="rect">
@@ -13420,7 +13947,7 @@
         </p:nvSpPr>
         <p:spPr>
           <a:xfrm>
-            <a:off x="4370832" y="2258568"/>
+            <a:off x="5803392" y="2258568"/>
             <a:ext cx="1828800" cy="292608"/>
           </a:xfrm>
           <a:prstGeom prst="rect">
@@ -13459,7 +13986,7 @@
         </p:nvSpPr>
         <p:spPr>
           <a:xfrm>
-            <a:off x="4370832" y="2569464"/>
+            <a:off x="5803392" y="2569464"/>
             <a:ext cx="1828800" cy="201168"/>
           </a:xfrm>
           <a:prstGeom prst="rect">
@@ -13484,7 +14011,7 @@
                 <a:ea typeface="Calibri" pitchFamily="34" charset="-122"/>
                 <a:cs typeface="Calibri" pitchFamily="34" charset="-120"/>
               </a:rPr>
-              <a:t>to do, to act</a:t>
+              <a:t>to do, to drive</a:t>
             </a:r>
             <a:endParaRPr lang="en-US" sz="850" dirty="0"/>
           </a:p>
@@ -13498,30 +14025,23 @@
         </p:nvSpPr>
         <p:spPr>
           <a:xfrm>
-            <a:off x="6519672" y="2258568"/>
-            <a:ext cx="1828800" cy="292608"/>
+            <a:off x="365760" y="3273552"/>
+            <a:ext cx="1371600" cy="658368"/>
           </a:xfrm>
           <a:prstGeom prst="rect">
             <a:avLst>
-              <a:gd name="adj" fmla="val 25000"/>
+              <a:gd name="adj" fmla="val 8333"/>
             </a:avLst>
           </a:prstGeom>
           <a:solidFill>
-            <a:srgbClr val="FCE7F3"/>
-          </a:solidFill>
-          <a:ln w="19050">
-            <a:solidFill>
-              <a:srgbClr val="DB2777"/>
-            </a:solidFill>
-            <a:prstDash val="solid"/>
-          </a:ln>
-          <a:effectLst>
-            <a:outerShdw sx="100000" sy="100000" kx="0" ky="0" algn="bl" rotWithShape="0" blurRad="101600" dist="38100" dir="8100000">
-              <a:srgbClr val="000000">
-                <a:alpha val="12000"/>
-              </a:srgbClr>
-            </a:outerShdw>
-          </a:effectLst>
+            <a:srgbClr val="E2E8F0"/>
+          </a:solidFill>
+          <a:ln w="12700">
+            <a:solidFill>
+              <a:srgbClr val="E2E8F0"/>
+            </a:solidFill>
+            <a:prstDash val="solid"/>
+          </a:ln>
         </p:spPr>
       </p:sp>
       <p:sp>
@@ -13532,125 +14052,47 @@
         </p:nvSpPr>
         <p:spPr>
           <a:xfrm>
-            <a:off x="6519672" y="2258568"/>
-            <a:ext cx="1828800" cy="292608"/>
-          </a:xfrm>
-          <a:prstGeom prst="rect">
-            <a:avLst/>
-          </a:prstGeom>
-          <a:noFill/>
-          <a:ln/>
-        </p:spPr>
-        <p:txBody>
-          <a:bodyPr wrap="square" lIns="0" tIns="0" rIns="0" bIns="0" rtlCol="0" anchor="ctr"/>
-          <a:lstStyle/>
-          <a:p>
-            <a:pPr algn="ctr" indent="0" marL="0">
-              <a:buNone/>
-            </a:pPr>
-            <a:r>
-              <a:rPr lang="en-US" sz="1300" b="1" dirty="0">
-                <a:solidFill>
-                  <a:srgbClr val="9D174D"/>
+            <a:off x="365760" y="3273552"/>
+            <a:ext cx="1371600" cy="658368"/>
+          </a:xfrm>
+          <a:prstGeom prst="rect">
+            <a:avLst/>
+          </a:prstGeom>
+          <a:noFill/>
+          <a:ln/>
+        </p:spPr>
+        <p:txBody>
+          <a:bodyPr wrap="square" lIns="0" tIns="0" rIns="0" bIns="0" rtlCol="0" anchor="ctr"/>
+          <a:lstStyle/>
+          <a:p>
+            <a:pPr algn="ctr" indent="0" marL="0">
+              <a:buNone/>
+            </a:pPr>
+            <a:r>
+              <a:rPr lang="en-US" sz="1100" b="1" dirty="0">
+                <a:solidFill>
+                  <a:srgbClr val="475569"/>
                 </a:solidFill>
                 <a:latin typeface="Trebuchet MS" pitchFamily="34" charset="0"/>
                 <a:ea typeface="Trebuchet MS" pitchFamily="34" charset="-122"/>
                 <a:cs typeface="Trebuchet MS" pitchFamily="34" charset="-120"/>
               </a:rPr>
-              <a:t>ion</a:t>
-            </a:r>
-            <a:endParaRPr lang="en-US" sz="1300" dirty="0"/>
-          </a:p>
-        </p:txBody>
-      </p:sp>
-      <p:sp>
-        <p:nvSpPr>
-          <p:cNvPr id="24" name="Text 22"/>
-          <p:cNvSpPr/>
-          <p:nvPr/>
-        </p:nvSpPr>
-        <p:spPr>
-          <a:xfrm>
-            <a:off x="6519672" y="2569464"/>
-            <a:ext cx="1828800" cy="201168"/>
-          </a:xfrm>
-          <a:prstGeom prst="rect">
-            <a:avLst/>
-          </a:prstGeom>
-          <a:noFill/>
-          <a:ln/>
-        </p:spPr>
-        <p:txBody>
-          <a:bodyPr wrap="square" lIns="0" tIns="0" rIns="0" bIns="0" rtlCol="0" anchor="t"/>
-          <a:lstStyle/>
-          <a:p>
-            <a:pPr algn="ctr" indent="0" marL="0">
-              <a:buNone/>
-            </a:pPr>
-            <a:r>
-              <a:rPr lang="en-US" sz="850" dirty="0">
-                <a:solidFill>
-                  <a:srgbClr val="475569"/>
-                </a:solidFill>
-                <a:latin typeface="Calibri" pitchFamily="34" charset="0"/>
-                <a:ea typeface="Calibri" pitchFamily="34" charset="-122"/>
-                <a:cs typeface="Calibri" pitchFamily="34" charset="-120"/>
-              </a:rPr>
-              <a:t>the act or result of</a:t>
-            </a:r>
-            <a:endParaRPr lang="en-US" sz="850" dirty="0"/>
-          </a:p>
-        </p:txBody>
-      </p:sp>
-      <p:sp>
-        <p:nvSpPr>
-          <p:cNvPr id="25" name="Text 23"/>
-          <p:cNvSpPr/>
-          <p:nvPr/>
-        </p:nvSpPr>
-        <p:spPr>
-          <a:xfrm>
-            <a:off x="6519672" y="2752344"/>
-            <a:ext cx="1828800" cy="182880"/>
-          </a:xfrm>
-          <a:prstGeom prst="rect">
-            <a:avLst/>
-          </a:prstGeom>
-          <a:noFill/>
-          <a:ln/>
-        </p:spPr>
-        <p:txBody>
-          <a:bodyPr wrap="square" lIns="0" tIns="0" rIns="0" bIns="0" rtlCol="0" anchor="t"/>
-          <a:lstStyle/>
-          <a:p>
-            <a:pPr algn="ctr" indent="0" marL="0">
-              <a:buNone/>
-            </a:pPr>
-            <a:r>
-              <a:rPr lang="en-US" sz="700" i="1" dirty="0">
-                <a:solidFill>
-                  <a:srgbClr val="94A3B8"/>
-                </a:solidFill>
-                <a:latin typeface="Calibri" pitchFamily="34" charset="0"/>
-                <a:ea typeface="Calibri" pitchFamily="34" charset="-122"/>
-                <a:cs typeface="Calibri" pitchFamily="34" charset="-120"/>
-              </a:rPr>
-              <a:t>'t' + 'ion' makes /shun/</a:t>
-            </a:r>
-            <a:endParaRPr lang="en-US" sz="700" dirty="0"/>
-          </a:p>
-        </p:txBody>
-      </p:sp>
-      <p:sp>
-        <p:nvSpPr>
-          <p:cNvPr id="26" name="Shape 24"/>
-          <p:cNvSpPr/>
-          <p:nvPr/>
-        </p:nvSpPr>
-        <p:spPr>
-          <a:xfrm>
-            <a:off x="365760" y="3273552"/>
-            <a:ext cx="1371600" cy="658368"/>
+              <a:t>Syllables</a:t>
+            </a:r>
+            <a:endParaRPr lang="en-US" sz="1100" dirty="0"/>
+          </a:p>
+        </p:txBody>
+      </p:sp>
+      <p:sp>
+        <p:nvSpPr>
+          <p:cNvPr id="24" name="Shape 22"/>
+          <p:cNvSpPr/>
+          <p:nvPr/>
+        </p:nvSpPr>
+        <p:spPr>
+          <a:xfrm>
+            <a:off x="1874520" y="3273552"/>
+            <a:ext cx="6903720" cy="658368"/>
           </a:xfrm>
           <a:prstGeom prst="rect">
             <a:avLst>
@@ -13658,52 +14100,118 @@
             </a:avLst>
           </a:prstGeom>
           <a:solidFill>
-            <a:srgbClr val="E2E8F0"/>
-          </a:solidFill>
-          <a:ln w="12700">
-            <a:solidFill>
-              <a:srgbClr val="E2E8F0"/>
-            </a:solidFill>
-            <a:prstDash val="solid"/>
-          </a:ln>
-        </p:spPr>
-      </p:sp>
-      <p:sp>
-        <p:nvSpPr>
-          <p:cNvPr id="27" name="Text 25"/>
-          <p:cNvSpPr/>
-          <p:nvPr/>
-        </p:nvSpPr>
-        <p:spPr>
-          <a:xfrm>
-            <a:off x="365760" y="3273552"/>
-            <a:ext cx="1371600" cy="658368"/>
-          </a:xfrm>
-          <a:prstGeom prst="rect">
-            <a:avLst/>
-          </a:prstGeom>
-          <a:noFill/>
-          <a:ln/>
-        </p:spPr>
-        <p:txBody>
-          <a:bodyPr wrap="square" lIns="0" tIns="0" rIns="0" bIns="0" rtlCol="0" anchor="ctr"/>
-          <a:lstStyle/>
-          <a:p>
-            <a:pPr algn="ctr" indent="0" marL="0">
-              <a:buNone/>
-            </a:pPr>
-            <a:r>
-              <a:rPr lang="en-US" sz="1100" b="1" dirty="0">
-                <a:solidFill>
-                  <a:srgbClr val="475569"/>
+            <a:srgbClr val="CCFBF1"/>
+          </a:solidFill>
+          <a:ln w="12700">
+            <a:solidFill>
+              <a:srgbClr val="0D9488"/>
+            </a:solidFill>
+            <a:prstDash val="solid"/>
+          </a:ln>
+        </p:spPr>
+      </p:sp>
+      <p:sp>
+        <p:nvSpPr>
+          <p:cNvPr id="25" name="Shape 23"/>
+          <p:cNvSpPr/>
+          <p:nvPr/>
+        </p:nvSpPr>
+        <p:spPr>
+          <a:xfrm>
+            <a:off x="2999232" y="3364992"/>
+            <a:ext cx="1645920" cy="475488"/>
+          </a:xfrm>
+          <a:prstGeom prst="rect">
+            <a:avLst>
+              <a:gd name="adj" fmla="val 9615"/>
+            </a:avLst>
+          </a:prstGeom>
+          <a:solidFill>
+            <a:srgbClr val="FFFFFF"/>
+          </a:solidFill>
+          <a:ln w="12700">
+            <a:solidFill>
+              <a:srgbClr val="0D9488"/>
+            </a:solidFill>
+            <a:prstDash val="solid"/>
+          </a:ln>
+        </p:spPr>
+      </p:sp>
+      <p:sp>
+        <p:nvSpPr>
+          <p:cNvPr id="26" name="Text 24"/>
+          <p:cNvSpPr/>
+          <p:nvPr/>
+        </p:nvSpPr>
+        <p:spPr>
+          <a:xfrm>
+            <a:off x="2999232" y="3364992"/>
+            <a:ext cx="1645920" cy="475488"/>
+          </a:xfrm>
+          <a:prstGeom prst="rect">
+            <a:avLst/>
+          </a:prstGeom>
+          <a:noFill/>
+          <a:ln/>
+        </p:spPr>
+        <p:txBody>
+          <a:bodyPr wrap="square" lIns="0" tIns="0" rIns="0" bIns="0" rtlCol="0" anchor="ctr"/>
+          <a:lstStyle/>
+          <a:p>
+            <a:pPr algn="ctr" indent="0" marL="0">
+              <a:buNone/>
+            </a:pPr>
+            <a:r>
+              <a:rPr lang="en-US" sz="1400" b="1" dirty="0">
+                <a:solidFill>
+                  <a:srgbClr val="0D9488"/>
                 </a:solidFill>
                 <a:latin typeface="Trebuchet MS" pitchFamily="34" charset="0"/>
                 <a:ea typeface="Trebuchet MS" pitchFamily="34" charset="-122"/>
                 <a:cs typeface="Trebuchet MS" pitchFamily="34" charset="-120"/>
               </a:rPr>
-              <a:t>Syllables</a:t>
-            </a:r>
-            <a:endParaRPr lang="en-US" sz="1100" dirty="0"/>
+              <a:t>re</a:t>
+            </a:r>
+            <a:endParaRPr lang="en-US" sz="1400" dirty="0"/>
+          </a:p>
+        </p:txBody>
+      </p:sp>
+      <p:sp>
+        <p:nvSpPr>
+          <p:cNvPr id="27" name="Text 25"/>
+          <p:cNvSpPr/>
+          <p:nvPr/>
+        </p:nvSpPr>
+        <p:spPr>
+          <a:xfrm>
+            <a:off x="4645152" y="3364992"/>
+            <a:ext cx="1097280" cy="475488"/>
+          </a:xfrm>
+          <a:prstGeom prst="rect">
+            <a:avLst/>
+          </a:prstGeom>
+          <a:noFill/>
+          <a:ln/>
+        </p:spPr>
+        <p:txBody>
+          <a:bodyPr wrap="square" lIns="0" tIns="0" rIns="0" bIns="0" rtlCol="0" anchor="ctr"/>
+          <a:lstStyle/>
+          <a:p>
+            <a:pPr algn="ctr" indent="0" marL="0">
+              <a:buNone/>
+            </a:pPr>
+            <a:r>
+              <a:rPr lang="en-US" sz="1600" b="1" dirty="0">
+                <a:solidFill>
+                  <a:srgbClr val="0D9488"/>
+                </a:solidFill>
+                <a:latin typeface="Trebuchet MS" pitchFamily="34" charset="0"/>
+                <a:ea typeface="Trebuchet MS" pitchFamily="34" charset="-122"/>
+                <a:cs typeface="Trebuchet MS" pitchFamily="34" charset="-120"/>
+              </a:rPr>
+              <a:t>·</a:t>
+            </a:r>
+            <a:endParaRPr lang="en-US" sz="1600" dirty="0"/>
           </a:p>
         </p:txBody>
       </p:sp>
@@ -13715,34 +14223,7 @@
         </p:nvSpPr>
         <p:spPr>
           <a:xfrm>
-            <a:off x="1874520" y="3273552"/>
-            <a:ext cx="6903720" cy="658368"/>
-          </a:xfrm>
-          <a:prstGeom prst="rect">
-            <a:avLst>
-              <a:gd name="adj" fmla="val 8333"/>
-            </a:avLst>
-          </a:prstGeom>
-          <a:solidFill>
-            <a:srgbClr val="CCFBF1"/>
-          </a:solidFill>
-          <a:ln w="12700">
-            <a:solidFill>
-              <a:srgbClr val="0D9488"/>
-            </a:solidFill>
-            <a:prstDash val="solid"/>
-          </a:ln>
-        </p:spPr>
-      </p:sp>
-      <p:sp>
-        <p:nvSpPr>
-          <p:cNvPr id="29" name="Shape 27"/>
-          <p:cNvSpPr/>
-          <p:nvPr/>
-        </p:nvSpPr>
-        <p:spPr>
-          <a:xfrm>
-            <a:off x="2313432" y="3364992"/>
+            <a:off x="5742432" y="3364992"/>
             <a:ext cx="1645920" cy="475488"/>
           </a:xfrm>
           <a:prstGeom prst="rect">
@@ -13763,13 +14244,13 @@
       </p:sp>
       <p:sp>
         <p:nvSpPr>
-          <p:cNvPr id="30" name="Text 28"/>
-          <p:cNvSpPr/>
-          <p:nvPr/>
-        </p:nvSpPr>
-        <p:spPr>
-          <a:xfrm>
-            <a:off x="2313432" y="3364992"/>
+          <p:cNvPr id="29" name="Text 27"/>
+          <p:cNvSpPr/>
+          <p:nvPr/>
+        </p:nvSpPr>
+        <p:spPr>
+          <a:xfrm>
+            <a:off x="5742432" y="3364992"/>
             <a:ext cx="1645920" cy="475488"/>
           </a:xfrm>
           <a:prstGeom prst="rect">
@@ -13794,7 +14275,7 @@
                 <a:ea typeface="Trebuchet MS" pitchFamily="34" charset="-122"/>
                 <a:cs typeface="Trebuchet MS" pitchFamily="34" charset="-120"/>
               </a:rPr>
-              <a:t>re</a:t>
+              <a:t>act</a:t>
             </a:r>
             <a:endParaRPr lang="en-US" sz="1400" dirty="0"/>
           </a:p>
@@ -13802,40 +14283,67 @@
       </p:sp>
       <p:sp>
         <p:nvSpPr>
+          <p:cNvPr id="30" name="Shape 28"/>
+          <p:cNvSpPr/>
+          <p:nvPr/>
+        </p:nvSpPr>
+        <p:spPr>
+          <a:xfrm>
+            <a:off x="365760" y="4096512"/>
+            <a:ext cx="1371600" cy="804672"/>
+          </a:xfrm>
+          <a:prstGeom prst="rect">
+            <a:avLst>
+              <a:gd name="adj" fmla="val 6818"/>
+            </a:avLst>
+          </a:prstGeom>
+          <a:solidFill>
+            <a:srgbClr val="E2E8F0"/>
+          </a:solidFill>
+          <a:ln w="12700">
+            <a:solidFill>
+              <a:srgbClr val="E2E8F0"/>
+            </a:solidFill>
+            <a:prstDash val="solid"/>
+          </a:ln>
+        </p:spPr>
+      </p:sp>
+      <p:sp>
+        <p:nvSpPr>
           <p:cNvPr id="31" name="Text 29"/>
           <p:cNvSpPr/>
           <p:nvPr/>
         </p:nvSpPr>
         <p:spPr>
           <a:xfrm>
-            <a:off x="3959352" y="3364992"/>
-            <a:ext cx="411480" cy="475488"/>
-          </a:xfrm>
-          <a:prstGeom prst="rect">
-            <a:avLst/>
-          </a:prstGeom>
-          <a:noFill/>
-          <a:ln/>
-        </p:spPr>
-        <p:txBody>
-          <a:bodyPr wrap="square" lIns="0" tIns="0" rIns="0" bIns="0" rtlCol="0" anchor="ctr"/>
-          <a:lstStyle/>
-          <a:p>
-            <a:pPr algn="ctr" indent="0" marL="0">
-              <a:buNone/>
-            </a:pPr>
-            <a:r>
-              <a:rPr lang="en-US" sz="1600" b="1" dirty="0">
-                <a:solidFill>
-                  <a:srgbClr val="0D9488"/>
+            <a:off x="365760" y="4096512"/>
+            <a:ext cx="1371600" cy="804672"/>
+          </a:xfrm>
+          <a:prstGeom prst="rect">
+            <a:avLst/>
+          </a:prstGeom>
+          <a:noFill/>
+          <a:ln/>
+        </p:spPr>
+        <p:txBody>
+          <a:bodyPr wrap="square" lIns="0" tIns="0" rIns="0" bIns="0" rtlCol="0" anchor="ctr"/>
+          <a:lstStyle/>
+          <a:p>
+            <a:pPr algn="ctr" indent="0" marL="0">
+              <a:buNone/>
+            </a:pPr>
+            <a:r>
+              <a:rPr lang="en-US" sz="1100" b="1" dirty="0">
+                <a:solidFill>
+                  <a:srgbClr val="475569"/>
                 </a:solidFill>
                 <a:latin typeface="Trebuchet MS" pitchFamily="34" charset="0"/>
                 <a:ea typeface="Trebuchet MS" pitchFamily="34" charset="-122"/>
                 <a:cs typeface="Trebuchet MS" pitchFamily="34" charset="-120"/>
               </a:rPr>
-              <a:t>·</a:t>
-            </a:r>
-            <a:endParaRPr lang="en-US" sz="1600" dirty="0"/>
+              <a:t>Phonemes</a:t>
+            </a:r>
+            <a:endParaRPr lang="en-US" sz="1100" dirty="0"/>
           </a:p>
         </p:txBody>
       </p:sp>
@@ -13847,179 +14355,8 @@
         </p:nvSpPr>
         <p:spPr>
           <a:xfrm>
-            <a:off x="4370832" y="3364992"/>
-            <a:ext cx="1645920" cy="475488"/>
-          </a:xfrm>
-          <a:prstGeom prst="rect">
-            <a:avLst>
-              <a:gd name="adj" fmla="val 9615"/>
-            </a:avLst>
-          </a:prstGeom>
-          <a:solidFill>
-            <a:srgbClr val="FFFFFF"/>
-          </a:solidFill>
-          <a:ln w="12700">
-            <a:solidFill>
-              <a:srgbClr val="0D9488"/>
-            </a:solidFill>
-            <a:prstDash val="solid"/>
-          </a:ln>
-        </p:spPr>
-      </p:sp>
-      <p:sp>
-        <p:nvSpPr>
-          <p:cNvPr id="33" name="Text 31"/>
-          <p:cNvSpPr/>
-          <p:nvPr/>
-        </p:nvSpPr>
-        <p:spPr>
-          <a:xfrm>
-            <a:off x="4370832" y="3364992"/>
-            <a:ext cx="1645920" cy="475488"/>
-          </a:xfrm>
-          <a:prstGeom prst="rect">
-            <a:avLst/>
-          </a:prstGeom>
-          <a:noFill/>
-          <a:ln/>
-        </p:spPr>
-        <p:txBody>
-          <a:bodyPr wrap="square" lIns="0" tIns="0" rIns="0" bIns="0" rtlCol="0" anchor="ctr"/>
-          <a:lstStyle/>
-          <a:p>
-            <a:pPr algn="ctr" indent="0" marL="0">
-              <a:buNone/>
-            </a:pPr>
-            <a:r>
-              <a:rPr lang="en-US" sz="1400" b="1" dirty="0">
-                <a:solidFill>
-                  <a:srgbClr val="0D9488"/>
-                </a:solidFill>
-                <a:latin typeface="Trebuchet MS" pitchFamily="34" charset="0"/>
-                <a:ea typeface="Trebuchet MS" pitchFamily="34" charset="-122"/>
-                <a:cs typeface="Trebuchet MS" pitchFamily="34" charset="-120"/>
-              </a:rPr>
-              <a:t>ac</a:t>
-            </a:r>
-            <a:endParaRPr lang="en-US" sz="1400" dirty="0"/>
-          </a:p>
-        </p:txBody>
-      </p:sp>
-      <p:sp>
-        <p:nvSpPr>
-          <p:cNvPr id="34" name="Text 32"/>
-          <p:cNvSpPr/>
-          <p:nvPr/>
-        </p:nvSpPr>
-        <p:spPr>
-          <a:xfrm>
-            <a:off x="6016752" y="3364992"/>
-            <a:ext cx="411480" cy="475488"/>
-          </a:xfrm>
-          <a:prstGeom prst="rect">
-            <a:avLst/>
-          </a:prstGeom>
-          <a:noFill/>
-          <a:ln/>
-        </p:spPr>
-        <p:txBody>
-          <a:bodyPr wrap="square" lIns="0" tIns="0" rIns="0" bIns="0" rtlCol="0" anchor="ctr"/>
-          <a:lstStyle/>
-          <a:p>
-            <a:pPr algn="ctr" indent="0" marL="0">
-              <a:buNone/>
-            </a:pPr>
-            <a:r>
-              <a:rPr lang="en-US" sz="1600" b="1" dirty="0">
-                <a:solidFill>
-                  <a:srgbClr val="0D9488"/>
-                </a:solidFill>
-                <a:latin typeface="Trebuchet MS" pitchFamily="34" charset="0"/>
-                <a:ea typeface="Trebuchet MS" pitchFamily="34" charset="-122"/>
-                <a:cs typeface="Trebuchet MS" pitchFamily="34" charset="-120"/>
-              </a:rPr>
-              <a:t>·</a:t>
-            </a:r>
-            <a:endParaRPr lang="en-US" sz="1600" dirty="0"/>
-          </a:p>
-        </p:txBody>
-      </p:sp>
-      <p:sp>
-        <p:nvSpPr>
-          <p:cNvPr id="35" name="Shape 33"/>
-          <p:cNvSpPr/>
-          <p:nvPr/>
-        </p:nvSpPr>
-        <p:spPr>
-          <a:xfrm>
-            <a:off x="6428232" y="3364992"/>
-            <a:ext cx="1645920" cy="475488"/>
-          </a:xfrm>
-          <a:prstGeom prst="rect">
-            <a:avLst>
-              <a:gd name="adj" fmla="val 9615"/>
-            </a:avLst>
-          </a:prstGeom>
-          <a:solidFill>
-            <a:srgbClr val="FFFFFF"/>
-          </a:solidFill>
-          <a:ln w="12700">
-            <a:solidFill>
-              <a:srgbClr val="0D9488"/>
-            </a:solidFill>
-            <a:prstDash val="solid"/>
-          </a:ln>
-        </p:spPr>
-      </p:sp>
-      <p:sp>
-        <p:nvSpPr>
-          <p:cNvPr id="36" name="Text 34"/>
-          <p:cNvSpPr/>
-          <p:nvPr/>
-        </p:nvSpPr>
-        <p:spPr>
-          <a:xfrm>
-            <a:off x="6428232" y="3364992"/>
-            <a:ext cx="1645920" cy="475488"/>
-          </a:xfrm>
-          <a:prstGeom prst="rect">
-            <a:avLst/>
-          </a:prstGeom>
-          <a:noFill/>
-          <a:ln/>
-        </p:spPr>
-        <p:txBody>
-          <a:bodyPr wrap="square" lIns="0" tIns="0" rIns="0" bIns="0" rtlCol="0" anchor="ctr"/>
-          <a:lstStyle/>
-          <a:p>
-            <a:pPr algn="ctr" indent="0" marL="0">
-              <a:buNone/>
-            </a:pPr>
-            <a:r>
-              <a:rPr lang="en-US" sz="1400" b="1" dirty="0">
-                <a:solidFill>
-                  <a:srgbClr val="0D9488"/>
-                </a:solidFill>
-                <a:latin typeface="Trebuchet MS" pitchFamily="34" charset="0"/>
-                <a:ea typeface="Trebuchet MS" pitchFamily="34" charset="-122"/>
-                <a:cs typeface="Trebuchet MS" pitchFamily="34" charset="-120"/>
-              </a:rPr>
-              <a:t>tion</a:t>
-            </a:r>
-            <a:endParaRPr lang="en-US" sz="1400" dirty="0"/>
-          </a:p>
-        </p:txBody>
-      </p:sp>
-      <p:sp>
-        <p:nvSpPr>
-          <p:cNvPr id="37" name="Shape 35"/>
-          <p:cNvSpPr/>
-          <p:nvPr/>
-        </p:nvSpPr>
-        <p:spPr>
-          <a:xfrm>
-            <a:off x="365760" y="4096512"/>
-            <a:ext cx="1371600" cy="804672"/>
+            <a:off x="1874520" y="4096512"/>
+            <a:ext cx="6903720" cy="804672"/>
           </a:xfrm>
           <a:prstGeom prst="rect">
             <a:avLst>
@@ -14027,85 +14364,19 @@
             </a:avLst>
           </a:prstGeom>
           <a:solidFill>
-            <a:srgbClr val="E2E8F0"/>
+            <a:srgbClr val="F8FAFC"/>
           </a:solidFill>
           <a:ln w="12700">
             <a:solidFill>
               <a:srgbClr val="E2E8F0"/>
             </a:solidFill>
-            <a:prstDash val="solid"/>
-          </a:ln>
-        </p:spPr>
-      </p:sp>
-      <p:sp>
-        <p:nvSpPr>
-          <p:cNvPr id="38" name="Text 36"/>
-          <p:cNvSpPr/>
-          <p:nvPr/>
-        </p:nvSpPr>
-        <p:spPr>
-          <a:xfrm>
-            <a:off x="365760" y="4096512"/>
-            <a:ext cx="1371600" cy="804672"/>
-          </a:xfrm>
-          <a:prstGeom prst="rect">
-            <a:avLst/>
-          </a:prstGeom>
-          <a:noFill/>
-          <a:ln/>
-        </p:spPr>
-        <p:txBody>
-          <a:bodyPr wrap="square" lIns="0" tIns="0" rIns="0" bIns="0" rtlCol="0" anchor="ctr"/>
-          <a:lstStyle/>
-          <a:p>
-            <a:pPr algn="ctr" indent="0" marL="0">
-              <a:buNone/>
-            </a:pPr>
-            <a:r>
-              <a:rPr lang="en-US" sz="1100" b="1" dirty="0">
-                <a:solidFill>
-                  <a:srgbClr val="475569"/>
-                </a:solidFill>
-                <a:latin typeface="Trebuchet MS" pitchFamily="34" charset="0"/>
-                <a:ea typeface="Trebuchet MS" pitchFamily="34" charset="-122"/>
-                <a:cs typeface="Trebuchet MS" pitchFamily="34" charset="-120"/>
-              </a:rPr>
-              <a:t>Phonemes</a:t>
-            </a:r>
-            <a:endParaRPr lang="en-US" sz="1100" dirty="0"/>
-          </a:p>
-        </p:txBody>
-      </p:sp>
-      <p:sp>
-        <p:nvSpPr>
-          <p:cNvPr id="39" name="Shape 37"/>
-          <p:cNvSpPr/>
-          <p:nvPr/>
-        </p:nvSpPr>
-        <p:spPr>
-          <a:xfrm>
-            <a:off x="1874520" y="4096512"/>
-            <a:ext cx="6903720" cy="804672"/>
-          </a:xfrm>
-          <a:prstGeom prst="rect">
-            <a:avLst>
-              <a:gd name="adj" fmla="val 6818"/>
-            </a:avLst>
-          </a:prstGeom>
-          <a:solidFill>
-            <a:srgbClr val="F8FAFC"/>
-          </a:solidFill>
-          <a:ln w="12700">
-            <a:solidFill>
-              <a:srgbClr val="E2E8F0"/>
-            </a:solidFill>
             <a:prstDash val="dash"/>
           </a:ln>
         </p:spPr>
       </p:sp>
       <p:sp>
         <p:nvSpPr>
-          <p:cNvPr id="40" name="Text 38"/>
+          <p:cNvPr id="33" name="Text 31"/>
           <p:cNvSpPr/>
           <p:nvPr/>
         </p:nvSpPr>
@@ -14832,7 +15103,7 @@
                 <a:ea typeface="Trebuchet MS" pitchFamily="34" charset="-122"/>
                 <a:cs typeface="Trebuchet MS" pitchFamily="34" charset="-120"/>
               </a:rPr>
-              <a:t>reaction</a:t>
+              <a:t>react</a:t>
             </a:r>
             <a:endParaRPr lang="en-US" sz="2800" dirty="0"/>
           </a:p>
@@ -14912,7 +15183,7 @@
         </p:nvSpPr>
         <p:spPr>
           <a:xfrm>
-            <a:off x="2221992" y="2258568"/>
+            <a:off x="2938272" y="2258568"/>
             <a:ext cx="1828800" cy="292608"/>
           </a:xfrm>
           <a:prstGeom prst="rect">
@@ -14946,7 +15217,7 @@
         </p:nvSpPr>
         <p:spPr>
           <a:xfrm>
-            <a:off x="2221992" y="2258568"/>
+            <a:off x="2938272" y="2258568"/>
             <a:ext cx="1828800" cy="292608"/>
           </a:xfrm>
           <a:prstGeom prst="rect">
@@ -14985,7 +15256,7 @@
         </p:nvSpPr>
         <p:spPr>
           <a:xfrm>
-            <a:off x="2221992" y="2569464"/>
+            <a:off x="2938272" y="2569464"/>
             <a:ext cx="1828800" cy="201168"/>
           </a:xfrm>
           <a:prstGeom prst="rect">
@@ -15010,7 +15281,7 @@
                 <a:ea typeface="Calibri" pitchFamily="34" charset="-122"/>
                 <a:cs typeface="Calibri" pitchFamily="34" charset="-120"/>
               </a:rPr>
-              <a:t>again, back</a:t>
+              <a:t>back, again</a:t>
             </a:r>
             <a:endParaRPr lang="en-US" sz="850" dirty="0"/>
           </a:p>
@@ -15024,7 +15295,7 @@
         </p:nvSpPr>
         <p:spPr>
           <a:xfrm>
-            <a:off x="4370832" y="2258568"/>
+            <a:off x="5803392" y="2258568"/>
             <a:ext cx="1828800" cy="292608"/>
           </a:xfrm>
           <a:prstGeom prst="rect">
@@ -15058,7 +15329,7 @@
         </p:nvSpPr>
         <p:spPr>
           <a:xfrm>
-            <a:off x="4370832" y="2258568"/>
+            <a:off x="5803392" y="2258568"/>
             <a:ext cx="1828800" cy="292608"/>
           </a:xfrm>
           <a:prstGeom prst="rect">
@@ -15097,7 +15368,7 @@
         </p:nvSpPr>
         <p:spPr>
           <a:xfrm>
-            <a:off x="4370832" y="2569464"/>
+            <a:off x="5803392" y="2569464"/>
             <a:ext cx="1828800" cy="201168"/>
           </a:xfrm>
           <a:prstGeom prst="rect">
@@ -15122,7 +15393,7 @@
                 <a:ea typeface="Calibri" pitchFamily="34" charset="-122"/>
                 <a:cs typeface="Calibri" pitchFamily="34" charset="-120"/>
               </a:rPr>
-              <a:t>to do, to act</a:t>
+              <a:t>to do, to drive</a:t>
             </a:r>
             <a:endParaRPr lang="en-US" sz="850" dirty="0"/>
           </a:p>
@@ -15136,30 +15407,23 @@
         </p:nvSpPr>
         <p:spPr>
           <a:xfrm>
-            <a:off x="6519672" y="2258568"/>
-            <a:ext cx="1828800" cy="292608"/>
+            <a:off x="365760" y="3273552"/>
+            <a:ext cx="1371600" cy="658368"/>
           </a:xfrm>
           <a:prstGeom prst="rect">
             <a:avLst>
-              <a:gd name="adj" fmla="val 25000"/>
+              <a:gd name="adj" fmla="val 8333"/>
             </a:avLst>
           </a:prstGeom>
           <a:solidFill>
-            <a:srgbClr val="FCE7F3"/>
-          </a:solidFill>
-          <a:ln w="19050">
-            <a:solidFill>
-              <a:srgbClr val="DB2777"/>
-            </a:solidFill>
-            <a:prstDash val="solid"/>
-          </a:ln>
-          <a:effectLst>
-            <a:outerShdw sx="100000" sy="100000" kx="0" ky="0" algn="bl" rotWithShape="0" blurRad="101600" dist="38100" dir="8100000">
-              <a:srgbClr val="000000">
-                <a:alpha val="12000"/>
-              </a:srgbClr>
-            </a:outerShdw>
-          </a:effectLst>
+            <a:srgbClr val="E2E8F0"/>
+          </a:solidFill>
+          <a:ln w="12700">
+            <a:solidFill>
+              <a:srgbClr val="E2E8F0"/>
+            </a:solidFill>
+            <a:prstDash val="solid"/>
+          </a:ln>
         </p:spPr>
       </p:sp>
       <p:sp>
@@ -15170,125 +15434,47 @@
         </p:nvSpPr>
         <p:spPr>
           <a:xfrm>
-            <a:off x="6519672" y="2258568"/>
-            <a:ext cx="1828800" cy="292608"/>
-          </a:xfrm>
-          <a:prstGeom prst="rect">
-            <a:avLst/>
-          </a:prstGeom>
-          <a:noFill/>
-          <a:ln/>
-        </p:spPr>
-        <p:txBody>
-          <a:bodyPr wrap="square" lIns="0" tIns="0" rIns="0" bIns="0" rtlCol="0" anchor="ctr"/>
-          <a:lstStyle/>
-          <a:p>
-            <a:pPr algn="ctr" indent="0" marL="0">
-              <a:buNone/>
-            </a:pPr>
-            <a:r>
-              <a:rPr lang="en-US" sz="1300" b="1" dirty="0">
-                <a:solidFill>
-                  <a:srgbClr val="9D174D"/>
+            <a:off x="365760" y="3273552"/>
+            <a:ext cx="1371600" cy="658368"/>
+          </a:xfrm>
+          <a:prstGeom prst="rect">
+            <a:avLst/>
+          </a:prstGeom>
+          <a:noFill/>
+          <a:ln/>
+        </p:spPr>
+        <p:txBody>
+          <a:bodyPr wrap="square" lIns="0" tIns="0" rIns="0" bIns="0" rtlCol="0" anchor="ctr"/>
+          <a:lstStyle/>
+          <a:p>
+            <a:pPr algn="ctr" indent="0" marL="0">
+              <a:buNone/>
+            </a:pPr>
+            <a:r>
+              <a:rPr lang="en-US" sz="1100" b="1" dirty="0">
+                <a:solidFill>
+                  <a:srgbClr val="475569"/>
                 </a:solidFill>
                 <a:latin typeface="Trebuchet MS" pitchFamily="34" charset="0"/>
                 <a:ea typeface="Trebuchet MS" pitchFamily="34" charset="-122"/>
                 <a:cs typeface="Trebuchet MS" pitchFamily="34" charset="-120"/>
               </a:rPr>
-              <a:t>ion</a:t>
-            </a:r>
-            <a:endParaRPr lang="en-US" sz="1300" dirty="0"/>
-          </a:p>
-        </p:txBody>
-      </p:sp>
-      <p:sp>
-        <p:nvSpPr>
-          <p:cNvPr id="24" name="Text 22"/>
-          <p:cNvSpPr/>
-          <p:nvPr/>
-        </p:nvSpPr>
-        <p:spPr>
-          <a:xfrm>
-            <a:off x="6519672" y="2569464"/>
-            <a:ext cx="1828800" cy="201168"/>
-          </a:xfrm>
-          <a:prstGeom prst="rect">
-            <a:avLst/>
-          </a:prstGeom>
-          <a:noFill/>
-          <a:ln/>
-        </p:spPr>
-        <p:txBody>
-          <a:bodyPr wrap="square" lIns="0" tIns="0" rIns="0" bIns="0" rtlCol="0" anchor="t"/>
-          <a:lstStyle/>
-          <a:p>
-            <a:pPr algn="ctr" indent="0" marL="0">
-              <a:buNone/>
-            </a:pPr>
-            <a:r>
-              <a:rPr lang="en-US" sz="850" dirty="0">
-                <a:solidFill>
-                  <a:srgbClr val="475569"/>
-                </a:solidFill>
-                <a:latin typeface="Calibri" pitchFamily="34" charset="0"/>
-                <a:ea typeface="Calibri" pitchFamily="34" charset="-122"/>
-                <a:cs typeface="Calibri" pitchFamily="34" charset="-120"/>
-              </a:rPr>
-              <a:t>the act or result of</a:t>
-            </a:r>
-            <a:endParaRPr lang="en-US" sz="850" dirty="0"/>
-          </a:p>
-        </p:txBody>
-      </p:sp>
-      <p:sp>
-        <p:nvSpPr>
-          <p:cNvPr id="25" name="Text 23"/>
-          <p:cNvSpPr/>
-          <p:nvPr/>
-        </p:nvSpPr>
-        <p:spPr>
-          <a:xfrm>
-            <a:off x="6519672" y="2752344"/>
-            <a:ext cx="1828800" cy="182880"/>
-          </a:xfrm>
-          <a:prstGeom prst="rect">
-            <a:avLst/>
-          </a:prstGeom>
-          <a:noFill/>
-          <a:ln/>
-        </p:spPr>
-        <p:txBody>
-          <a:bodyPr wrap="square" lIns="0" tIns="0" rIns="0" bIns="0" rtlCol="0" anchor="t"/>
-          <a:lstStyle/>
-          <a:p>
-            <a:pPr algn="ctr" indent="0" marL="0">
-              <a:buNone/>
-            </a:pPr>
-            <a:r>
-              <a:rPr lang="en-US" sz="700" i="1" dirty="0">
-                <a:solidFill>
-                  <a:srgbClr val="94A3B8"/>
-                </a:solidFill>
-                <a:latin typeface="Calibri" pitchFamily="34" charset="0"/>
-                <a:ea typeface="Calibri" pitchFamily="34" charset="-122"/>
-                <a:cs typeface="Calibri" pitchFamily="34" charset="-120"/>
-              </a:rPr>
-              <a:t>'t' + 'ion' makes /shun/</a:t>
-            </a:r>
-            <a:endParaRPr lang="en-US" sz="700" dirty="0"/>
-          </a:p>
-        </p:txBody>
-      </p:sp>
-      <p:sp>
-        <p:nvSpPr>
-          <p:cNvPr id="26" name="Shape 24"/>
-          <p:cNvSpPr/>
-          <p:nvPr/>
-        </p:nvSpPr>
-        <p:spPr>
-          <a:xfrm>
-            <a:off x="365760" y="3273552"/>
-            <a:ext cx="1371600" cy="658368"/>
+              <a:t>Syllables</a:t>
+            </a:r>
+            <a:endParaRPr lang="en-US" sz="1100" dirty="0"/>
+          </a:p>
+        </p:txBody>
+      </p:sp>
+      <p:sp>
+        <p:nvSpPr>
+          <p:cNvPr id="24" name="Shape 22"/>
+          <p:cNvSpPr/>
+          <p:nvPr/>
+        </p:nvSpPr>
+        <p:spPr>
+          <a:xfrm>
+            <a:off x="1874520" y="3273552"/>
+            <a:ext cx="6903720" cy="658368"/>
           </a:xfrm>
           <a:prstGeom prst="rect">
             <a:avLst>
@@ -15296,50 +15482,248 @@
             </a:avLst>
           </a:prstGeom>
           <a:solidFill>
-            <a:srgbClr val="E2E8F0"/>
-          </a:solidFill>
-          <a:ln w="12700">
-            <a:solidFill>
-              <a:srgbClr val="E2E8F0"/>
-            </a:solidFill>
-            <a:prstDash val="solid"/>
-          </a:ln>
-        </p:spPr>
-      </p:sp>
-      <p:sp>
-        <p:nvSpPr>
-          <p:cNvPr id="27" name="Text 25"/>
-          <p:cNvSpPr/>
-          <p:nvPr/>
-        </p:nvSpPr>
-        <p:spPr>
-          <a:xfrm>
-            <a:off x="365760" y="3273552"/>
-            <a:ext cx="1371600" cy="658368"/>
-          </a:xfrm>
-          <a:prstGeom prst="rect">
-            <a:avLst/>
-          </a:prstGeom>
-          <a:noFill/>
-          <a:ln/>
-        </p:spPr>
-        <p:txBody>
-          <a:bodyPr wrap="square" lIns="0" tIns="0" rIns="0" bIns="0" rtlCol="0" anchor="ctr"/>
-          <a:lstStyle/>
-          <a:p>
-            <a:pPr algn="ctr" indent="0" marL="0">
-              <a:buNone/>
-            </a:pPr>
-            <a:r>
-              <a:rPr lang="en-US" sz="1100" b="1" dirty="0">
-                <a:solidFill>
-                  <a:srgbClr val="475569"/>
+            <a:srgbClr val="CCFBF1"/>
+          </a:solidFill>
+          <a:ln w="12700">
+            <a:solidFill>
+              <a:srgbClr val="0D9488"/>
+            </a:solidFill>
+            <a:prstDash val="solid"/>
+          </a:ln>
+        </p:spPr>
+      </p:sp>
+      <p:sp>
+        <p:nvSpPr>
+          <p:cNvPr id="25" name="Shape 23"/>
+          <p:cNvSpPr/>
+          <p:nvPr/>
+        </p:nvSpPr>
+        <p:spPr>
+          <a:xfrm>
+            <a:off x="2999232" y="3364992"/>
+            <a:ext cx="1645920" cy="475488"/>
+          </a:xfrm>
+          <a:prstGeom prst="rect">
+            <a:avLst>
+              <a:gd name="adj" fmla="val 9615"/>
+            </a:avLst>
+          </a:prstGeom>
+          <a:solidFill>
+            <a:srgbClr val="FFFFFF"/>
+          </a:solidFill>
+          <a:ln w="12700">
+            <a:solidFill>
+              <a:srgbClr val="0D9488"/>
+            </a:solidFill>
+            <a:prstDash val="solid"/>
+          </a:ln>
+        </p:spPr>
+      </p:sp>
+      <p:sp>
+        <p:nvSpPr>
+          <p:cNvPr id="26" name="Text 24"/>
+          <p:cNvSpPr/>
+          <p:nvPr/>
+        </p:nvSpPr>
+        <p:spPr>
+          <a:xfrm>
+            <a:off x="2999232" y="3364992"/>
+            <a:ext cx="1645920" cy="475488"/>
+          </a:xfrm>
+          <a:prstGeom prst="rect">
+            <a:avLst/>
+          </a:prstGeom>
+          <a:noFill/>
+          <a:ln/>
+        </p:spPr>
+        <p:txBody>
+          <a:bodyPr wrap="square" lIns="0" tIns="0" rIns="0" bIns="0" rtlCol="0" anchor="ctr"/>
+          <a:lstStyle/>
+          <a:p>
+            <a:pPr algn="ctr" indent="0" marL="0">
+              <a:buNone/>
+            </a:pPr>
+            <a:r>
+              <a:rPr lang="en-US" sz="1400" b="1" dirty="0">
+                <a:solidFill>
+                  <a:srgbClr val="0D9488"/>
                 </a:solidFill>
                 <a:latin typeface="Trebuchet MS" pitchFamily="34" charset="0"/>
                 <a:ea typeface="Trebuchet MS" pitchFamily="34" charset="-122"/>
                 <a:cs typeface="Trebuchet MS" pitchFamily="34" charset="-120"/>
               </a:rPr>
-              <a:t>Syllables</a:t>
+              <a:t>re</a:t>
+            </a:r>
+            <a:endParaRPr lang="en-US" sz="1400" dirty="0"/>
+          </a:p>
+        </p:txBody>
+      </p:sp>
+      <p:sp>
+        <p:nvSpPr>
+          <p:cNvPr id="27" name="Text 25"/>
+          <p:cNvSpPr/>
+          <p:nvPr/>
+        </p:nvSpPr>
+        <p:spPr>
+          <a:xfrm>
+            <a:off x="4645152" y="3364992"/>
+            <a:ext cx="1097280" cy="475488"/>
+          </a:xfrm>
+          <a:prstGeom prst="rect">
+            <a:avLst/>
+          </a:prstGeom>
+          <a:noFill/>
+          <a:ln/>
+        </p:spPr>
+        <p:txBody>
+          <a:bodyPr wrap="square" lIns="0" tIns="0" rIns="0" bIns="0" rtlCol="0" anchor="ctr"/>
+          <a:lstStyle/>
+          <a:p>
+            <a:pPr algn="ctr" indent="0" marL="0">
+              <a:buNone/>
+            </a:pPr>
+            <a:r>
+              <a:rPr lang="en-US" sz="1600" b="1" dirty="0">
+                <a:solidFill>
+                  <a:srgbClr val="0D9488"/>
+                </a:solidFill>
+                <a:latin typeface="Trebuchet MS" pitchFamily="34" charset="0"/>
+                <a:ea typeface="Trebuchet MS" pitchFamily="34" charset="-122"/>
+                <a:cs typeface="Trebuchet MS" pitchFamily="34" charset="-120"/>
+              </a:rPr>
+              <a:t>·</a:t>
+            </a:r>
+            <a:endParaRPr lang="en-US" sz="1600" dirty="0"/>
+          </a:p>
+        </p:txBody>
+      </p:sp>
+      <p:sp>
+        <p:nvSpPr>
+          <p:cNvPr id="28" name="Shape 26"/>
+          <p:cNvSpPr/>
+          <p:nvPr/>
+        </p:nvSpPr>
+        <p:spPr>
+          <a:xfrm>
+            <a:off x="5742432" y="3364992"/>
+            <a:ext cx="1645920" cy="475488"/>
+          </a:xfrm>
+          <a:prstGeom prst="rect">
+            <a:avLst>
+              <a:gd name="adj" fmla="val 9615"/>
+            </a:avLst>
+          </a:prstGeom>
+          <a:solidFill>
+            <a:srgbClr val="FFFFFF"/>
+          </a:solidFill>
+          <a:ln w="12700">
+            <a:solidFill>
+              <a:srgbClr val="0D9488"/>
+            </a:solidFill>
+            <a:prstDash val="solid"/>
+          </a:ln>
+        </p:spPr>
+      </p:sp>
+      <p:sp>
+        <p:nvSpPr>
+          <p:cNvPr id="29" name="Text 27"/>
+          <p:cNvSpPr/>
+          <p:nvPr/>
+        </p:nvSpPr>
+        <p:spPr>
+          <a:xfrm>
+            <a:off x="5742432" y="3364992"/>
+            <a:ext cx="1645920" cy="475488"/>
+          </a:xfrm>
+          <a:prstGeom prst="rect">
+            <a:avLst/>
+          </a:prstGeom>
+          <a:noFill/>
+          <a:ln/>
+        </p:spPr>
+        <p:txBody>
+          <a:bodyPr wrap="square" lIns="0" tIns="0" rIns="0" bIns="0" rtlCol="0" anchor="ctr"/>
+          <a:lstStyle/>
+          <a:p>
+            <a:pPr algn="ctr" indent="0" marL="0">
+              <a:buNone/>
+            </a:pPr>
+            <a:r>
+              <a:rPr lang="en-US" sz="1400" b="1" dirty="0">
+                <a:solidFill>
+                  <a:srgbClr val="0D9488"/>
+                </a:solidFill>
+                <a:latin typeface="Trebuchet MS" pitchFamily="34" charset="0"/>
+                <a:ea typeface="Trebuchet MS" pitchFamily="34" charset="-122"/>
+                <a:cs typeface="Trebuchet MS" pitchFamily="34" charset="-120"/>
+              </a:rPr>
+              <a:t>act</a:t>
+            </a:r>
+            <a:endParaRPr lang="en-US" sz="1400" dirty="0"/>
+          </a:p>
+        </p:txBody>
+      </p:sp>
+      <p:sp>
+        <p:nvSpPr>
+          <p:cNvPr id="30" name="Shape 28"/>
+          <p:cNvSpPr/>
+          <p:nvPr/>
+        </p:nvSpPr>
+        <p:spPr>
+          <a:xfrm>
+            <a:off x="365760" y="4096512"/>
+            <a:ext cx="1371600" cy="804672"/>
+          </a:xfrm>
+          <a:prstGeom prst="rect">
+            <a:avLst>
+              <a:gd name="adj" fmla="val 6818"/>
+            </a:avLst>
+          </a:prstGeom>
+          <a:solidFill>
+            <a:srgbClr val="E2E8F0"/>
+          </a:solidFill>
+          <a:ln w="12700">
+            <a:solidFill>
+              <a:srgbClr val="E2E8F0"/>
+            </a:solidFill>
+            <a:prstDash val="solid"/>
+          </a:ln>
+        </p:spPr>
+      </p:sp>
+      <p:sp>
+        <p:nvSpPr>
+          <p:cNvPr id="31" name="Text 29"/>
+          <p:cNvSpPr/>
+          <p:nvPr/>
+        </p:nvSpPr>
+        <p:spPr>
+          <a:xfrm>
+            <a:off x="365760" y="4096512"/>
+            <a:ext cx="1371600" cy="804672"/>
+          </a:xfrm>
+          <a:prstGeom prst="rect">
+            <a:avLst/>
+          </a:prstGeom>
+          <a:noFill/>
+          <a:ln/>
+        </p:spPr>
+        <p:txBody>
+          <a:bodyPr wrap="square" lIns="0" tIns="0" rIns="0" bIns="0" rtlCol="0" anchor="ctr"/>
+          <a:lstStyle/>
+          <a:p>
+            <a:pPr algn="ctr" indent="0" marL="0">
+              <a:buNone/>
+            </a:pPr>
+            <a:r>
+              <a:rPr lang="en-US" sz="1100" b="1" dirty="0">
+                <a:solidFill>
+                  <a:srgbClr val="475569"/>
+                </a:solidFill>
+                <a:latin typeface="Trebuchet MS" pitchFamily="34" charset="0"/>
+                <a:ea typeface="Trebuchet MS" pitchFamily="34" charset="-122"/>
+                <a:cs typeface="Trebuchet MS" pitchFamily="34" charset="-120"/>
+              </a:rPr>
+              <a:t>Phonemes</a:t>
             </a:r>
             <a:endParaRPr lang="en-US" sz="1100" dirty="0"/>
           </a:p>
@@ -15347,13 +15731,13 @@
       </p:sp>
       <p:sp>
         <p:nvSpPr>
-          <p:cNvPr id="28" name="Shape 26"/>
-          <p:cNvSpPr/>
-          <p:nvPr/>
-        </p:nvSpPr>
-        <p:spPr>
-          <a:xfrm>
-            <a:off x="1874520" y="3273552"/>
+          <p:cNvPr id="32" name="Shape 30"/>
+          <p:cNvSpPr/>
+          <p:nvPr/>
+        </p:nvSpPr>
+        <p:spPr>
+          <a:xfrm>
+            <a:off x="1874520" y="4096512"/>
             <a:ext cx="6903720" cy="658368"/>
           </a:xfrm>
           <a:prstGeom prst="rect">
@@ -15362,30 +15746,30 @@
             </a:avLst>
           </a:prstGeom>
           <a:solidFill>
-            <a:srgbClr val="CCFBF1"/>
-          </a:solidFill>
-          <a:ln w="12700">
-            <a:solidFill>
-              <a:srgbClr val="0D9488"/>
-            </a:solidFill>
-            <a:prstDash val="solid"/>
-          </a:ln>
-        </p:spPr>
-      </p:sp>
-      <p:sp>
-        <p:nvSpPr>
-          <p:cNvPr id="29" name="Shape 27"/>
-          <p:cNvSpPr/>
-          <p:nvPr/>
-        </p:nvSpPr>
-        <p:spPr>
-          <a:xfrm>
-            <a:off x="2313432" y="3364992"/>
-            <a:ext cx="1645920" cy="475488"/>
+            <a:srgbClr val="FCE7F3"/>
+          </a:solidFill>
+          <a:ln w="12700">
+            <a:solidFill>
+              <a:srgbClr val="DB2777"/>
+            </a:solidFill>
+            <a:prstDash val="solid"/>
+          </a:ln>
+        </p:spPr>
+      </p:sp>
+      <p:sp>
+        <p:nvSpPr>
+          <p:cNvPr id="33" name="Shape 31"/>
+          <p:cNvSpPr/>
+          <p:nvPr/>
+        </p:nvSpPr>
+        <p:spPr>
+          <a:xfrm>
+            <a:off x="2427732" y="4169664"/>
+            <a:ext cx="685800" cy="475488"/>
           </a:xfrm>
           <a:prstGeom prst="rect">
             <a:avLst>
-              <a:gd name="adj" fmla="val 9615"/>
+              <a:gd name="adj" fmla="val 7692"/>
             </a:avLst>
           </a:prstGeom>
           <a:solidFill>
@@ -15393,104 +15777,131 @@
           </a:solidFill>
           <a:ln w="12700">
             <a:solidFill>
-              <a:srgbClr val="0D9488"/>
-            </a:solidFill>
-            <a:prstDash val="solid"/>
-          </a:ln>
-        </p:spPr>
-      </p:sp>
-      <p:sp>
-        <p:nvSpPr>
-          <p:cNvPr id="30" name="Text 28"/>
-          <p:cNvSpPr/>
-          <p:nvPr/>
-        </p:nvSpPr>
-        <p:spPr>
-          <a:xfrm>
-            <a:off x="2313432" y="3364992"/>
-            <a:ext cx="1645920" cy="475488"/>
-          </a:xfrm>
-          <a:prstGeom prst="rect">
-            <a:avLst/>
-          </a:prstGeom>
-          <a:noFill/>
-          <a:ln/>
-        </p:spPr>
-        <p:txBody>
-          <a:bodyPr wrap="square" lIns="0" tIns="0" rIns="0" bIns="0" rtlCol="0" anchor="ctr"/>
-          <a:lstStyle/>
-          <a:p>
-            <a:pPr algn="ctr" indent="0" marL="0">
-              <a:buNone/>
-            </a:pPr>
-            <a:r>
-              <a:rPr lang="en-US" sz="1400" b="1" dirty="0">
-                <a:solidFill>
-                  <a:srgbClr val="0D9488"/>
+              <a:srgbClr val="DB2777"/>
+            </a:solidFill>
+            <a:prstDash val="solid"/>
+          </a:ln>
+        </p:spPr>
+      </p:sp>
+      <p:sp>
+        <p:nvSpPr>
+          <p:cNvPr id="34" name="Text 32"/>
+          <p:cNvSpPr/>
+          <p:nvPr/>
+        </p:nvSpPr>
+        <p:spPr>
+          <a:xfrm>
+            <a:off x="2427732" y="4169664"/>
+            <a:ext cx="685800" cy="475488"/>
+          </a:xfrm>
+          <a:prstGeom prst="rect">
+            <a:avLst/>
+          </a:prstGeom>
+          <a:noFill/>
+          <a:ln/>
+        </p:spPr>
+        <p:txBody>
+          <a:bodyPr wrap="square" lIns="0" tIns="0" rIns="0" bIns="0" rtlCol="0" anchor="ctr"/>
+          <a:lstStyle/>
+          <a:p>
+            <a:pPr algn="ctr" indent="0" marL="0">
+              <a:buNone/>
+            </a:pPr>
+            <a:r>
+              <a:rPr lang="en-US" sz="900" b="1" dirty="0">
+                <a:solidFill>
+                  <a:srgbClr val="9D174D"/>
                 </a:solidFill>
                 <a:latin typeface="Trebuchet MS" pitchFamily="34" charset="0"/>
                 <a:ea typeface="Trebuchet MS" pitchFamily="34" charset="-122"/>
                 <a:cs typeface="Trebuchet MS" pitchFamily="34" charset="-120"/>
               </a:rPr>
-              <a:t>re</a:t>
-            </a:r>
-            <a:endParaRPr lang="en-US" sz="1400" dirty="0"/>
-          </a:p>
-        </p:txBody>
-      </p:sp>
-      <p:sp>
-        <p:nvSpPr>
-          <p:cNvPr id="31" name="Text 29"/>
-          <p:cNvSpPr/>
-          <p:nvPr/>
-        </p:nvSpPr>
-        <p:spPr>
-          <a:xfrm>
-            <a:off x="3959352" y="3364992"/>
-            <a:ext cx="411480" cy="475488"/>
-          </a:xfrm>
-          <a:prstGeom prst="rect">
-            <a:avLst/>
-          </a:prstGeom>
-          <a:noFill/>
-          <a:ln/>
-        </p:spPr>
-        <p:txBody>
-          <a:bodyPr wrap="square" lIns="0" tIns="0" rIns="0" bIns="0" rtlCol="0" anchor="ctr"/>
-          <a:lstStyle/>
-          <a:p>
-            <a:pPr algn="ctr" indent="0" marL="0">
-              <a:buNone/>
-            </a:pPr>
-            <a:r>
-              <a:rPr lang="en-US" sz="1600" b="1" dirty="0">
-                <a:solidFill>
-                  <a:srgbClr val="0D9488"/>
+              <a:t>r</a:t>
+            </a:r>
+            <a:endParaRPr lang="en-US" sz="900" dirty="0"/>
+          </a:p>
+        </p:txBody>
+      </p:sp>
+      <p:sp>
+        <p:nvSpPr>
+          <p:cNvPr id="35" name="Shape 33"/>
+          <p:cNvSpPr/>
+          <p:nvPr/>
+        </p:nvSpPr>
+        <p:spPr>
+          <a:xfrm>
+            <a:off x="3639312" y="4169664"/>
+            <a:ext cx="685800" cy="475488"/>
+          </a:xfrm>
+          <a:prstGeom prst="rect">
+            <a:avLst>
+              <a:gd name="adj" fmla="val 7692"/>
+            </a:avLst>
+          </a:prstGeom>
+          <a:solidFill>
+            <a:srgbClr val="FFFFFF"/>
+          </a:solidFill>
+          <a:ln w="12700">
+            <a:solidFill>
+              <a:srgbClr val="DB2777"/>
+            </a:solidFill>
+            <a:prstDash val="solid"/>
+          </a:ln>
+        </p:spPr>
+      </p:sp>
+      <p:sp>
+        <p:nvSpPr>
+          <p:cNvPr id="36" name="Text 34"/>
+          <p:cNvSpPr/>
+          <p:nvPr/>
+        </p:nvSpPr>
+        <p:spPr>
+          <a:xfrm>
+            <a:off x="3639312" y="4169664"/>
+            <a:ext cx="685800" cy="475488"/>
+          </a:xfrm>
+          <a:prstGeom prst="rect">
+            <a:avLst/>
+          </a:prstGeom>
+          <a:noFill/>
+          <a:ln/>
+        </p:spPr>
+        <p:txBody>
+          <a:bodyPr wrap="square" lIns="0" tIns="0" rIns="0" bIns="0" rtlCol="0" anchor="ctr"/>
+          <a:lstStyle/>
+          <a:p>
+            <a:pPr algn="ctr" indent="0" marL="0">
+              <a:buNone/>
+            </a:pPr>
+            <a:r>
+              <a:rPr lang="en-US" sz="900" b="1" dirty="0">
+                <a:solidFill>
+                  <a:srgbClr val="9D174D"/>
                 </a:solidFill>
                 <a:latin typeface="Trebuchet MS" pitchFamily="34" charset="0"/>
                 <a:ea typeface="Trebuchet MS" pitchFamily="34" charset="-122"/>
                 <a:cs typeface="Trebuchet MS" pitchFamily="34" charset="-120"/>
               </a:rPr>
-              <a:t>·</a:t>
-            </a:r>
-            <a:endParaRPr lang="en-US" sz="1600" dirty="0"/>
-          </a:p>
-        </p:txBody>
-      </p:sp>
-      <p:sp>
-        <p:nvSpPr>
-          <p:cNvPr id="32" name="Shape 30"/>
-          <p:cNvSpPr/>
-          <p:nvPr/>
-        </p:nvSpPr>
-        <p:spPr>
-          <a:xfrm>
-            <a:off x="4370832" y="3364992"/>
-            <a:ext cx="1645920" cy="475488"/>
+              <a:t>e</a:t>
+            </a:r>
+            <a:endParaRPr lang="en-US" sz="900" dirty="0"/>
+          </a:p>
+        </p:txBody>
+      </p:sp>
+      <p:sp>
+        <p:nvSpPr>
+          <p:cNvPr id="37" name="Shape 35"/>
+          <p:cNvSpPr/>
+          <p:nvPr/>
+        </p:nvSpPr>
+        <p:spPr>
+          <a:xfrm>
+            <a:off x="4850892" y="4169664"/>
+            <a:ext cx="685800" cy="475488"/>
           </a:xfrm>
           <a:prstGeom prst="rect">
             <a:avLst>
-              <a:gd name="adj" fmla="val 9615"/>
+              <a:gd name="adj" fmla="val 7692"/>
             </a:avLst>
           </a:prstGeom>
           <a:solidFill>
@@ -15498,104 +15909,131 @@
           </a:solidFill>
           <a:ln w="12700">
             <a:solidFill>
-              <a:srgbClr val="0D9488"/>
-            </a:solidFill>
-            <a:prstDash val="solid"/>
-          </a:ln>
-        </p:spPr>
-      </p:sp>
-      <p:sp>
-        <p:nvSpPr>
-          <p:cNvPr id="33" name="Text 31"/>
-          <p:cNvSpPr/>
-          <p:nvPr/>
-        </p:nvSpPr>
-        <p:spPr>
-          <a:xfrm>
-            <a:off x="4370832" y="3364992"/>
-            <a:ext cx="1645920" cy="475488"/>
-          </a:xfrm>
-          <a:prstGeom prst="rect">
-            <a:avLst/>
-          </a:prstGeom>
-          <a:noFill/>
-          <a:ln/>
-        </p:spPr>
-        <p:txBody>
-          <a:bodyPr wrap="square" lIns="0" tIns="0" rIns="0" bIns="0" rtlCol="0" anchor="ctr"/>
-          <a:lstStyle/>
-          <a:p>
-            <a:pPr algn="ctr" indent="0" marL="0">
-              <a:buNone/>
-            </a:pPr>
-            <a:r>
-              <a:rPr lang="en-US" sz="1400" b="1" dirty="0">
-                <a:solidFill>
-                  <a:srgbClr val="0D9488"/>
+              <a:srgbClr val="DB2777"/>
+            </a:solidFill>
+            <a:prstDash val="solid"/>
+          </a:ln>
+        </p:spPr>
+      </p:sp>
+      <p:sp>
+        <p:nvSpPr>
+          <p:cNvPr id="38" name="Text 36"/>
+          <p:cNvSpPr/>
+          <p:nvPr/>
+        </p:nvSpPr>
+        <p:spPr>
+          <a:xfrm>
+            <a:off x="4850892" y="4169664"/>
+            <a:ext cx="685800" cy="475488"/>
+          </a:xfrm>
+          <a:prstGeom prst="rect">
+            <a:avLst/>
+          </a:prstGeom>
+          <a:noFill/>
+          <a:ln/>
+        </p:spPr>
+        <p:txBody>
+          <a:bodyPr wrap="square" lIns="0" tIns="0" rIns="0" bIns="0" rtlCol="0" anchor="ctr"/>
+          <a:lstStyle/>
+          <a:p>
+            <a:pPr algn="ctr" indent="0" marL="0">
+              <a:buNone/>
+            </a:pPr>
+            <a:r>
+              <a:rPr lang="en-US" sz="900" b="1" dirty="0">
+                <a:solidFill>
+                  <a:srgbClr val="9D174D"/>
                 </a:solidFill>
                 <a:latin typeface="Trebuchet MS" pitchFamily="34" charset="0"/>
                 <a:ea typeface="Trebuchet MS" pitchFamily="34" charset="-122"/>
                 <a:cs typeface="Trebuchet MS" pitchFamily="34" charset="-120"/>
               </a:rPr>
-              <a:t>ac</a:t>
-            </a:r>
-            <a:endParaRPr lang="en-US" sz="1400" dirty="0"/>
-          </a:p>
-        </p:txBody>
-      </p:sp>
-      <p:sp>
-        <p:nvSpPr>
-          <p:cNvPr id="34" name="Text 32"/>
-          <p:cNvSpPr/>
-          <p:nvPr/>
-        </p:nvSpPr>
-        <p:spPr>
-          <a:xfrm>
-            <a:off x="6016752" y="3364992"/>
-            <a:ext cx="411480" cy="475488"/>
-          </a:xfrm>
-          <a:prstGeom prst="rect">
-            <a:avLst/>
-          </a:prstGeom>
-          <a:noFill/>
-          <a:ln/>
-        </p:spPr>
-        <p:txBody>
-          <a:bodyPr wrap="square" lIns="0" tIns="0" rIns="0" bIns="0" rtlCol="0" anchor="ctr"/>
-          <a:lstStyle/>
-          <a:p>
-            <a:pPr algn="ctr" indent="0" marL="0">
-              <a:buNone/>
-            </a:pPr>
-            <a:r>
-              <a:rPr lang="en-US" sz="1600" b="1" dirty="0">
-                <a:solidFill>
-                  <a:srgbClr val="0D9488"/>
+              <a:t>a</a:t>
+            </a:r>
+            <a:endParaRPr lang="en-US" sz="900" dirty="0"/>
+          </a:p>
+        </p:txBody>
+      </p:sp>
+      <p:sp>
+        <p:nvSpPr>
+          <p:cNvPr id="39" name="Shape 37"/>
+          <p:cNvSpPr/>
+          <p:nvPr/>
+        </p:nvSpPr>
+        <p:spPr>
+          <a:xfrm>
+            <a:off x="6062472" y="4169664"/>
+            <a:ext cx="685800" cy="475488"/>
+          </a:xfrm>
+          <a:prstGeom prst="rect">
+            <a:avLst>
+              <a:gd name="adj" fmla="val 7692"/>
+            </a:avLst>
+          </a:prstGeom>
+          <a:solidFill>
+            <a:srgbClr val="FFFFFF"/>
+          </a:solidFill>
+          <a:ln w="12700">
+            <a:solidFill>
+              <a:srgbClr val="DB2777"/>
+            </a:solidFill>
+            <a:prstDash val="solid"/>
+          </a:ln>
+        </p:spPr>
+      </p:sp>
+      <p:sp>
+        <p:nvSpPr>
+          <p:cNvPr id="40" name="Text 38"/>
+          <p:cNvSpPr/>
+          <p:nvPr/>
+        </p:nvSpPr>
+        <p:spPr>
+          <a:xfrm>
+            <a:off x="6062472" y="4169664"/>
+            <a:ext cx="685800" cy="475488"/>
+          </a:xfrm>
+          <a:prstGeom prst="rect">
+            <a:avLst/>
+          </a:prstGeom>
+          <a:noFill/>
+          <a:ln/>
+        </p:spPr>
+        <p:txBody>
+          <a:bodyPr wrap="square" lIns="0" tIns="0" rIns="0" bIns="0" rtlCol="0" anchor="ctr"/>
+          <a:lstStyle/>
+          <a:p>
+            <a:pPr algn="ctr" indent="0" marL="0">
+              <a:buNone/>
+            </a:pPr>
+            <a:r>
+              <a:rPr lang="en-US" sz="900" b="1" dirty="0">
+                <a:solidFill>
+                  <a:srgbClr val="9D174D"/>
                 </a:solidFill>
                 <a:latin typeface="Trebuchet MS" pitchFamily="34" charset="0"/>
                 <a:ea typeface="Trebuchet MS" pitchFamily="34" charset="-122"/>
                 <a:cs typeface="Trebuchet MS" pitchFamily="34" charset="-120"/>
               </a:rPr>
-              <a:t>·</a:t>
-            </a:r>
-            <a:endParaRPr lang="en-US" sz="1600" dirty="0"/>
-          </a:p>
-        </p:txBody>
-      </p:sp>
-      <p:sp>
-        <p:nvSpPr>
-          <p:cNvPr id="35" name="Shape 33"/>
-          <p:cNvSpPr/>
-          <p:nvPr/>
-        </p:nvSpPr>
-        <p:spPr>
-          <a:xfrm>
-            <a:off x="6428232" y="3364992"/>
-            <a:ext cx="1645920" cy="475488"/>
+              <a:t>c</a:t>
+            </a:r>
+            <a:endParaRPr lang="en-US" sz="900" dirty="0"/>
+          </a:p>
+        </p:txBody>
+      </p:sp>
+      <p:sp>
+        <p:nvSpPr>
+          <p:cNvPr id="41" name="Shape 39"/>
+          <p:cNvSpPr/>
+          <p:nvPr/>
+        </p:nvSpPr>
+        <p:spPr>
+          <a:xfrm>
+            <a:off x="7274052" y="4169664"/>
+            <a:ext cx="685800" cy="475488"/>
           </a:xfrm>
           <a:prstGeom prst="rect">
             <a:avLst>
-              <a:gd name="adj" fmla="val 9615"/>
+              <a:gd name="adj" fmla="val 7692"/>
             </a:avLst>
           </a:prstGeom>
           <a:solidFill>
@@ -15603,679 +16041,46 @@
           </a:solidFill>
           <a:ln w="12700">
             <a:solidFill>
-              <a:srgbClr val="0D9488"/>
-            </a:solidFill>
-            <a:prstDash val="solid"/>
-          </a:ln>
-        </p:spPr>
-      </p:sp>
-      <p:sp>
-        <p:nvSpPr>
-          <p:cNvPr id="36" name="Text 34"/>
-          <p:cNvSpPr/>
-          <p:nvPr/>
-        </p:nvSpPr>
-        <p:spPr>
-          <a:xfrm>
-            <a:off x="6428232" y="3364992"/>
-            <a:ext cx="1645920" cy="475488"/>
-          </a:xfrm>
-          <a:prstGeom prst="rect">
-            <a:avLst/>
-          </a:prstGeom>
-          <a:noFill/>
-          <a:ln/>
-        </p:spPr>
-        <p:txBody>
-          <a:bodyPr wrap="square" lIns="0" tIns="0" rIns="0" bIns="0" rtlCol="0" anchor="ctr"/>
-          <a:lstStyle/>
-          <a:p>
-            <a:pPr algn="ctr" indent="0" marL="0">
-              <a:buNone/>
-            </a:pPr>
-            <a:r>
-              <a:rPr lang="en-US" sz="1400" b="1" dirty="0">
-                <a:solidFill>
-                  <a:srgbClr val="0D9488"/>
+              <a:srgbClr val="DB2777"/>
+            </a:solidFill>
+            <a:prstDash val="solid"/>
+          </a:ln>
+        </p:spPr>
+      </p:sp>
+      <p:sp>
+        <p:nvSpPr>
+          <p:cNvPr id="42" name="Text 40"/>
+          <p:cNvSpPr/>
+          <p:nvPr/>
+        </p:nvSpPr>
+        <p:spPr>
+          <a:xfrm>
+            <a:off x="7274052" y="4169664"/>
+            <a:ext cx="685800" cy="475488"/>
+          </a:xfrm>
+          <a:prstGeom prst="rect">
+            <a:avLst/>
+          </a:prstGeom>
+          <a:noFill/>
+          <a:ln/>
+        </p:spPr>
+        <p:txBody>
+          <a:bodyPr wrap="square" lIns="0" tIns="0" rIns="0" bIns="0" rtlCol="0" anchor="ctr"/>
+          <a:lstStyle/>
+          <a:p>
+            <a:pPr algn="ctr" indent="0" marL="0">
+              <a:buNone/>
+            </a:pPr>
+            <a:r>
+              <a:rPr lang="en-US" sz="900" b="1" dirty="0">
+                <a:solidFill>
+                  <a:srgbClr val="9D174D"/>
                 </a:solidFill>
                 <a:latin typeface="Trebuchet MS" pitchFamily="34" charset="0"/>
                 <a:ea typeface="Trebuchet MS" pitchFamily="34" charset="-122"/>
                 <a:cs typeface="Trebuchet MS" pitchFamily="34" charset="-120"/>
               </a:rPr>
-              <a:t>tion</a:t>
-            </a:r>
-            <a:endParaRPr lang="en-US" sz="1400" dirty="0"/>
-          </a:p>
-        </p:txBody>
-      </p:sp>
-      <p:sp>
-        <p:nvSpPr>
-          <p:cNvPr id="37" name="Shape 35"/>
-          <p:cNvSpPr/>
-          <p:nvPr/>
-        </p:nvSpPr>
-        <p:spPr>
-          <a:xfrm>
-            <a:off x="365760" y="4096512"/>
-            <a:ext cx="1371600" cy="804672"/>
-          </a:xfrm>
-          <a:prstGeom prst="rect">
-            <a:avLst>
-              <a:gd name="adj" fmla="val 6818"/>
-            </a:avLst>
-          </a:prstGeom>
-          <a:solidFill>
-            <a:srgbClr val="E2E8F0"/>
-          </a:solidFill>
-          <a:ln w="12700">
-            <a:solidFill>
-              <a:srgbClr val="E2E8F0"/>
-            </a:solidFill>
-            <a:prstDash val="solid"/>
-          </a:ln>
-        </p:spPr>
-      </p:sp>
-      <p:sp>
-        <p:nvSpPr>
-          <p:cNvPr id="38" name="Text 36"/>
-          <p:cNvSpPr/>
-          <p:nvPr/>
-        </p:nvSpPr>
-        <p:spPr>
-          <a:xfrm>
-            <a:off x="365760" y="4096512"/>
-            <a:ext cx="1371600" cy="804672"/>
-          </a:xfrm>
-          <a:prstGeom prst="rect">
-            <a:avLst/>
-          </a:prstGeom>
-          <a:noFill/>
-          <a:ln/>
-        </p:spPr>
-        <p:txBody>
-          <a:bodyPr wrap="square" lIns="0" tIns="0" rIns="0" bIns="0" rtlCol="0" anchor="ctr"/>
-          <a:lstStyle/>
-          <a:p>
-            <a:pPr algn="ctr" indent="0" marL="0">
-              <a:buNone/>
-            </a:pPr>
-            <a:r>
-              <a:rPr lang="en-US" sz="1100" b="1" dirty="0">
-                <a:solidFill>
-                  <a:srgbClr val="475569"/>
-                </a:solidFill>
-                <a:latin typeface="Trebuchet MS" pitchFamily="34" charset="0"/>
-                <a:ea typeface="Trebuchet MS" pitchFamily="34" charset="-122"/>
-                <a:cs typeface="Trebuchet MS" pitchFamily="34" charset="-120"/>
-              </a:rPr>
-              <a:t>Phonemes</a:t>
-            </a:r>
-            <a:endParaRPr lang="en-US" sz="1100" dirty="0"/>
-          </a:p>
-        </p:txBody>
-      </p:sp>
-      <p:sp>
-        <p:nvSpPr>
-          <p:cNvPr id="39" name="Shape 37"/>
-          <p:cNvSpPr/>
-          <p:nvPr/>
-        </p:nvSpPr>
-        <p:spPr>
-          <a:xfrm>
-            <a:off x="1874520" y="4096512"/>
-            <a:ext cx="6903720" cy="804672"/>
-          </a:xfrm>
-          <a:prstGeom prst="rect">
-            <a:avLst>
-              <a:gd name="adj" fmla="val 6818"/>
-            </a:avLst>
-          </a:prstGeom>
-          <a:solidFill>
-            <a:srgbClr val="FCE7F3"/>
-          </a:solidFill>
-          <a:ln w="12700">
-            <a:solidFill>
-              <a:srgbClr val="DB2777"/>
-            </a:solidFill>
-            <a:prstDash val="solid"/>
-          </a:ln>
-        </p:spPr>
-      </p:sp>
-      <p:sp>
-        <p:nvSpPr>
-          <p:cNvPr id="40" name="Shape 38"/>
-          <p:cNvSpPr/>
-          <p:nvPr/>
-        </p:nvSpPr>
-        <p:spPr>
-          <a:xfrm>
-            <a:off x="2124837" y="4169664"/>
-            <a:ext cx="685800" cy="384048"/>
-          </a:xfrm>
-          <a:prstGeom prst="rect">
-            <a:avLst>
-              <a:gd name="adj" fmla="val 9524"/>
-            </a:avLst>
-          </a:prstGeom>
-          <a:solidFill>
-            <a:srgbClr val="FFFFFF"/>
-          </a:solidFill>
-          <a:ln w="12700">
-            <a:solidFill>
-              <a:srgbClr val="DB2777"/>
-            </a:solidFill>
-            <a:prstDash val="solid"/>
-          </a:ln>
-        </p:spPr>
-      </p:sp>
-      <p:sp>
-        <p:nvSpPr>
-          <p:cNvPr id="41" name="Text 39"/>
-          <p:cNvSpPr/>
-          <p:nvPr/>
-        </p:nvSpPr>
-        <p:spPr>
-          <a:xfrm>
-            <a:off x="2124837" y="4169664"/>
-            <a:ext cx="685800" cy="384048"/>
-          </a:xfrm>
-          <a:prstGeom prst="rect">
-            <a:avLst/>
-          </a:prstGeom>
-          <a:noFill/>
-          <a:ln/>
-        </p:spPr>
-        <p:txBody>
-          <a:bodyPr wrap="square" lIns="0" tIns="0" rIns="0" bIns="0" rtlCol="0" anchor="ctr"/>
-          <a:lstStyle/>
-          <a:p>
-            <a:pPr algn="ctr" indent="0" marL="0">
-              <a:buNone/>
-            </a:pPr>
-            <a:r>
-              <a:rPr lang="en-US" sz="900" b="1" dirty="0">
-                <a:solidFill>
-                  <a:srgbClr val="9D174D"/>
-                </a:solidFill>
-                <a:latin typeface="Trebuchet MS" pitchFamily="34" charset="0"/>
-                <a:ea typeface="Trebuchet MS" pitchFamily="34" charset="-122"/>
-                <a:cs typeface="Trebuchet MS" pitchFamily="34" charset="-120"/>
-              </a:rPr>
-              <a:t>r</a:t>
-            </a:r>
-            <a:endParaRPr lang="en-US" sz="900" dirty="0"/>
-          </a:p>
-        </p:txBody>
-      </p:sp>
-      <p:sp>
-        <p:nvSpPr>
-          <p:cNvPr id="42" name="Shape 40"/>
-          <p:cNvSpPr/>
-          <p:nvPr/>
-        </p:nvSpPr>
-        <p:spPr>
-          <a:xfrm>
-            <a:off x="3033522" y="4169664"/>
-            <a:ext cx="685800" cy="384048"/>
-          </a:xfrm>
-          <a:prstGeom prst="rect">
-            <a:avLst>
-              <a:gd name="adj" fmla="val 9524"/>
-            </a:avLst>
-          </a:prstGeom>
-          <a:solidFill>
-            <a:srgbClr val="FFFFFF"/>
-          </a:solidFill>
-          <a:ln w="12700">
-            <a:solidFill>
-              <a:srgbClr val="DB2777"/>
-            </a:solidFill>
-            <a:prstDash val="solid"/>
-          </a:ln>
-        </p:spPr>
-      </p:sp>
-      <p:sp>
-        <p:nvSpPr>
-          <p:cNvPr id="43" name="Text 41"/>
-          <p:cNvSpPr/>
-          <p:nvPr/>
-        </p:nvSpPr>
-        <p:spPr>
-          <a:xfrm>
-            <a:off x="3033522" y="4169664"/>
-            <a:ext cx="685800" cy="384048"/>
-          </a:xfrm>
-          <a:prstGeom prst="rect">
-            <a:avLst/>
-          </a:prstGeom>
-          <a:noFill/>
-          <a:ln/>
-        </p:spPr>
-        <p:txBody>
-          <a:bodyPr wrap="square" lIns="0" tIns="0" rIns="0" bIns="0" rtlCol="0" anchor="ctr"/>
-          <a:lstStyle/>
-          <a:p>
-            <a:pPr algn="ctr" indent="0" marL="0">
-              <a:buNone/>
-            </a:pPr>
-            <a:r>
-              <a:rPr lang="en-US" sz="900" b="1" dirty="0">
-                <a:solidFill>
-                  <a:srgbClr val="9D174D"/>
-                </a:solidFill>
-                <a:latin typeface="Trebuchet MS" pitchFamily="34" charset="0"/>
-                <a:ea typeface="Trebuchet MS" pitchFamily="34" charset="-122"/>
-                <a:cs typeface="Trebuchet MS" pitchFamily="34" charset="-120"/>
-              </a:rPr>
-              <a:t>e</a:t>
-            </a:r>
-            <a:endParaRPr lang="en-US" sz="900" dirty="0"/>
-          </a:p>
-        </p:txBody>
-      </p:sp>
-      <p:sp>
-        <p:nvSpPr>
-          <p:cNvPr id="44" name="Shape 42"/>
-          <p:cNvSpPr/>
-          <p:nvPr/>
-        </p:nvSpPr>
-        <p:spPr>
-          <a:xfrm>
-            <a:off x="3942207" y="4169664"/>
-            <a:ext cx="685800" cy="384048"/>
-          </a:xfrm>
-          <a:prstGeom prst="rect">
-            <a:avLst>
-              <a:gd name="adj" fmla="val 9524"/>
-            </a:avLst>
-          </a:prstGeom>
-          <a:solidFill>
-            <a:srgbClr val="FFFFFF"/>
-          </a:solidFill>
-          <a:ln w="12700">
-            <a:solidFill>
-              <a:srgbClr val="DB2777"/>
-            </a:solidFill>
-            <a:prstDash val="solid"/>
-          </a:ln>
-        </p:spPr>
-      </p:sp>
-      <p:sp>
-        <p:nvSpPr>
-          <p:cNvPr id="45" name="Text 43"/>
-          <p:cNvSpPr/>
-          <p:nvPr/>
-        </p:nvSpPr>
-        <p:spPr>
-          <a:xfrm>
-            <a:off x="3942207" y="4169664"/>
-            <a:ext cx="685800" cy="384048"/>
-          </a:xfrm>
-          <a:prstGeom prst="rect">
-            <a:avLst/>
-          </a:prstGeom>
-          <a:noFill/>
-          <a:ln/>
-        </p:spPr>
-        <p:txBody>
-          <a:bodyPr wrap="square" lIns="0" tIns="0" rIns="0" bIns="0" rtlCol="0" anchor="ctr"/>
-          <a:lstStyle/>
-          <a:p>
-            <a:pPr algn="ctr" indent="0" marL="0">
-              <a:buNone/>
-            </a:pPr>
-            <a:r>
-              <a:rPr lang="en-US" sz="900" b="1" dirty="0">
-                <a:solidFill>
-                  <a:srgbClr val="9D174D"/>
-                </a:solidFill>
-                <a:latin typeface="Trebuchet MS" pitchFamily="34" charset="0"/>
-                <a:ea typeface="Trebuchet MS" pitchFamily="34" charset="-122"/>
-                <a:cs typeface="Trebuchet MS" pitchFamily="34" charset="-120"/>
-              </a:rPr>
-              <a:t>a</a:t>
-            </a:r>
-            <a:endParaRPr lang="en-US" sz="900" dirty="0"/>
-          </a:p>
-        </p:txBody>
-      </p:sp>
-      <p:sp>
-        <p:nvSpPr>
-          <p:cNvPr id="46" name="Shape 44"/>
-          <p:cNvSpPr/>
-          <p:nvPr/>
-        </p:nvSpPr>
-        <p:spPr>
-          <a:xfrm>
-            <a:off x="4850892" y="4169664"/>
-            <a:ext cx="685800" cy="384048"/>
-          </a:xfrm>
-          <a:prstGeom prst="rect">
-            <a:avLst>
-              <a:gd name="adj" fmla="val 9524"/>
-            </a:avLst>
-          </a:prstGeom>
-          <a:solidFill>
-            <a:srgbClr val="FFFFFF"/>
-          </a:solidFill>
-          <a:ln w="12700">
-            <a:solidFill>
-              <a:srgbClr val="DB2777"/>
-            </a:solidFill>
-            <a:prstDash val="solid"/>
-          </a:ln>
-        </p:spPr>
-      </p:sp>
-      <p:sp>
-        <p:nvSpPr>
-          <p:cNvPr id="47" name="Text 45"/>
-          <p:cNvSpPr/>
-          <p:nvPr/>
-        </p:nvSpPr>
-        <p:spPr>
-          <a:xfrm>
-            <a:off x="4850892" y="4169664"/>
-            <a:ext cx="685800" cy="384048"/>
-          </a:xfrm>
-          <a:prstGeom prst="rect">
-            <a:avLst/>
-          </a:prstGeom>
-          <a:noFill/>
-          <a:ln/>
-        </p:spPr>
-        <p:txBody>
-          <a:bodyPr wrap="square" lIns="0" tIns="0" rIns="0" bIns="0" rtlCol="0" anchor="ctr"/>
-          <a:lstStyle/>
-          <a:p>
-            <a:pPr algn="ctr" indent="0" marL="0">
-              <a:buNone/>
-            </a:pPr>
-            <a:r>
-              <a:rPr lang="en-US" sz="900" b="1" dirty="0">
-                <a:solidFill>
-                  <a:srgbClr val="9D174D"/>
-                </a:solidFill>
-                <a:latin typeface="Trebuchet MS" pitchFamily="34" charset="0"/>
-                <a:ea typeface="Trebuchet MS" pitchFamily="34" charset="-122"/>
-                <a:cs typeface="Trebuchet MS" pitchFamily="34" charset="-120"/>
-              </a:rPr>
-              <a:t>c</a:t>
-            </a:r>
-            <a:endParaRPr lang="en-US" sz="900" dirty="0"/>
-          </a:p>
-        </p:txBody>
-      </p:sp>
-      <p:sp>
-        <p:nvSpPr>
-          <p:cNvPr id="48" name="Text 46"/>
-          <p:cNvSpPr/>
-          <p:nvPr/>
-        </p:nvSpPr>
-        <p:spPr>
-          <a:xfrm>
-            <a:off x="4850892" y="4572000"/>
-            <a:ext cx="685800" cy="219456"/>
-          </a:xfrm>
-          <a:prstGeom prst="rect">
-            <a:avLst/>
-          </a:prstGeom>
-          <a:noFill/>
-          <a:ln/>
-        </p:spPr>
-        <p:txBody>
-          <a:bodyPr wrap="square" lIns="0" tIns="0" rIns="0" bIns="0" rtlCol="0" anchor="t"/>
-          <a:lstStyle/>
-          <a:p>
-            <a:pPr algn="ctr" indent="0" marL="0">
-              <a:buNone/>
-            </a:pPr>
-            <a:r>
-              <a:rPr lang="en-US" sz="750" i="1" dirty="0">
-                <a:solidFill>
-                  <a:srgbClr val="94A3B8"/>
-                </a:solidFill>
-                <a:latin typeface="Calibri" pitchFamily="34" charset="0"/>
-                <a:ea typeface="Calibri" pitchFamily="34" charset="-122"/>
-                <a:cs typeface="Calibri" pitchFamily="34" charset="-120"/>
-              </a:rPr>
-              <a:t>/k/</a:t>
-            </a:r>
-            <a:endParaRPr lang="en-US" sz="750" dirty="0"/>
-          </a:p>
-        </p:txBody>
-      </p:sp>
-      <p:sp>
-        <p:nvSpPr>
-          <p:cNvPr id="49" name="Shape 47"/>
-          <p:cNvSpPr/>
-          <p:nvPr/>
-        </p:nvSpPr>
-        <p:spPr>
-          <a:xfrm>
-            <a:off x="5759577" y="4169664"/>
-            <a:ext cx="685800" cy="384048"/>
-          </a:xfrm>
-          <a:prstGeom prst="rect">
-            <a:avLst>
-              <a:gd name="adj" fmla="val 9524"/>
-            </a:avLst>
-          </a:prstGeom>
-          <a:solidFill>
-            <a:srgbClr val="FFFFFF"/>
-          </a:solidFill>
-          <a:ln w="12700">
-            <a:solidFill>
-              <a:srgbClr val="DB2777"/>
-            </a:solidFill>
-            <a:prstDash val="solid"/>
-          </a:ln>
-        </p:spPr>
-      </p:sp>
-      <p:sp>
-        <p:nvSpPr>
-          <p:cNvPr id="50" name="Text 48"/>
-          <p:cNvSpPr/>
-          <p:nvPr/>
-        </p:nvSpPr>
-        <p:spPr>
-          <a:xfrm>
-            <a:off x="5759577" y="4169664"/>
-            <a:ext cx="685800" cy="384048"/>
-          </a:xfrm>
-          <a:prstGeom prst="rect">
-            <a:avLst/>
-          </a:prstGeom>
-          <a:noFill/>
-          <a:ln/>
-        </p:spPr>
-        <p:txBody>
-          <a:bodyPr wrap="square" lIns="0" tIns="0" rIns="0" bIns="0" rtlCol="0" anchor="ctr"/>
-          <a:lstStyle/>
-          <a:p>
-            <a:pPr algn="ctr" indent="0" marL="0">
-              <a:buNone/>
-            </a:pPr>
-            <a:r>
-              <a:rPr lang="en-US" sz="900" b="1" dirty="0">
-                <a:solidFill>
-                  <a:srgbClr val="9D174D"/>
-                </a:solidFill>
-                <a:latin typeface="Trebuchet MS" pitchFamily="34" charset="0"/>
-                <a:ea typeface="Trebuchet MS" pitchFamily="34" charset="-122"/>
-                <a:cs typeface="Trebuchet MS" pitchFamily="34" charset="-120"/>
-              </a:rPr>
               <a:t>t</a:t>
-            </a:r>
-            <a:endParaRPr lang="en-US" sz="900" dirty="0"/>
-          </a:p>
-        </p:txBody>
-      </p:sp>
-      <p:sp>
-        <p:nvSpPr>
-          <p:cNvPr id="51" name="Shape 49"/>
-          <p:cNvSpPr/>
-          <p:nvPr/>
-        </p:nvSpPr>
-        <p:spPr>
-          <a:xfrm>
-            <a:off x="6668262" y="4169664"/>
-            <a:ext cx="685800" cy="384048"/>
-          </a:xfrm>
-          <a:prstGeom prst="rect">
-            <a:avLst>
-              <a:gd name="adj" fmla="val 9524"/>
-            </a:avLst>
-          </a:prstGeom>
-          <a:solidFill>
-            <a:srgbClr val="FFFFFF"/>
-          </a:solidFill>
-          <a:ln w="12700">
-            <a:solidFill>
-              <a:srgbClr val="DB2777"/>
-            </a:solidFill>
-            <a:prstDash val="solid"/>
-          </a:ln>
-        </p:spPr>
-      </p:sp>
-      <p:sp>
-        <p:nvSpPr>
-          <p:cNvPr id="52" name="Text 50"/>
-          <p:cNvSpPr/>
-          <p:nvPr/>
-        </p:nvSpPr>
-        <p:spPr>
-          <a:xfrm>
-            <a:off x="6668262" y="4169664"/>
-            <a:ext cx="685800" cy="384048"/>
-          </a:xfrm>
-          <a:prstGeom prst="rect">
-            <a:avLst/>
-          </a:prstGeom>
-          <a:noFill/>
-          <a:ln/>
-        </p:spPr>
-        <p:txBody>
-          <a:bodyPr wrap="square" lIns="0" tIns="0" rIns="0" bIns="0" rtlCol="0" anchor="ctr"/>
-          <a:lstStyle/>
-          <a:p>
-            <a:pPr algn="ctr" indent="0" marL="0">
-              <a:buNone/>
-            </a:pPr>
-            <a:r>
-              <a:rPr lang="en-US" sz="900" b="1" dirty="0">
-                <a:solidFill>
-                  <a:srgbClr val="9D174D"/>
-                </a:solidFill>
-                <a:latin typeface="Trebuchet MS" pitchFamily="34" charset="0"/>
-                <a:ea typeface="Trebuchet MS" pitchFamily="34" charset="-122"/>
-                <a:cs typeface="Trebuchet MS" pitchFamily="34" charset="-120"/>
-              </a:rPr>
-              <a:t>io</a:t>
-            </a:r>
-            <a:endParaRPr lang="en-US" sz="900" dirty="0"/>
-          </a:p>
-        </p:txBody>
-      </p:sp>
-      <p:sp>
-        <p:nvSpPr>
-          <p:cNvPr id="53" name="Text 51"/>
-          <p:cNvSpPr/>
-          <p:nvPr/>
-        </p:nvSpPr>
-        <p:spPr>
-          <a:xfrm>
-            <a:off x="6668262" y="4572000"/>
-            <a:ext cx="685800" cy="219456"/>
-          </a:xfrm>
-          <a:prstGeom prst="rect">
-            <a:avLst/>
-          </a:prstGeom>
-          <a:noFill/>
-          <a:ln/>
-        </p:spPr>
-        <p:txBody>
-          <a:bodyPr wrap="square" lIns="0" tIns="0" rIns="0" bIns="0" rtlCol="0" anchor="t"/>
-          <a:lstStyle/>
-          <a:p>
-            <a:pPr algn="ctr" indent="0" marL="0">
-              <a:buNone/>
-            </a:pPr>
-            <a:r>
-              <a:rPr lang="en-US" sz="750" i="1" dirty="0">
-                <a:solidFill>
-                  <a:srgbClr val="94A3B8"/>
-                </a:solidFill>
-                <a:latin typeface="Calibri" pitchFamily="34" charset="0"/>
-                <a:ea typeface="Calibri" pitchFamily="34" charset="-122"/>
-                <a:cs typeface="Calibri" pitchFamily="34" charset="-120"/>
-              </a:rPr>
-              <a:t>/sh/</a:t>
-            </a:r>
-            <a:endParaRPr lang="en-US" sz="750" dirty="0"/>
-          </a:p>
-        </p:txBody>
-      </p:sp>
-      <p:sp>
-        <p:nvSpPr>
-          <p:cNvPr id="54" name="Shape 52"/>
-          <p:cNvSpPr/>
-          <p:nvPr/>
-        </p:nvSpPr>
-        <p:spPr>
-          <a:xfrm>
-            <a:off x="7576947" y="4169664"/>
-            <a:ext cx="685800" cy="384048"/>
-          </a:xfrm>
-          <a:prstGeom prst="rect">
-            <a:avLst>
-              <a:gd name="adj" fmla="val 9524"/>
-            </a:avLst>
-          </a:prstGeom>
-          <a:solidFill>
-            <a:srgbClr val="FFFFFF"/>
-          </a:solidFill>
-          <a:ln w="12700">
-            <a:solidFill>
-              <a:srgbClr val="DB2777"/>
-            </a:solidFill>
-            <a:prstDash val="solid"/>
-          </a:ln>
-        </p:spPr>
-      </p:sp>
-      <p:sp>
-        <p:nvSpPr>
-          <p:cNvPr id="55" name="Text 53"/>
-          <p:cNvSpPr/>
-          <p:nvPr/>
-        </p:nvSpPr>
-        <p:spPr>
-          <a:xfrm>
-            <a:off x="7576947" y="4169664"/>
-            <a:ext cx="685800" cy="384048"/>
-          </a:xfrm>
-          <a:prstGeom prst="rect">
-            <a:avLst/>
-          </a:prstGeom>
-          <a:noFill/>
-          <a:ln/>
-        </p:spPr>
-        <p:txBody>
-          <a:bodyPr wrap="square" lIns="0" tIns="0" rIns="0" bIns="0" rtlCol="0" anchor="ctr"/>
-          <a:lstStyle/>
-          <a:p>
-            <a:pPr algn="ctr" indent="0" marL="0">
-              <a:buNone/>
-            </a:pPr>
-            <a:r>
-              <a:rPr lang="en-US" sz="900" b="1" dirty="0">
-                <a:solidFill>
-                  <a:srgbClr val="9D174D"/>
-                </a:solidFill>
-                <a:latin typeface="Trebuchet MS" pitchFamily="34" charset="0"/>
-                <a:ea typeface="Trebuchet MS" pitchFamily="34" charset="-122"/>
-                <a:cs typeface="Trebuchet MS" pitchFamily="34" charset="-120"/>
-              </a:rPr>
-              <a:t>n</a:t>
             </a:r>
             <a:endParaRPr lang="en-US" sz="900" dirty="0"/>
           </a:p>
@@ -17601,7 +17406,7 @@
                 <a:ea typeface="Calibri" pitchFamily="34" charset="-122"/>
                 <a:cs typeface="Calibri" pitchFamily="34" charset="-120"/>
               </a:rPr>
-              <a:t>She tends to </a:t>
+              <a:t>The </a:t>
             </a:r>
             <a:pPr algn="l" indent="0" marL="0">
               <a:buNone/>
@@ -17618,7 +17423,7 @@
                 <a:ea typeface="Calibri" pitchFamily="34" charset="-122"/>
                 <a:cs typeface="Calibri" pitchFamily="34" charset="-120"/>
               </a:rPr>
-              <a:t>overreact</a:t>
+              <a:t>reactive</a:t>
             </a:r>
             <a:pPr algn="l" indent="0" marL="0">
               <a:buNone/>
@@ -17632,7 +17437,7 @@
                 <a:ea typeface="Calibri" pitchFamily="34" charset="-122"/>
                 <a:cs typeface="Calibri" pitchFamily="34" charset="-120"/>
               </a:rPr>
-              <a:t>, but her </a:t>
+              <a:t> crowd began to </a:t>
             </a:r>
             <a:pPr algn="l" indent="0" marL="0">
               <a:buNone/>
@@ -17649,7 +17454,7 @@
                 <a:ea typeface="Calibri" pitchFamily="34" charset="-122"/>
                 <a:cs typeface="Calibri" pitchFamily="34" charset="-120"/>
               </a:rPr>
-              <a:t>reaction</a:t>
+              <a:t>overreact</a:t>
             </a:r>
             <a:pPr algn="l" indent="0" marL="0">
               <a:buNone/>
@@ -17663,7 +17468,7 @@
                 <a:ea typeface="Calibri" pitchFamily="34" charset="-122"/>
                 <a:cs typeface="Calibri" pitchFamily="34" charset="-120"/>
               </a:rPr>
-              <a:t> to the news was </a:t>
+              <a:t>, but the </a:t>
             </a:r>
             <a:pPr algn="l" indent="0" marL="0">
               <a:buNone/>
@@ -17680,7 +17485,7 @@
                 <a:ea typeface="Calibri" pitchFamily="34" charset="-122"/>
                 <a:cs typeface="Calibri" pitchFamily="34" charset="-120"/>
               </a:rPr>
-              <a:t>reactive</a:t>
+              <a:t>reactor</a:t>
             </a:r>
             <a:pPr algn="l" indent="0" marL="0">
               <a:buNone/>
@@ -17694,7 +17499,7 @@
                 <a:ea typeface="Calibri" pitchFamily="34" charset="-122"/>
                 <a:cs typeface="Calibri" pitchFamily="34" charset="-120"/>
               </a:rPr>
-              <a:t> to the stress she had already been feeling.</a:t>
+              <a:t> stayed safe and under control.</a:t>
             </a:r>
             <a:endParaRPr lang="en-US" sz="1800" dirty="0"/>
           </a:p>
@@ -17849,7 +17654,7 @@
                 <a:ea typeface="Trebuchet MS" pitchFamily="34" charset="-122"/>
                 <a:cs typeface="Trebuchet MS" pitchFamily="34" charset="-120"/>
               </a:rPr>
-              <a:t>overreact</a:t>
+              <a:t>reactive</a:t>
             </a:r>
             <a:endParaRPr lang="en-US" sz="1400" dirty="0"/>
           </a:p>
@@ -17977,7 +17782,7 @@
                 <a:ea typeface="Trebuchet MS" pitchFamily="34" charset="-122"/>
                 <a:cs typeface="Trebuchet MS" pitchFamily="34" charset="-120"/>
               </a:rPr>
-              <a:t>reaction</a:t>
+              <a:t>overreact</a:t>
             </a:r>
             <a:endParaRPr lang="en-US" sz="1400" dirty="0"/>
           </a:p>
@@ -18105,7 +17910,7 @@
                 <a:ea typeface="Trebuchet MS" pitchFamily="34" charset="-122"/>
                 <a:cs typeface="Trebuchet MS" pitchFamily="34" charset="-120"/>
               </a:rPr>
-              <a:t>reactive</a:t>
+              <a:t>reactor</a:t>
             </a:r>
             <a:endParaRPr lang="en-US" sz="1400" dirty="0"/>
           </a:p>
@@ -18575,7 +18380,7 @@
                 <a:ea typeface="Trebuchet MS" pitchFamily="34" charset="-122"/>
                 <a:cs typeface="Trebuchet MS" pitchFamily="34" charset="-120"/>
               </a:rPr>
-              <a:t>overreact</a:t>
+              <a:t>reactive</a:t>
             </a:r>
             <a:endParaRPr lang="en-US" sz="2800" dirty="0"/>
           </a:p>
@@ -19402,7 +19207,7 @@
                 <a:ea typeface="Trebuchet MS" pitchFamily="34" charset="-122"/>
                 <a:cs typeface="Trebuchet MS" pitchFamily="34" charset="-120"/>
               </a:rPr>
-              <a:t>overreact</a:t>
+              <a:t>reactive</a:t>
             </a:r>
             <a:endParaRPr lang="en-US" sz="2800" dirty="0"/>
           </a:p>
@@ -19541,7 +19346,7 @@
                 <a:ea typeface="Trebuchet MS" pitchFamily="34" charset="-122"/>
                 <a:cs typeface="Trebuchet MS" pitchFamily="34" charset="-120"/>
               </a:rPr>
-              <a:t>over</a:t>
+              <a:t>re</a:t>
             </a:r>
             <a:endParaRPr lang="en-US" sz="1300" dirty="0"/>
           </a:p>
@@ -19580,7 +19385,7 @@
                 <a:ea typeface="Calibri" pitchFamily="34" charset="-122"/>
                 <a:cs typeface="Calibri" pitchFamily="34" charset="-120"/>
               </a:rPr>
-              <a:t>too much, above</a:t>
+              <a:t>back, again</a:t>
             </a:r>
             <a:endParaRPr lang="en-US" sz="850" dirty="0"/>
           </a:p>
@@ -19603,11 +19408,11 @@
             </a:avLst>
           </a:prstGeom>
           <a:solidFill>
-            <a:srgbClr val="DDD6FE"/>
+            <a:srgbClr val="FCE7F3"/>
           </a:solidFill>
           <a:ln w="19050">
             <a:solidFill>
-              <a:srgbClr val="7C3AED"/>
+              <a:srgbClr val="DB2777"/>
             </a:solidFill>
             <a:prstDash val="solid"/>
           </a:ln>
@@ -19647,13 +19452,13 @@
             <a:r>
               <a:rPr lang="en-US" sz="1300" b="1" dirty="0">
                 <a:solidFill>
-                  <a:srgbClr val="4C1D95"/>
+                  <a:srgbClr val="9D174D"/>
                 </a:solidFill>
                 <a:latin typeface="Trebuchet MS" pitchFamily="34" charset="0"/>
                 <a:ea typeface="Trebuchet MS" pitchFamily="34" charset="-122"/>
                 <a:cs typeface="Trebuchet MS" pitchFamily="34" charset="-120"/>
               </a:rPr>
-              <a:t>re</a:t>
+              <a:t>act</a:t>
             </a:r>
             <a:endParaRPr lang="en-US" sz="1300" dirty="0"/>
           </a:p>
@@ -19692,7 +19497,7 @@
                 <a:ea typeface="Calibri" pitchFamily="34" charset="-122"/>
                 <a:cs typeface="Calibri" pitchFamily="34" charset="-120"/>
               </a:rPr>
-              <a:t>again, back</a:t>
+              <a:t>to do, to drive</a:t>
             </a:r>
             <a:endParaRPr lang="en-US" sz="850" dirty="0"/>
           </a:p>
@@ -19765,7 +19570,7 @@
                 <a:ea typeface="Trebuchet MS" pitchFamily="34" charset="-122"/>
                 <a:cs typeface="Trebuchet MS" pitchFamily="34" charset="-120"/>
               </a:rPr>
-              <a:t>act</a:t>
+              <a:t>ive</a:t>
             </a:r>
             <a:endParaRPr lang="en-US" sz="1300" dirty="0"/>
           </a:p>
@@ -19804,7 +19609,7 @@
                 <a:ea typeface="Calibri" pitchFamily="34" charset="-122"/>
                 <a:cs typeface="Calibri" pitchFamily="34" charset="-120"/>
               </a:rPr>
-              <a:t>to do, to act</a:t>
+              <a:t>having the quality of</a:t>
             </a:r>
             <a:endParaRPr lang="en-US" sz="850" dirty="0"/>
           </a:p>
@@ -20499,7 +20304,7 @@
                 <a:ea typeface="Trebuchet MS" pitchFamily="34" charset="-122"/>
                 <a:cs typeface="Trebuchet MS" pitchFamily="34" charset="-120"/>
               </a:rPr>
-              <a:t>overreact</a:t>
+              <a:t>reactive</a:t>
             </a:r>
             <a:endParaRPr lang="en-US" sz="2800" dirty="0"/>
           </a:p>
@@ -20638,7 +20443,7 @@
                 <a:ea typeface="Trebuchet MS" pitchFamily="34" charset="-122"/>
                 <a:cs typeface="Trebuchet MS" pitchFamily="34" charset="-120"/>
               </a:rPr>
-              <a:t>over</a:t>
+              <a:t>re</a:t>
             </a:r>
             <a:endParaRPr lang="en-US" sz="1300" dirty="0"/>
           </a:p>
@@ -20677,7 +20482,7 @@
                 <a:ea typeface="Calibri" pitchFamily="34" charset="-122"/>
                 <a:cs typeface="Calibri" pitchFamily="34" charset="-120"/>
               </a:rPr>
-              <a:t>too much, above</a:t>
+              <a:t>back, again</a:t>
             </a:r>
             <a:endParaRPr lang="en-US" sz="850" dirty="0"/>
           </a:p>
@@ -20700,11 +20505,11 @@
             </a:avLst>
           </a:prstGeom>
           <a:solidFill>
-            <a:srgbClr val="DDD6FE"/>
+            <a:srgbClr val="FCE7F3"/>
           </a:solidFill>
           <a:ln w="19050">
             <a:solidFill>
-              <a:srgbClr val="7C3AED"/>
+              <a:srgbClr val="DB2777"/>
             </a:solidFill>
             <a:prstDash val="solid"/>
           </a:ln>
@@ -20744,13 +20549,13 @@
             <a:r>
               <a:rPr lang="en-US" sz="1300" b="1" dirty="0">
                 <a:solidFill>
-                  <a:srgbClr val="4C1D95"/>
+                  <a:srgbClr val="9D174D"/>
                 </a:solidFill>
                 <a:latin typeface="Trebuchet MS" pitchFamily="34" charset="0"/>
                 <a:ea typeface="Trebuchet MS" pitchFamily="34" charset="-122"/>
                 <a:cs typeface="Trebuchet MS" pitchFamily="34" charset="-120"/>
               </a:rPr>
-              <a:t>re</a:t>
+              <a:t>act</a:t>
             </a:r>
             <a:endParaRPr lang="en-US" sz="1300" dirty="0"/>
           </a:p>
@@ -20789,7 +20594,7 @@
                 <a:ea typeface="Calibri" pitchFamily="34" charset="-122"/>
                 <a:cs typeface="Calibri" pitchFamily="34" charset="-120"/>
               </a:rPr>
-              <a:t>again, back</a:t>
+              <a:t>to do, to drive</a:t>
             </a:r>
             <a:endParaRPr lang="en-US" sz="850" dirty="0"/>
           </a:p>
@@ -20862,7 +20667,7 @@
                 <a:ea typeface="Trebuchet MS" pitchFamily="34" charset="-122"/>
                 <a:cs typeface="Trebuchet MS" pitchFamily="34" charset="-120"/>
               </a:rPr>
-              <a:t>act</a:t>
+              <a:t>ive</a:t>
             </a:r>
             <a:endParaRPr lang="en-US" sz="1300" dirty="0"/>
           </a:p>
@@ -20901,7 +20706,7 @@
                 <a:ea typeface="Calibri" pitchFamily="34" charset="-122"/>
                 <a:cs typeface="Calibri" pitchFamily="34" charset="-120"/>
               </a:rPr>
-              <a:t>to do, to act</a:t>
+              <a:t>having the quality of</a:t>
             </a:r>
             <a:endParaRPr lang="en-US" sz="850" dirty="0"/>
           </a:p>
@@ -21008,8 +20813,8 @@
         </p:nvSpPr>
         <p:spPr>
           <a:xfrm>
-            <a:off x="1975104" y="3364992"/>
-            <a:ext cx="1554480" cy="475488"/>
+            <a:off x="2313432" y="3364992"/>
+            <a:ext cx="1645920" cy="475488"/>
           </a:xfrm>
           <a:prstGeom prst="rect">
             <a:avLst>
@@ -21035,8 +20840,8 @@
         </p:nvSpPr>
         <p:spPr>
           <a:xfrm>
-            <a:off x="1975104" y="3364992"/>
-            <a:ext cx="1554480" cy="475488"/>
+            <a:off x="2313432" y="3364992"/>
+            <a:ext cx="1645920" cy="475488"/>
           </a:xfrm>
           <a:prstGeom prst="rect">
             <a:avLst/>
@@ -21060,7 +20865,7 @@
                 <a:ea typeface="Trebuchet MS" pitchFamily="34" charset="-122"/>
                 <a:cs typeface="Trebuchet MS" pitchFamily="34" charset="-120"/>
               </a:rPr>
-              <a:t>o</a:t>
+              <a:t>re</a:t>
             </a:r>
             <a:endParaRPr lang="en-US" sz="1400" dirty="0"/>
           </a:p>
@@ -21074,8 +20879,8 @@
         </p:nvSpPr>
         <p:spPr>
           <a:xfrm>
-            <a:off x="3529584" y="3364992"/>
-            <a:ext cx="73152" cy="475488"/>
+            <a:off x="3959352" y="3364992"/>
+            <a:ext cx="411480" cy="475488"/>
           </a:xfrm>
           <a:prstGeom prst="rect">
             <a:avLst/>
@@ -21113,8 +20918,8 @@
         </p:nvSpPr>
         <p:spPr>
           <a:xfrm>
-            <a:off x="3602736" y="3364992"/>
-            <a:ext cx="1554480" cy="475488"/>
+            <a:off x="4370832" y="3364992"/>
+            <a:ext cx="1645920" cy="475488"/>
           </a:xfrm>
           <a:prstGeom prst="rect">
             <a:avLst>
@@ -21140,8 +20945,8 @@
         </p:nvSpPr>
         <p:spPr>
           <a:xfrm>
-            <a:off x="3602736" y="3364992"/>
-            <a:ext cx="1554480" cy="475488"/>
+            <a:off x="4370832" y="3364992"/>
+            <a:ext cx="1645920" cy="475488"/>
           </a:xfrm>
           <a:prstGeom prst="rect">
             <a:avLst/>
@@ -21165,7 +20970,7 @@
                 <a:ea typeface="Trebuchet MS" pitchFamily="34" charset="-122"/>
                 <a:cs typeface="Trebuchet MS" pitchFamily="34" charset="-120"/>
               </a:rPr>
-              <a:t>ver</a:t>
+              <a:t>ac</a:t>
             </a:r>
             <a:endParaRPr lang="en-US" sz="1400" dirty="0"/>
           </a:p>
@@ -21179,8 +20984,8 @@
         </p:nvSpPr>
         <p:spPr>
           <a:xfrm>
-            <a:off x="5157216" y="3364992"/>
-            <a:ext cx="73152" cy="475488"/>
+            <a:off x="6016752" y="3364992"/>
+            <a:ext cx="411480" cy="475488"/>
           </a:xfrm>
           <a:prstGeom prst="rect">
             <a:avLst/>
@@ -21218,8 +21023,8 @@
         </p:nvSpPr>
         <p:spPr>
           <a:xfrm>
-            <a:off x="5230368" y="3364992"/>
-            <a:ext cx="1554480" cy="475488"/>
+            <a:off x="6428232" y="3364992"/>
+            <a:ext cx="1645920" cy="475488"/>
           </a:xfrm>
           <a:prstGeom prst="rect">
             <a:avLst>
@@ -21245,8 +21050,8 @@
         </p:nvSpPr>
         <p:spPr>
           <a:xfrm>
-            <a:off x="5230368" y="3364992"/>
-            <a:ext cx="1554480" cy="475488"/>
+            <a:off x="6428232" y="3364992"/>
+            <a:ext cx="1645920" cy="475488"/>
           </a:xfrm>
           <a:prstGeom prst="rect">
             <a:avLst/>
@@ -21270,7 +21075,7 @@
                 <a:ea typeface="Trebuchet MS" pitchFamily="34" charset="-122"/>
                 <a:cs typeface="Trebuchet MS" pitchFamily="34" charset="-120"/>
               </a:rPr>
-              <a:t>re</a:t>
+              <a:t>tive</a:t>
             </a:r>
             <a:endParaRPr lang="en-US" sz="1400" dirty="0"/>
           </a:p>
@@ -21278,119 +21083,80 @@
       </p:sp>
       <p:sp>
         <p:nvSpPr>
-          <p:cNvPr id="36" name="Text 34"/>
-          <p:cNvSpPr/>
-          <p:nvPr/>
-        </p:nvSpPr>
-        <p:spPr>
-          <a:xfrm>
-            <a:off x="6784848" y="3364992"/>
-            <a:ext cx="73152" cy="475488"/>
-          </a:xfrm>
-          <a:prstGeom prst="rect">
-            <a:avLst/>
-          </a:prstGeom>
-          <a:noFill/>
-          <a:ln/>
-        </p:spPr>
-        <p:txBody>
-          <a:bodyPr wrap="square" lIns="0" tIns="0" rIns="0" bIns="0" rtlCol="0" anchor="ctr"/>
-          <a:lstStyle/>
-          <a:p>
-            <a:pPr algn="ctr" indent="0" marL="0">
-              <a:buNone/>
-            </a:pPr>
-            <a:r>
-              <a:rPr lang="en-US" sz="1600" b="1" dirty="0">
-                <a:solidFill>
-                  <a:srgbClr val="0D9488"/>
+          <p:cNvPr id="36" name="Shape 34"/>
+          <p:cNvSpPr/>
+          <p:nvPr/>
+        </p:nvSpPr>
+        <p:spPr>
+          <a:xfrm>
+            <a:off x="365760" y="4096512"/>
+            <a:ext cx="1371600" cy="804672"/>
+          </a:xfrm>
+          <a:prstGeom prst="rect">
+            <a:avLst>
+              <a:gd name="adj" fmla="val 6818"/>
+            </a:avLst>
+          </a:prstGeom>
+          <a:solidFill>
+            <a:srgbClr val="E2E8F0"/>
+          </a:solidFill>
+          <a:ln w="12700">
+            <a:solidFill>
+              <a:srgbClr val="E2E8F0"/>
+            </a:solidFill>
+            <a:prstDash val="solid"/>
+          </a:ln>
+        </p:spPr>
+      </p:sp>
+      <p:sp>
+        <p:nvSpPr>
+          <p:cNvPr id="37" name="Text 35"/>
+          <p:cNvSpPr/>
+          <p:nvPr/>
+        </p:nvSpPr>
+        <p:spPr>
+          <a:xfrm>
+            <a:off x="365760" y="4096512"/>
+            <a:ext cx="1371600" cy="804672"/>
+          </a:xfrm>
+          <a:prstGeom prst="rect">
+            <a:avLst/>
+          </a:prstGeom>
+          <a:noFill/>
+          <a:ln/>
+        </p:spPr>
+        <p:txBody>
+          <a:bodyPr wrap="square" lIns="0" tIns="0" rIns="0" bIns="0" rtlCol="0" anchor="ctr"/>
+          <a:lstStyle/>
+          <a:p>
+            <a:pPr algn="ctr" indent="0" marL="0">
+              <a:buNone/>
+            </a:pPr>
+            <a:r>
+              <a:rPr lang="en-US" sz="1100" b="1" dirty="0">
+                <a:solidFill>
+                  <a:srgbClr val="475569"/>
                 </a:solidFill>
                 <a:latin typeface="Trebuchet MS" pitchFamily="34" charset="0"/>
                 <a:ea typeface="Trebuchet MS" pitchFamily="34" charset="-122"/>
                 <a:cs typeface="Trebuchet MS" pitchFamily="34" charset="-120"/>
               </a:rPr>
-              <a:t>·</a:t>
-            </a:r>
-            <a:endParaRPr lang="en-US" sz="1600" dirty="0"/>
-          </a:p>
-        </p:txBody>
-      </p:sp>
-      <p:sp>
-        <p:nvSpPr>
-          <p:cNvPr id="37" name="Shape 35"/>
-          <p:cNvSpPr/>
-          <p:nvPr/>
-        </p:nvSpPr>
-        <p:spPr>
-          <a:xfrm>
-            <a:off x="6858000" y="3364992"/>
-            <a:ext cx="1554480" cy="475488"/>
-          </a:xfrm>
-          <a:prstGeom prst="rect">
-            <a:avLst>
-              <a:gd name="adj" fmla="val 9615"/>
-            </a:avLst>
-          </a:prstGeom>
-          <a:solidFill>
-            <a:srgbClr val="FFFFFF"/>
-          </a:solidFill>
-          <a:ln w="12700">
-            <a:solidFill>
-              <a:srgbClr val="0D9488"/>
-            </a:solidFill>
-            <a:prstDash val="solid"/>
-          </a:ln>
-        </p:spPr>
-      </p:sp>
-      <p:sp>
-        <p:nvSpPr>
-          <p:cNvPr id="38" name="Text 36"/>
-          <p:cNvSpPr/>
-          <p:nvPr/>
-        </p:nvSpPr>
-        <p:spPr>
-          <a:xfrm>
-            <a:off x="6858000" y="3364992"/>
-            <a:ext cx="1554480" cy="475488"/>
-          </a:xfrm>
-          <a:prstGeom prst="rect">
-            <a:avLst/>
-          </a:prstGeom>
-          <a:noFill/>
-          <a:ln/>
-        </p:spPr>
-        <p:txBody>
-          <a:bodyPr wrap="square" lIns="0" tIns="0" rIns="0" bIns="0" rtlCol="0" anchor="ctr"/>
-          <a:lstStyle/>
-          <a:p>
-            <a:pPr algn="ctr" indent="0" marL="0">
-              <a:buNone/>
-            </a:pPr>
-            <a:r>
-              <a:rPr lang="en-US" sz="1400" b="1" dirty="0">
-                <a:solidFill>
-                  <a:srgbClr val="0D9488"/>
-                </a:solidFill>
-                <a:latin typeface="Trebuchet MS" pitchFamily="34" charset="0"/>
-                <a:ea typeface="Trebuchet MS" pitchFamily="34" charset="-122"/>
-                <a:cs typeface="Trebuchet MS" pitchFamily="34" charset="-120"/>
-              </a:rPr>
-              <a:t>act</a:t>
-            </a:r>
-            <a:endParaRPr lang="en-US" sz="1400" dirty="0"/>
-          </a:p>
-        </p:txBody>
-      </p:sp>
-      <p:sp>
-        <p:nvSpPr>
-          <p:cNvPr id="39" name="Shape 37"/>
-          <p:cNvSpPr/>
-          <p:nvPr/>
-        </p:nvSpPr>
-        <p:spPr>
-          <a:xfrm>
-            <a:off x="365760" y="4096512"/>
-            <a:ext cx="1371600" cy="804672"/>
+              <a:t>Phonemes</a:t>
+            </a:r>
+            <a:endParaRPr lang="en-US" sz="1100" dirty="0"/>
+          </a:p>
+        </p:txBody>
+      </p:sp>
+      <p:sp>
+        <p:nvSpPr>
+          <p:cNvPr id="38" name="Shape 36"/>
+          <p:cNvSpPr/>
+          <p:nvPr/>
+        </p:nvSpPr>
+        <p:spPr>
+          <a:xfrm>
+            <a:off x="1874520" y="4096512"/>
+            <a:ext cx="6903720" cy="804672"/>
           </a:xfrm>
           <a:prstGeom prst="rect">
             <a:avLst>
@@ -21398,85 +21164,19 @@
             </a:avLst>
           </a:prstGeom>
           <a:solidFill>
-            <a:srgbClr val="E2E8F0"/>
+            <a:srgbClr val="F8FAFC"/>
           </a:solidFill>
           <a:ln w="12700">
             <a:solidFill>
               <a:srgbClr val="E2E8F0"/>
             </a:solidFill>
-            <a:prstDash val="solid"/>
-          </a:ln>
-        </p:spPr>
-      </p:sp>
-      <p:sp>
-        <p:nvSpPr>
-          <p:cNvPr id="40" name="Text 38"/>
-          <p:cNvSpPr/>
-          <p:nvPr/>
-        </p:nvSpPr>
-        <p:spPr>
-          <a:xfrm>
-            <a:off x="365760" y="4096512"/>
-            <a:ext cx="1371600" cy="804672"/>
-          </a:xfrm>
-          <a:prstGeom prst="rect">
-            <a:avLst/>
-          </a:prstGeom>
-          <a:noFill/>
-          <a:ln/>
-        </p:spPr>
-        <p:txBody>
-          <a:bodyPr wrap="square" lIns="0" tIns="0" rIns="0" bIns="0" rtlCol="0" anchor="ctr"/>
-          <a:lstStyle/>
-          <a:p>
-            <a:pPr algn="ctr" indent="0" marL="0">
-              <a:buNone/>
-            </a:pPr>
-            <a:r>
-              <a:rPr lang="en-US" sz="1100" b="1" dirty="0">
-                <a:solidFill>
-                  <a:srgbClr val="475569"/>
-                </a:solidFill>
-                <a:latin typeface="Trebuchet MS" pitchFamily="34" charset="0"/>
-                <a:ea typeface="Trebuchet MS" pitchFamily="34" charset="-122"/>
-                <a:cs typeface="Trebuchet MS" pitchFamily="34" charset="-120"/>
-              </a:rPr>
-              <a:t>Phonemes</a:t>
-            </a:r>
-            <a:endParaRPr lang="en-US" sz="1100" dirty="0"/>
-          </a:p>
-        </p:txBody>
-      </p:sp>
-      <p:sp>
-        <p:nvSpPr>
-          <p:cNvPr id="41" name="Shape 39"/>
-          <p:cNvSpPr/>
-          <p:nvPr/>
-        </p:nvSpPr>
-        <p:spPr>
-          <a:xfrm>
-            <a:off x="1874520" y="4096512"/>
-            <a:ext cx="6903720" cy="804672"/>
-          </a:xfrm>
-          <a:prstGeom prst="rect">
-            <a:avLst>
-              <a:gd name="adj" fmla="val 6818"/>
-            </a:avLst>
-          </a:prstGeom>
-          <a:solidFill>
-            <a:srgbClr val="F8FAFC"/>
-          </a:solidFill>
-          <a:ln w="12700">
-            <a:solidFill>
-              <a:srgbClr val="E2E8F0"/>
-            </a:solidFill>
             <a:prstDash val="dash"/>
           </a:ln>
         </p:spPr>
       </p:sp>
       <p:sp>
         <p:nvSpPr>
-          <p:cNvPr id="42" name="Text 40"/>
+          <p:cNvPr id="39" name="Text 37"/>
           <p:cNvSpPr/>
           <p:nvPr/>
         </p:nvSpPr>
@@ -21938,7 +21638,7 @@
                 <a:ea typeface="Trebuchet MS" pitchFamily="34" charset="-122"/>
                 <a:cs typeface="Trebuchet MS" pitchFamily="34" charset="-120"/>
               </a:rPr>
-              <a:t>overreact</a:t>
+              <a:t>reactive</a:t>
             </a:r>
             <a:endParaRPr lang="en-US" sz="2800" dirty="0"/>
           </a:p>
@@ -22077,7 +21777,7 @@
                 <a:ea typeface="Trebuchet MS" pitchFamily="34" charset="-122"/>
                 <a:cs typeface="Trebuchet MS" pitchFamily="34" charset="-120"/>
               </a:rPr>
-              <a:t>over</a:t>
+              <a:t>re</a:t>
             </a:r>
             <a:endParaRPr lang="en-US" sz="1300" dirty="0"/>
           </a:p>
@@ -22116,7 +21816,7 @@
                 <a:ea typeface="Calibri" pitchFamily="34" charset="-122"/>
                 <a:cs typeface="Calibri" pitchFamily="34" charset="-120"/>
               </a:rPr>
-              <a:t>too much, above</a:t>
+              <a:t>back, again</a:t>
             </a:r>
             <a:endParaRPr lang="en-US" sz="850" dirty="0"/>
           </a:p>
@@ -22139,11 +21839,11 @@
             </a:avLst>
           </a:prstGeom>
           <a:solidFill>
-            <a:srgbClr val="DDD6FE"/>
+            <a:srgbClr val="FCE7F3"/>
           </a:solidFill>
           <a:ln w="19050">
             <a:solidFill>
-              <a:srgbClr val="7C3AED"/>
+              <a:srgbClr val="DB2777"/>
             </a:solidFill>
             <a:prstDash val="solid"/>
           </a:ln>
@@ -22183,13 +21883,13 @@
             <a:r>
               <a:rPr lang="en-US" sz="1300" b="1" dirty="0">
                 <a:solidFill>
-                  <a:srgbClr val="4C1D95"/>
+                  <a:srgbClr val="9D174D"/>
                 </a:solidFill>
                 <a:latin typeface="Trebuchet MS" pitchFamily="34" charset="0"/>
                 <a:ea typeface="Trebuchet MS" pitchFamily="34" charset="-122"/>
                 <a:cs typeface="Trebuchet MS" pitchFamily="34" charset="-120"/>
               </a:rPr>
-              <a:t>re</a:t>
+              <a:t>act</a:t>
             </a:r>
             <a:endParaRPr lang="en-US" sz="1300" dirty="0"/>
           </a:p>
@@ -22228,7 +21928,7 @@
                 <a:ea typeface="Calibri" pitchFamily="34" charset="-122"/>
                 <a:cs typeface="Calibri" pitchFamily="34" charset="-120"/>
               </a:rPr>
-              <a:t>again, back</a:t>
+              <a:t>to do, to drive</a:t>
             </a:r>
             <a:endParaRPr lang="en-US" sz="850" dirty="0"/>
           </a:p>
@@ -22301,7 +22001,7 @@
                 <a:ea typeface="Trebuchet MS" pitchFamily="34" charset="-122"/>
                 <a:cs typeface="Trebuchet MS" pitchFamily="34" charset="-120"/>
               </a:rPr>
-              <a:t>act</a:t>
+              <a:t>ive</a:t>
             </a:r>
             <a:endParaRPr lang="en-US" sz="1300" dirty="0"/>
           </a:p>
@@ -22340,7 +22040,7 @@
                 <a:ea typeface="Calibri" pitchFamily="34" charset="-122"/>
                 <a:cs typeface="Calibri" pitchFamily="34" charset="-120"/>
               </a:rPr>
-              <a:t>to do, to act</a:t>
+              <a:t>having the quality of</a:t>
             </a:r>
             <a:endParaRPr lang="en-US" sz="850" dirty="0"/>
           </a:p>
@@ -22447,8 +22147,8 @@
         </p:nvSpPr>
         <p:spPr>
           <a:xfrm>
-            <a:off x="1975104" y="3364992"/>
-            <a:ext cx="1554480" cy="475488"/>
+            <a:off x="2313432" y="3364992"/>
+            <a:ext cx="1645920" cy="475488"/>
           </a:xfrm>
           <a:prstGeom prst="rect">
             <a:avLst>
@@ -22474,8 +22174,8 @@
         </p:nvSpPr>
         <p:spPr>
           <a:xfrm>
-            <a:off x="1975104" y="3364992"/>
-            <a:ext cx="1554480" cy="475488"/>
+            <a:off x="2313432" y="3364992"/>
+            <a:ext cx="1645920" cy="475488"/>
           </a:xfrm>
           <a:prstGeom prst="rect">
             <a:avLst/>
@@ -22499,7 +22199,7 @@
                 <a:ea typeface="Trebuchet MS" pitchFamily="34" charset="-122"/>
                 <a:cs typeface="Trebuchet MS" pitchFamily="34" charset="-120"/>
               </a:rPr>
-              <a:t>o</a:t>
+              <a:t>re</a:t>
             </a:r>
             <a:endParaRPr lang="en-US" sz="1400" dirty="0"/>
           </a:p>
@@ -22513,8 +22213,8 @@
         </p:nvSpPr>
         <p:spPr>
           <a:xfrm>
-            <a:off x="3529584" y="3364992"/>
-            <a:ext cx="73152" cy="475488"/>
+            <a:off x="3959352" y="3364992"/>
+            <a:ext cx="411480" cy="475488"/>
           </a:xfrm>
           <a:prstGeom prst="rect">
             <a:avLst/>
@@ -22552,8 +22252,8 @@
         </p:nvSpPr>
         <p:spPr>
           <a:xfrm>
-            <a:off x="3602736" y="3364992"/>
-            <a:ext cx="1554480" cy="475488"/>
+            <a:off x="4370832" y="3364992"/>
+            <a:ext cx="1645920" cy="475488"/>
           </a:xfrm>
           <a:prstGeom prst="rect">
             <a:avLst>
@@ -22579,8 +22279,8 @@
         </p:nvSpPr>
         <p:spPr>
           <a:xfrm>
-            <a:off x="3602736" y="3364992"/>
-            <a:ext cx="1554480" cy="475488"/>
+            <a:off x="4370832" y="3364992"/>
+            <a:ext cx="1645920" cy="475488"/>
           </a:xfrm>
           <a:prstGeom prst="rect">
             <a:avLst/>
@@ -22604,7 +22304,7 @@
                 <a:ea typeface="Trebuchet MS" pitchFamily="34" charset="-122"/>
                 <a:cs typeface="Trebuchet MS" pitchFamily="34" charset="-120"/>
               </a:rPr>
-              <a:t>ver</a:t>
+              <a:t>ac</a:t>
             </a:r>
             <a:endParaRPr lang="en-US" sz="1400" dirty="0"/>
           </a:p>
@@ -22618,8 +22318,8 @@
         </p:nvSpPr>
         <p:spPr>
           <a:xfrm>
-            <a:off x="5157216" y="3364992"/>
-            <a:ext cx="73152" cy="475488"/>
+            <a:off x="6016752" y="3364992"/>
+            <a:ext cx="411480" cy="475488"/>
           </a:xfrm>
           <a:prstGeom prst="rect">
             <a:avLst/>
@@ -22657,8 +22357,8 @@
         </p:nvSpPr>
         <p:spPr>
           <a:xfrm>
-            <a:off x="5230368" y="3364992"/>
-            <a:ext cx="1554480" cy="475488"/>
+            <a:off x="6428232" y="3364992"/>
+            <a:ext cx="1645920" cy="475488"/>
           </a:xfrm>
           <a:prstGeom prst="rect">
             <a:avLst>
@@ -22684,8 +22384,8 @@
         </p:nvSpPr>
         <p:spPr>
           <a:xfrm>
-            <a:off x="5230368" y="3364992"/>
-            <a:ext cx="1554480" cy="475488"/>
+            <a:off x="6428232" y="3364992"/>
+            <a:ext cx="1645920" cy="475488"/>
           </a:xfrm>
           <a:prstGeom prst="rect">
             <a:avLst/>
@@ -22709,7 +22409,7 @@
                 <a:ea typeface="Trebuchet MS" pitchFamily="34" charset="-122"/>
                 <a:cs typeface="Trebuchet MS" pitchFamily="34" charset="-120"/>
               </a:rPr>
-              <a:t>re</a:t>
+              <a:t>tive</a:t>
             </a:r>
             <a:endParaRPr lang="en-US" sz="1400" dirty="0"/>
           </a:p>
@@ -22717,193 +22417,247 @@
       </p:sp>
       <p:sp>
         <p:nvSpPr>
-          <p:cNvPr id="36" name="Text 34"/>
-          <p:cNvSpPr/>
-          <p:nvPr/>
-        </p:nvSpPr>
-        <p:spPr>
-          <a:xfrm>
-            <a:off x="6784848" y="3364992"/>
-            <a:ext cx="73152" cy="475488"/>
-          </a:xfrm>
-          <a:prstGeom prst="rect">
-            <a:avLst/>
-          </a:prstGeom>
-          <a:noFill/>
-          <a:ln/>
-        </p:spPr>
-        <p:txBody>
-          <a:bodyPr wrap="square" lIns="0" tIns="0" rIns="0" bIns="0" rtlCol="0" anchor="ctr"/>
-          <a:lstStyle/>
-          <a:p>
-            <a:pPr algn="ctr" indent="0" marL="0">
-              <a:buNone/>
-            </a:pPr>
-            <a:r>
-              <a:rPr lang="en-US" sz="1600" b="1" dirty="0">
-                <a:solidFill>
-                  <a:srgbClr val="0D9488"/>
+          <p:cNvPr id="36" name="Shape 34"/>
+          <p:cNvSpPr/>
+          <p:nvPr/>
+        </p:nvSpPr>
+        <p:spPr>
+          <a:xfrm>
+            <a:off x="365760" y="4096512"/>
+            <a:ext cx="1371600" cy="804672"/>
+          </a:xfrm>
+          <a:prstGeom prst="rect">
+            <a:avLst>
+              <a:gd name="adj" fmla="val 6818"/>
+            </a:avLst>
+          </a:prstGeom>
+          <a:solidFill>
+            <a:srgbClr val="E2E8F0"/>
+          </a:solidFill>
+          <a:ln w="12700">
+            <a:solidFill>
+              <a:srgbClr val="E2E8F0"/>
+            </a:solidFill>
+            <a:prstDash val="solid"/>
+          </a:ln>
+        </p:spPr>
+      </p:sp>
+      <p:sp>
+        <p:nvSpPr>
+          <p:cNvPr id="37" name="Text 35"/>
+          <p:cNvSpPr/>
+          <p:nvPr/>
+        </p:nvSpPr>
+        <p:spPr>
+          <a:xfrm>
+            <a:off x="365760" y="4096512"/>
+            <a:ext cx="1371600" cy="804672"/>
+          </a:xfrm>
+          <a:prstGeom prst="rect">
+            <a:avLst/>
+          </a:prstGeom>
+          <a:noFill/>
+          <a:ln/>
+        </p:spPr>
+        <p:txBody>
+          <a:bodyPr wrap="square" lIns="0" tIns="0" rIns="0" bIns="0" rtlCol="0" anchor="ctr"/>
+          <a:lstStyle/>
+          <a:p>
+            <a:pPr algn="ctr" indent="0" marL="0">
+              <a:buNone/>
+            </a:pPr>
+            <a:r>
+              <a:rPr lang="en-US" sz="1100" b="1" dirty="0">
+                <a:solidFill>
+                  <a:srgbClr val="475569"/>
                 </a:solidFill>
                 <a:latin typeface="Trebuchet MS" pitchFamily="34" charset="0"/>
                 <a:ea typeface="Trebuchet MS" pitchFamily="34" charset="-122"/>
                 <a:cs typeface="Trebuchet MS" pitchFamily="34" charset="-120"/>
               </a:rPr>
-              <a:t>·</a:t>
-            </a:r>
-            <a:endParaRPr lang="en-US" sz="1600" dirty="0"/>
-          </a:p>
-        </p:txBody>
-      </p:sp>
-      <p:sp>
-        <p:nvSpPr>
-          <p:cNvPr id="37" name="Shape 35"/>
-          <p:cNvSpPr/>
-          <p:nvPr/>
-        </p:nvSpPr>
-        <p:spPr>
-          <a:xfrm>
-            <a:off x="6858000" y="3364992"/>
-            <a:ext cx="1554480" cy="475488"/>
+              <a:t>Phonemes</a:t>
+            </a:r>
+            <a:endParaRPr lang="en-US" sz="1100" dirty="0"/>
+          </a:p>
+        </p:txBody>
+      </p:sp>
+      <p:sp>
+        <p:nvSpPr>
+          <p:cNvPr id="38" name="Shape 36"/>
+          <p:cNvSpPr/>
+          <p:nvPr/>
+        </p:nvSpPr>
+        <p:spPr>
+          <a:xfrm>
+            <a:off x="1874520" y="4096512"/>
+            <a:ext cx="6903720" cy="658368"/>
           </a:xfrm>
           <a:prstGeom prst="rect">
             <a:avLst>
-              <a:gd name="adj" fmla="val 9615"/>
+              <a:gd name="adj" fmla="val 8333"/>
             </a:avLst>
           </a:prstGeom>
           <a:solidFill>
+            <a:srgbClr val="FCE7F3"/>
+          </a:solidFill>
+          <a:ln w="12700">
+            <a:solidFill>
+              <a:srgbClr val="DB2777"/>
+            </a:solidFill>
+            <a:prstDash val="solid"/>
+          </a:ln>
+        </p:spPr>
+      </p:sp>
+      <p:sp>
+        <p:nvSpPr>
+          <p:cNvPr id="39" name="Shape 37"/>
+          <p:cNvSpPr/>
+          <p:nvPr/>
+        </p:nvSpPr>
+        <p:spPr>
+          <a:xfrm>
+            <a:off x="2124837" y="4169664"/>
+            <a:ext cx="685800" cy="475488"/>
+          </a:xfrm>
+          <a:prstGeom prst="rect">
+            <a:avLst>
+              <a:gd name="adj" fmla="val 7692"/>
+            </a:avLst>
+          </a:prstGeom>
+          <a:solidFill>
             <a:srgbClr val="FFFFFF"/>
           </a:solidFill>
           <a:ln w="12700">
             <a:solidFill>
-              <a:srgbClr val="0D9488"/>
-            </a:solidFill>
-            <a:prstDash val="solid"/>
-          </a:ln>
-        </p:spPr>
-      </p:sp>
-      <p:sp>
-        <p:nvSpPr>
-          <p:cNvPr id="38" name="Text 36"/>
-          <p:cNvSpPr/>
-          <p:nvPr/>
-        </p:nvSpPr>
-        <p:spPr>
-          <a:xfrm>
-            <a:off x="6858000" y="3364992"/>
-            <a:ext cx="1554480" cy="475488"/>
-          </a:xfrm>
-          <a:prstGeom prst="rect">
-            <a:avLst/>
-          </a:prstGeom>
-          <a:noFill/>
-          <a:ln/>
-        </p:spPr>
-        <p:txBody>
-          <a:bodyPr wrap="square" lIns="0" tIns="0" rIns="0" bIns="0" rtlCol="0" anchor="ctr"/>
-          <a:lstStyle/>
-          <a:p>
-            <a:pPr algn="ctr" indent="0" marL="0">
-              <a:buNone/>
-            </a:pPr>
-            <a:r>
-              <a:rPr lang="en-US" sz="1400" b="1" dirty="0">
-                <a:solidFill>
-                  <a:srgbClr val="0D9488"/>
+              <a:srgbClr val="DB2777"/>
+            </a:solidFill>
+            <a:prstDash val="solid"/>
+          </a:ln>
+        </p:spPr>
+      </p:sp>
+      <p:sp>
+        <p:nvSpPr>
+          <p:cNvPr id="40" name="Text 38"/>
+          <p:cNvSpPr/>
+          <p:nvPr/>
+        </p:nvSpPr>
+        <p:spPr>
+          <a:xfrm>
+            <a:off x="2124837" y="4169664"/>
+            <a:ext cx="685800" cy="475488"/>
+          </a:xfrm>
+          <a:prstGeom prst="rect">
+            <a:avLst/>
+          </a:prstGeom>
+          <a:noFill/>
+          <a:ln/>
+        </p:spPr>
+        <p:txBody>
+          <a:bodyPr wrap="square" lIns="0" tIns="0" rIns="0" bIns="0" rtlCol="0" anchor="ctr"/>
+          <a:lstStyle/>
+          <a:p>
+            <a:pPr algn="ctr" indent="0" marL="0">
+              <a:buNone/>
+            </a:pPr>
+            <a:r>
+              <a:rPr lang="en-US" sz="900" b="1" dirty="0">
+                <a:solidFill>
+                  <a:srgbClr val="9D174D"/>
                 </a:solidFill>
                 <a:latin typeface="Trebuchet MS" pitchFamily="34" charset="0"/>
                 <a:ea typeface="Trebuchet MS" pitchFamily="34" charset="-122"/>
                 <a:cs typeface="Trebuchet MS" pitchFamily="34" charset="-120"/>
               </a:rPr>
-              <a:t>act</a:t>
-            </a:r>
-            <a:endParaRPr lang="en-US" sz="1400" dirty="0"/>
-          </a:p>
-        </p:txBody>
-      </p:sp>
-      <p:sp>
-        <p:nvSpPr>
-          <p:cNvPr id="39" name="Shape 37"/>
-          <p:cNvSpPr/>
-          <p:nvPr/>
-        </p:nvSpPr>
-        <p:spPr>
-          <a:xfrm>
-            <a:off x="365760" y="4096512"/>
-            <a:ext cx="1371600" cy="804672"/>
+              <a:t>r</a:t>
+            </a:r>
+            <a:endParaRPr lang="en-US" sz="900" dirty="0"/>
+          </a:p>
+        </p:txBody>
+      </p:sp>
+      <p:sp>
+        <p:nvSpPr>
+          <p:cNvPr id="41" name="Shape 39"/>
+          <p:cNvSpPr/>
+          <p:nvPr/>
+        </p:nvSpPr>
+        <p:spPr>
+          <a:xfrm>
+            <a:off x="3033522" y="4169664"/>
+            <a:ext cx="685800" cy="475488"/>
           </a:xfrm>
           <a:prstGeom prst="rect">
             <a:avLst>
-              <a:gd name="adj" fmla="val 6818"/>
+              <a:gd name="adj" fmla="val 7692"/>
             </a:avLst>
           </a:prstGeom>
           <a:solidFill>
-            <a:srgbClr val="E2E8F0"/>
-          </a:solidFill>
-          <a:ln w="12700">
-            <a:solidFill>
-              <a:srgbClr val="E2E8F0"/>
-            </a:solidFill>
-            <a:prstDash val="solid"/>
-          </a:ln>
-        </p:spPr>
-      </p:sp>
-      <p:sp>
-        <p:nvSpPr>
-          <p:cNvPr id="40" name="Text 38"/>
-          <p:cNvSpPr/>
-          <p:nvPr/>
-        </p:nvSpPr>
-        <p:spPr>
-          <a:xfrm>
-            <a:off x="365760" y="4096512"/>
-            <a:ext cx="1371600" cy="804672"/>
-          </a:xfrm>
-          <a:prstGeom prst="rect">
-            <a:avLst/>
-          </a:prstGeom>
-          <a:noFill/>
-          <a:ln/>
-        </p:spPr>
-        <p:txBody>
-          <a:bodyPr wrap="square" lIns="0" tIns="0" rIns="0" bIns="0" rtlCol="0" anchor="ctr"/>
-          <a:lstStyle/>
-          <a:p>
-            <a:pPr algn="ctr" indent="0" marL="0">
-              <a:buNone/>
-            </a:pPr>
-            <a:r>
-              <a:rPr lang="en-US" sz="1100" b="1" dirty="0">
-                <a:solidFill>
-                  <a:srgbClr val="475569"/>
+            <a:srgbClr val="FFFFFF"/>
+          </a:solidFill>
+          <a:ln w="12700">
+            <a:solidFill>
+              <a:srgbClr val="DB2777"/>
+            </a:solidFill>
+            <a:prstDash val="solid"/>
+          </a:ln>
+        </p:spPr>
+      </p:sp>
+      <p:sp>
+        <p:nvSpPr>
+          <p:cNvPr id="42" name="Text 40"/>
+          <p:cNvSpPr/>
+          <p:nvPr/>
+        </p:nvSpPr>
+        <p:spPr>
+          <a:xfrm>
+            <a:off x="3033522" y="4169664"/>
+            <a:ext cx="685800" cy="475488"/>
+          </a:xfrm>
+          <a:prstGeom prst="rect">
+            <a:avLst/>
+          </a:prstGeom>
+          <a:noFill/>
+          <a:ln/>
+        </p:spPr>
+        <p:txBody>
+          <a:bodyPr wrap="square" lIns="0" tIns="0" rIns="0" bIns="0" rtlCol="0" anchor="ctr"/>
+          <a:lstStyle/>
+          <a:p>
+            <a:pPr algn="ctr" indent="0" marL="0">
+              <a:buNone/>
+            </a:pPr>
+            <a:r>
+              <a:rPr lang="en-US" sz="900" b="1" dirty="0">
+                <a:solidFill>
+                  <a:srgbClr val="9D174D"/>
                 </a:solidFill>
                 <a:latin typeface="Trebuchet MS" pitchFamily="34" charset="0"/>
                 <a:ea typeface="Trebuchet MS" pitchFamily="34" charset="-122"/>
                 <a:cs typeface="Trebuchet MS" pitchFamily="34" charset="-120"/>
               </a:rPr>
-              <a:t>Phonemes</a:t>
-            </a:r>
-            <a:endParaRPr lang="en-US" sz="1100" dirty="0"/>
-          </a:p>
-        </p:txBody>
-      </p:sp>
-      <p:sp>
-        <p:nvSpPr>
-          <p:cNvPr id="41" name="Shape 39"/>
-          <p:cNvSpPr/>
-          <p:nvPr/>
-        </p:nvSpPr>
-        <p:spPr>
-          <a:xfrm>
-            <a:off x="1874520" y="4096512"/>
-            <a:ext cx="6903720" cy="804672"/>
+              <a:t>e</a:t>
+            </a:r>
+            <a:endParaRPr lang="en-US" sz="900" dirty="0"/>
+          </a:p>
+        </p:txBody>
+      </p:sp>
+      <p:sp>
+        <p:nvSpPr>
+          <p:cNvPr id="43" name="Shape 41"/>
+          <p:cNvSpPr/>
+          <p:nvPr/>
+        </p:nvSpPr>
+        <p:spPr>
+          <a:xfrm>
+            <a:off x="3942207" y="4169664"/>
+            <a:ext cx="685800" cy="475488"/>
           </a:xfrm>
           <a:prstGeom prst="rect">
             <a:avLst>
-              <a:gd name="adj" fmla="val 6818"/>
+              <a:gd name="adj" fmla="val 7692"/>
             </a:avLst>
           </a:prstGeom>
           <a:solidFill>
-            <a:srgbClr val="FCE7F3"/>
+            <a:srgbClr val="FFFFFF"/>
           </a:solidFill>
           <a:ln w="12700">
             <a:solidFill>
@@ -22915,41 +22669,14 @@
       </p:sp>
       <p:sp>
         <p:nvSpPr>
-          <p:cNvPr id="42" name="Shape 40"/>
-          <p:cNvSpPr/>
-          <p:nvPr/>
-        </p:nvSpPr>
-        <p:spPr>
-          <a:xfrm>
-            <a:off x="2023872" y="4169664"/>
-            <a:ext cx="685800" cy="384048"/>
-          </a:xfrm>
-          <a:prstGeom prst="rect">
-            <a:avLst>
-              <a:gd name="adj" fmla="val 9524"/>
-            </a:avLst>
-          </a:prstGeom>
-          <a:solidFill>
-            <a:srgbClr val="FFFFFF"/>
-          </a:solidFill>
-          <a:ln w="12700">
-            <a:solidFill>
-              <a:srgbClr val="DB2777"/>
-            </a:solidFill>
-            <a:prstDash val="solid"/>
-          </a:ln>
-        </p:spPr>
-      </p:sp>
-      <p:sp>
-        <p:nvSpPr>
-          <p:cNvPr id="43" name="Text 41"/>
-          <p:cNvSpPr/>
-          <p:nvPr/>
-        </p:nvSpPr>
-        <p:spPr>
-          <a:xfrm>
-            <a:off x="2023872" y="4169664"/>
-            <a:ext cx="685800" cy="384048"/>
+          <p:cNvPr id="44" name="Text 42"/>
+          <p:cNvSpPr/>
+          <p:nvPr/>
+        </p:nvSpPr>
+        <p:spPr>
+          <a:xfrm>
+            <a:off x="3942207" y="4169664"/>
+            <a:ext cx="685800" cy="475488"/>
           </a:xfrm>
           <a:prstGeom prst="rect">
             <a:avLst/>
@@ -22973,7 +22700,7 @@
                 <a:ea typeface="Trebuchet MS" pitchFamily="34" charset="-122"/>
                 <a:cs typeface="Trebuchet MS" pitchFamily="34" charset="-120"/>
               </a:rPr>
-              <a:t>o</a:t>
+              <a:t>a</a:t>
             </a:r>
             <a:endParaRPr lang="en-US" sz="900" dirty="0"/>
           </a:p>
@@ -22981,18 +22708,18 @@
       </p:sp>
       <p:sp>
         <p:nvSpPr>
-          <p:cNvPr id="44" name="Shape 42"/>
-          <p:cNvSpPr/>
-          <p:nvPr/>
-        </p:nvSpPr>
-        <p:spPr>
-          <a:xfrm>
-            <a:off x="2831592" y="4169664"/>
-            <a:ext cx="685800" cy="384048"/>
+          <p:cNvPr id="45" name="Shape 43"/>
+          <p:cNvSpPr/>
+          <p:nvPr/>
+        </p:nvSpPr>
+        <p:spPr>
+          <a:xfrm>
+            <a:off x="4850892" y="4169664"/>
+            <a:ext cx="685800" cy="475488"/>
           </a:xfrm>
           <a:prstGeom prst="rect">
             <a:avLst>
-              <a:gd name="adj" fmla="val 9524"/>
+              <a:gd name="adj" fmla="val 7692"/>
             </a:avLst>
           </a:prstGeom>
           <a:solidFill>
@@ -23008,14 +22735,14 @@
       </p:sp>
       <p:sp>
         <p:nvSpPr>
-          <p:cNvPr id="45" name="Text 43"/>
-          <p:cNvSpPr/>
-          <p:nvPr/>
-        </p:nvSpPr>
-        <p:spPr>
-          <a:xfrm>
-            <a:off x="2831592" y="4169664"/>
-            <a:ext cx="685800" cy="384048"/>
+          <p:cNvPr id="46" name="Text 44"/>
+          <p:cNvSpPr/>
+          <p:nvPr/>
+        </p:nvSpPr>
+        <p:spPr>
+          <a:xfrm>
+            <a:off x="4850892" y="4169664"/>
+            <a:ext cx="685800" cy="475488"/>
           </a:xfrm>
           <a:prstGeom prst="rect">
             <a:avLst/>
@@ -23039,7 +22766,7 @@
                 <a:ea typeface="Trebuchet MS" pitchFamily="34" charset="-122"/>
                 <a:cs typeface="Trebuchet MS" pitchFamily="34" charset="-120"/>
               </a:rPr>
-              <a:t>v</a:t>
+              <a:t>c</a:t>
             </a:r>
             <a:endParaRPr lang="en-US" sz="900" dirty="0"/>
           </a:p>
@@ -23047,18 +22774,18 @@
       </p:sp>
       <p:sp>
         <p:nvSpPr>
-          <p:cNvPr id="46" name="Shape 44"/>
-          <p:cNvSpPr/>
-          <p:nvPr/>
-        </p:nvSpPr>
-        <p:spPr>
-          <a:xfrm>
-            <a:off x="3639312" y="4169664"/>
-            <a:ext cx="685800" cy="384048"/>
+          <p:cNvPr id="47" name="Shape 45"/>
+          <p:cNvSpPr/>
+          <p:nvPr/>
+        </p:nvSpPr>
+        <p:spPr>
+          <a:xfrm>
+            <a:off x="5759577" y="4169664"/>
+            <a:ext cx="685800" cy="475488"/>
           </a:xfrm>
           <a:prstGeom prst="rect">
             <a:avLst>
-              <a:gd name="adj" fmla="val 9524"/>
+              <a:gd name="adj" fmla="val 7692"/>
             </a:avLst>
           </a:prstGeom>
           <a:solidFill>
@@ -23074,14 +22801,14 @@
       </p:sp>
       <p:sp>
         <p:nvSpPr>
-          <p:cNvPr id="47" name="Text 45"/>
-          <p:cNvSpPr/>
-          <p:nvPr/>
-        </p:nvSpPr>
-        <p:spPr>
-          <a:xfrm>
-            <a:off x="3639312" y="4169664"/>
-            <a:ext cx="685800" cy="384048"/>
+          <p:cNvPr id="48" name="Text 46"/>
+          <p:cNvSpPr/>
+          <p:nvPr/>
+        </p:nvSpPr>
+        <p:spPr>
+          <a:xfrm>
+            <a:off x="5759577" y="4169664"/>
+            <a:ext cx="685800" cy="475488"/>
           </a:xfrm>
           <a:prstGeom prst="rect">
             <a:avLst/>
@@ -23105,7 +22832,7 @@
                 <a:ea typeface="Trebuchet MS" pitchFamily="34" charset="-122"/>
                 <a:cs typeface="Trebuchet MS" pitchFamily="34" charset="-120"/>
               </a:rPr>
-              <a:t>er</a:t>
+              <a:t>t</a:t>
             </a:r>
             <a:endParaRPr lang="en-US" sz="900" dirty="0"/>
           </a:p>
@@ -23113,18 +22840,18 @@
       </p:sp>
       <p:sp>
         <p:nvSpPr>
-          <p:cNvPr id="48" name="Shape 46"/>
-          <p:cNvSpPr/>
-          <p:nvPr/>
-        </p:nvSpPr>
-        <p:spPr>
-          <a:xfrm>
-            <a:off x="4447032" y="4169664"/>
-            <a:ext cx="685800" cy="384048"/>
+          <p:cNvPr id="49" name="Shape 47"/>
+          <p:cNvSpPr/>
+          <p:nvPr/>
+        </p:nvSpPr>
+        <p:spPr>
+          <a:xfrm>
+            <a:off x="6668262" y="4169664"/>
+            <a:ext cx="685800" cy="475488"/>
           </a:xfrm>
           <a:prstGeom prst="rect">
             <a:avLst>
-              <a:gd name="adj" fmla="val 9524"/>
+              <a:gd name="adj" fmla="val 7692"/>
             </a:avLst>
           </a:prstGeom>
           <a:solidFill>
@@ -23140,14 +22867,14 @@
       </p:sp>
       <p:sp>
         <p:nvSpPr>
-          <p:cNvPr id="49" name="Text 47"/>
-          <p:cNvSpPr/>
-          <p:nvPr/>
-        </p:nvSpPr>
-        <p:spPr>
-          <a:xfrm>
-            <a:off x="4447032" y="4169664"/>
-            <a:ext cx="685800" cy="384048"/>
+          <p:cNvPr id="50" name="Text 48"/>
+          <p:cNvSpPr/>
+          <p:nvPr/>
+        </p:nvSpPr>
+        <p:spPr>
+          <a:xfrm>
+            <a:off x="6668262" y="4169664"/>
+            <a:ext cx="685800" cy="475488"/>
           </a:xfrm>
           <a:prstGeom prst="rect">
             <a:avLst/>
@@ -23171,7 +22898,7 @@
                 <a:ea typeface="Trebuchet MS" pitchFamily="34" charset="-122"/>
                 <a:cs typeface="Trebuchet MS" pitchFamily="34" charset="-120"/>
               </a:rPr>
-              <a:t>r</a:t>
+              <a:t>i</a:t>
             </a:r>
             <a:endParaRPr lang="en-US" sz="900" dirty="0"/>
           </a:p>
@@ -23179,18 +22906,18 @@
       </p:sp>
       <p:sp>
         <p:nvSpPr>
-          <p:cNvPr id="50" name="Shape 48"/>
-          <p:cNvSpPr/>
-          <p:nvPr/>
-        </p:nvSpPr>
-        <p:spPr>
-          <a:xfrm>
-            <a:off x="5254752" y="4169664"/>
-            <a:ext cx="685800" cy="384048"/>
+          <p:cNvPr id="51" name="Shape 49"/>
+          <p:cNvSpPr/>
+          <p:nvPr/>
+        </p:nvSpPr>
+        <p:spPr>
+          <a:xfrm>
+            <a:off x="7576947" y="4169664"/>
+            <a:ext cx="685800" cy="475488"/>
           </a:xfrm>
           <a:prstGeom prst="rect">
             <a:avLst>
-              <a:gd name="adj" fmla="val 9524"/>
+              <a:gd name="adj" fmla="val 7692"/>
             </a:avLst>
           </a:prstGeom>
           <a:solidFill>
@@ -23206,14 +22933,14 @@
       </p:sp>
       <p:sp>
         <p:nvSpPr>
-          <p:cNvPr id="51" name="Text 49"/>
-          <p:cNvSpPr/>
-          <p:nvPr/>
-        </p:nvSpPr>
-        <p:spPr>
-          <a:xfrm>
-            <a:off x="5254752" y="4169664"/>
-            <a:ext cx="685800" cy="384048"/>
+          <p:cNvPr id="52" name="Text 50"/>
+          <p:cNvSpPr/>
+          <p:nvPr/>
+        </p:nvSpPr>
+        <p:spPr>
+          <a:xfrm>
+            <a:off x="7576947" y="4169664"/>
+            <a:ext cx="685800" cy="475488"/>
           </a:xfrm>
           <a:prstGeom prst="rect">
             <a:avLst/>
@@ -23237,244 +22964,7 @@
                 <a:ea typeface="Trebuchet MS" pitchFamily="34" charset="-122"/>
                 <a:cs typeface="Trebuchet MS" pitchFamily="34" charset="-120"/>
               </a:rPr>
-              <a:t>e</a:t>
-            </a:r>
-            <a:endParaRPr lang="en-US" sz="900" dirty="0"/>
-          </a:p>
-        </p:txBody>
-      </p:sp>
-      <p:sp>
-        <p:nvSpPr>
-          <p:cNvPr id="52" name="Shape 50"/>
-          <p:cNvSpPr/>
-          <p:nvPr/>
-        </p:nvSpPr>
-        <p:spPr>
-          <a:xfrm>
-            <a:off x="6062472" y="4169664"/>
-            <a:ext cx="685800" cy="384048"/>
-          </a:xfrm>
-          <a:prstGeom prst="rect">
-            <a:avLst>
-              <a:gd name="adj" fmla="val 9524"/>
-            </a:avLst>
-          </a:prstGeom>
-          <a:solidFill>
-            <a:srgbClr val="FFFFFF"/>
-          </a:solidFill>
-          <a:ln w="12700">
-            <a:solidFill>
-              <a:srgbClr val="DB2777"/>
-            </a:solidFill>
-            <a:prstDash val="solid"/>
-          </a:ln>
-        </p:spPr>
-      </p:sp>
-      <p:sp>
-        <p:nvSpPr>
-          <p:cNvPr id="53" name="Text 51"/>
-          <p:cNvSpPr/>
-          <p:nvPr/>
-        </p:nvSpPr>
-        <p:spPr>
-          <a:xfrm>
-            <a:off x="6062472" y="4169664"/>
-            <a:ext cx="685800" cy="384048"/>
-          </a:xfrm>
-          <a:prstGeom prst="rect">
-            <a:avLst/>
-          </a:prstGeom>
-          <a:noFill/>
-          <a:ln/>
-        </p:spPr>
-        <p:txBody>
-          <a:bodyPr wrap="square" lIns="0" tIns="0" rIns="0" bIns="0" rtlCol="0" anchor="ctr"/>
-          <a:lstStyle/>
-          <a:p>
-            <a:pPr algn="ctr" indent="0" marL="0">
-              <a:buNone/>
-            </a:pPr>
-            <a:r>
-              <a:rPr lang="en-US" sz="900" b="1" dirty="0">
-                <a:solidFill>
-                  <a:srgbClr val="9D174D"/>
-                </a:solidFill>
-                <a:latin typeface="Trebuchet MS" pitchFamily="34" charset="0"/>
-                <a:ea typeface="Trebuchet MS" pitchFamily="34" charset="-122"/>
-                <a:cs typeface="Trebuchet MS" pitchFamily="34" charset="-120"/>
-              </a:rPr>
-              <a:t>a</a:t>
-            </a:r>
-            <a:endParaRPr lang="en-US" sz="900" dirty="0"/>
-          </a:p>
-        </p:txBody>
-      </p:sp>
-      <p:sp>
-        <p:nvSpPr>
-          <p:cNvPr id="54" name="Shape 52"/>
-          <p:cNvSpPr/>
-          <p:nvPr/>
-        </p:nvSpPr>
-        <p:spPr>
-          <a:xfrm>
-            <a:off x="6870192" y="4169664"/>
-            <a:ext cx="685800" cy="384048"/>
-          </a:xfrm>
-          <a:prstGeom prst="rect">
-            <a:avLst>
-              <a:gd name="adj" fmla="val 9524"/>
-            </a:avLst>
-          </a:prstGeom>
-          <a:solidFill>
-            <a:srgbClr val="FFFFFF"/>
-          </a:solidFill>
-          <a:ln w="12700">
-            <a:solidFill>
-              <a:srgbClr val="DB2777"/>
-            </a:solidFill>
-            <a:prstDash val="solid"/>
-          </a:ln>
-        </p:spPr>
-      </p:sp>
-      <p:sp>
-        <p:nvSpPr>
-          <p:cNvPr id="55" name="Text 53"/>
-          <p:cNvSpPr/>
-          <p:nvPr/>
-        </p:nvSpPr>
-        <p:spPr>
-          <a:xfrm>
-            <a:off x="6870192" y="4169664"/>
-            <a:ext cx="685800" cy="384048"/>
-          </a:xfrm>
-          <a:prstGeom prst="rect">
-            <a:avLst/>
-          </a:prstGeom>
-          <a:noFill/>
-          <a:ln/>
-        </p:spPr>
-        <p:txBody>
-          <a:bodyPr wrap="square" lIns="0" tIns="0" rIns="0" bIns="0" rtlCol="0" anchor="ctr"/>
-          <a:lstStyle/>
-          <a:p>
-            <a:pPr algn="ctr" indent="0" marL="0">
-              <a:buNone/>
-            </a:pPr>
-            <a:r>
-              <a:rPr lang="en-US" sz="900" b="1" dirty="0">
-                <a:solidFill>
-                  <a:srgbClr val="9D174D"/>
-                </a:solidFill>
-                <a:latin typeface="Trebuchet MS" pitchFamily="34" charset="0"/>
-                <a:ea typeface="Trebuchet MS" pitchFamily="34" charset="-122"/>
-                <a:cs typeface="Trebuchet MS" pitchFamily="34" charset="-120"/>
-              </a:rPr>
-              <a:t>c</a:t>
-            </a:r>
-            <a:endParaRPr lang="en-US" sz="900" dirty="0"/>
-          </a:p>
-        </p:txBody>
-      </p:sp>
-      <p:sp>
-        <p:nvSpPr>
-          <p:cNvPr id="56" name="Text 54"/>
-          <p:cNvSpPr/>
-          <p:nvPr/>
-        </p:nvSpPr>
-        <p:spPr>
-          <a:xfrm>
-            <a:off x="6870192" y="4572000"/>
-            <a:ext cx="685800" cy="219456"/>
-          </a:xfrm>
-          <a:prstGeom prst="rect">
-            <a:avLst/>
-          </a:prstGeom>
-          <a:noFill/>
-          <a:ln/>
-        </p:spPr>
-        <p:txBody>
-          <a:bodyPr wrap="square" lIns="0" tIns="0" rIns="0" bIns="0" rtlCol="0" anchor="t"/>
-          <a:lstStyle/>
-          <a:p>
-            <a:pPr algn="ctr" indent="0" marL="0">
-              <a:buNone/>
-            </a:pPr>
-            <a:r>
-              <a:rPr lang="en-US" sz="750" i="1" dirty="0">
-                <a:solidFill>
-                  <a:srgbClr val="94A3B8"/>
-                </a:solidFill>
-                <a:latin typeface="Calibri" pitchFamily="34" charset="0"/>
-                <a:ea typeface="Calibri" pitchFamily="34" charset="-122"/>
-                <a:cs typeface="Calibri" pitchFamily="34" charset="-120"/>
-              </a:rPr>
-              <a:t>/k/</a:t>
-            </a:r>
-            <a:endParaRPr lang="en-US" sz="750" dirty="0"/>
-          </a:p>
-        </p:txBody>
-      </p:sp>
-      <p:sp>
-        <p:nvSpPr>
-          <p:cNvPr id="57" name="Shape 55"/>
-          <p:cNvSpPr/>
-          <p:nvPr/>
-        </p:nvSpPr>
-        <p:spPr>
-          <a:xfrm>
-            <a:off x="7677912" y="4169664"/>
-            <a:ext cx="685800" cy="384048"/>
-          </a:xfrm>
-          <a:prstGeom prst="rect">
-            <a:avLst>
-              <a:gd name="adj" fmla="val 9524"/>
-            </a:avLst>
-          </a:prstGeom>
-          <a:solidFill>
-            <a:srgbClr val="FFFFFF"/>
-          </a:solidFill>
-          <a:ln w="12700">
-            <a:solidFill>
-              <a:srgbClr val="DB2777"/>
-            </a:solidFill>
-            <a:prstDash val="solid"/>
-          </a:ln>
-        </p:spPr>
-      </p:sp>
-      <p:sp>
-        <p:nvSpPr>
-          <p:cNvPr id="58" name="Text 56"/>
-          <p:cNvSpPr/>
-          <p:nvPr/>
-        </p:nvSpPr>
-        <p:spPr>
-          <a:xfrm>
-            <a:off x="7677912" y="4169664"/>
-            <a:ext cx="685800" cy="384048"/>
-          </a:xfrm>
-          <a:prstGeom prst="rect">
-            <a:avLst/>
-          </a:prstGeom>
-          <a:noFill/>
-          <a:ln/>
-        </p:spPr>
-        <p:txBody>
-          <a:bodyPr wrap="square" lIns="0" tIns="0" rIns="0" bIns="0" rtlCol="0" anchor="ctr"/>
-          <a:lstStyle/>
-          <a:p>
-            <a:pPr algn="ctr" indent="0" marL="0">
-              <a:buNone/>
-            </a:pPr>
-            <a:r>
-              <a:rPr lang="en-US" sz="900" b="1" dirty="0">
-                <a:solidFill>
-                  <a:srgbClr val="9D174D"/>
-                </a:solidFill>
-                <a:latin typeface="Trebuchet MS" pitchFamily="34" charset="0"/>
-                <a:ea typeface="Trebuchet MS" pitchFamily="34" charset="-122"/>
-                <a:cs typeface="Trebuchet MS" pitchFamily="34" charset="-120"/>
-              </a:rPr>
-              <a:t>t</a:t>
+              <a:t>ve</a:t>
             </a:r>
             <a:endParaRPr lang="en-US" sz="900" dirty="0"/>
           </a:p>
@@ -23905,7 +23395,7 @@
                 <a:ea typeface="Trebuchet MS" pitchFamily="34" charset="-122"/>
                 <a:cs typeface="Trebuchet MS" pitchFamily="34" charset="-120"/>
               </a:rPr>
-              <a:t>reaction</a:t>
+              <a:t>overreact</a:t>
             </a:r>
             <a:endParaRPr lang="en-US" sz="2800" dirty="0"/>
           </a:p>
@@ -24732,7 +24222,7 @@
                 <a:ea typeface="Trebuchet MS" pitchFamily="34" charset="-122"/>
                 <a:cs typeface="Trebuchet MS" pitchFamily="34" charset="-120"/>
               </a:rPr>
-              <a:t>reaction</a:t>
+              <a:t>overreact</a:t>
             </a:r>
             <a:endParaRPr lang="en-US" sz="2800" dirty="0"/>
           </a:p>
@@ -24871,7 +24361,7 @@
                 <a:ea typeface="Trebuchet MS" pitchFamily="34" charset="-122"/>
                 <a:cs typeface="Trebuchet MS" pitchFamily="34" charset="-120"/>
               </a:rPr>
-              <a:t>re</a:t>
+              <a:t>over</a:t>
             </a:r>
             <a:endParaRPr lang="en-US" sz="1300" dirty="0"/>
           </a:p>
@@ -24910,7 +24400,7 @@
                 <a:ea typeface="Calibri" pitchFamily="34" charset="-122"/>
                 <a:cs typeface="Calibri" pitchFamily="34" charset="-120"/>
               </a:rPr>
-              <a:t>again, back</a:t>
+              <a:t>too much, above</a:t>
             </a:r>
             <a:endParaRPr lang="en-US" sz="850" dirty="0"/>
           </a:p>
@@ -24933,11 +24423,11 @@
             </a:avLst>
           </a:prstGeom>
           <a:solidFill>
-            <a:srgbClr val="FCE7F3"/>
+            <a:srgbClr val="DDD6FE"/>
           </a:solidFill>
           <a:ln w="19050">
             <a:solidFill>
-              <a:srgbClr val="DB2777"/>
+              <a:srgbClr val="7C3AED"/>
             </a:solidFill>
             <a:prstDash val="solid"/>
           </a:ln>
@@ -24977,13 +24467,13 @@
             <a:r>
               <a:rPr lang="en-US" sz="1300" b="1" dirty="0">
                 <a:solidFill>
-                  <a:srgbClr val="9D174D"/>
+                  <a:srgbClr val="4C1D95"/>
                 </a:solidFill>
                 <a:latin typeface="Trebuchet MS" pitchFamily="34" charset="0"/>
                 <a:ea typeface="Trebuchet MS" pitchFamily="34" charset="-122"/>
                 <a:cs typeface="Trebuchet MS" pitchFamily="34" charset="-120"/>
               </a:rPr>
-              <a:t>act</a:t>
+              <a:t>re</a:t>
             </a:r>
             <a:endParaRPr lang="en-US" sz="1300" dirty="0"/>
           </a:p>
@@ -25022,7 +24512,7 @@
                 <a:ea typeface="Calibri" pitchFamily="34" charset="-122"/>
                 <a:cs typeface="Calibri" pitchFamily="34" charset="-120"/>
               </a:rPr>
-              <a:t>to do, to act</a:t>
+              <a:t>back, again</a:t>
             </a:r>
             <a:endParaRPr lang="en-US" sz="850" dirty="0"/>
           </a:p>
@@ -25095,7 +24585,7 @@
                 <a:ea typeface="Trebuchet MS" pitchFamily="34" charset="-122"/>
                 <a:cs typeface="Trebuchet MS" pitchFamily="34" charset="-120"/>
               </a:rPr>
-              <a:t>ion</a:t>
+              <a:t>act</a:t>
             </a:r>
             <a:endParaRPr lang="en-US" sz="1300" dirty="0"/>
           </a:p>
@@ -25134,7 +24624,7 @@
                 <a:ea typeface="Calibri" pitchFamily="34" charset="-122"/>
                 <a:cs typeface="Calibri" pitchFamily="34" charset="-120"/>
               </a:rPr>
-              <a:t>the act or result of</a:t>
+              <a:t>to do, to drive</a:t>
             </a:r>
             <a:endParaRPr lang="en-US" sz="850" dirty="0"/>
           </a:p>
@@ -25142,57 +24632,150 @@
       </p:sp>
       <p:sp>
         <p:nvSpPr>
-          <p:cNvPr id="25" name="Text 23"/>
-          <p:cNvSpPr/>
-          <p:nvPr/>
-        </p:nvSpPr>
-        <p:spPr>
-          <a:xfrm>
-            <a:off x="6519672" y="2752344"/>
-            <a:ext cx="1828800" cy="182880"/>
-          </a:xfrm>
-          <a:prstGeom prst="rect">
-            <a:avLst/>
-          </a:prstGeom>
-          <a:noFill/>
-          <a:ln/>
-        </p:spPr>
-        <p:txBody>
-          <a:bodyPr wrap="square" lIns="0" tIns="0" rIns="0" bIns="0" rtlCol="0" anchor="t"/>
-          <a:lstStyle/>
-          <a:p>
-            <a:pPr algn="ctr" indent="0" marL="0">
-              <a:buNone/>
-            </a:pPr>
-            <a:r>
-              <a:rPr lang="en-US" sz="700" i="1" dirty="0">
-                <a:solidFill>
-                  <a:srgbClr val="94A3B8"/>
+          <p:cNvPr id="25" name="Shape 23"/>
+          <p:cNvSpPr/>
+          <p:nvPr/>
+        </p:nvSpPr>
+        <p:spPr>
+          <a:xfrm>
+            <a:off x="365760" y="3273552"/>
+            <a:ext cx="1371600" cy="658368"/>
+          </a:xfrm>
+          <a:prstGeom prst="rect">
+            <a:avLst>
+              <a:gd name="adj" fmla="val 8333"/>
+            </a:avLst>
+          </a:prstGeom>
+          <a:solidFill>
+            <a:srgbClr val="E2E8F0"/>
+          </a:solidFill>
+          <a:ln w="12700">
+            <a:solidFill>
+              <a:srgbClr val="E2E8F0"/>
+            </a:solidFill>
+            <a:prstDash val="solid"/>
+          </a:ln>
+        </p:spPr>
+      </p:sp>
+      <p:sp>
+        <p:nvSpPr>
+          <p:cNvPr id="26" name="Text 24"/>
+          <p:cNvSpPr/>
+          <p:nvPr/>
+        </p:nvSpPr>
+        <p:spPr>
+          <a:xfrm>
+            <a:off x="365760" y="3273552"/>
+            <a:ext cx="1371600" cy="658368"/>
+          </a:xfrm>
+          <a:prstGeom prst="rect">
+            <a:avLst/>
+          </a:prstGeom>
+          <a:noFill/>
+          <a:ln/>
+        </p:spPr>
+        <p:txBody>
+          <a:bodyPr wrap="square" lIns="0" tIns="0" rIns="0" bIns="0" rtlCol="0" anchor="ctr"/>
+          <a:lstStyle/>
+          <a:p>
+            <a:pPr algn="ctr" indent="0" marL="0">
+              <a:buNone/>
+            </a:pPr>
+            <a:r>
+              <a:rPr lang="en-US" sz="1100" b="1" dirty="0">
+                <a:solidFill>
+                  <a:srgbClr val="475569"/>
+                </a:solidFill>
+                <a:latin typeface="Trebuchet MS" pitchFamily="34" charset="0"/>
+                <a:ea typeface="Trebuchet MS" pitchFamily="34" charset="-122"/>
+                <a:cs typeface="Trebuchet MS" pitchFamily="34" charset="-120"/>
+              </a:rPr>
+              <a:t>Syllables</a:t>
+            </a:r>
+            <a:endParaRPr lang="en-US" sz="1100" dirty="0"/>
+          </a:p>
+        </p:txBody>
+      </p:sp>
+      <p:sp>
+        <p:nvSpPr>
+          <p:cNvPr id="27" name="Shape 25"/>
+          <p:cNvSpPr/>
+          <p:nvPr/>
+        </p:nvSpPr>
+        <p:spPr>
+          <a:xfrm>
+            <a:off x="1874520" y="3273552"/>
+            <a:ext cx="6903720" cy="658368"/>
+          </a:xfrm>
+          <a:prstGeom prst="rect">
+            <a:avLst>
+              <a:gd name="adj" fmla="val 8333"/>
+            </a:avLst>
+          </a:prstGeom>
+          <a:solidFill>
+            <a:srgbClr val="F8FAFC"/>
+          </a:solidFill>
+          <a:ln w="12700">
+            <a:solidFill>
+              <a:srgbClr val="E2E8F0"/>
+            </a:solidFill>
+            <a:prstDash val="dash"/>
+          </a:ln>
+        </p:spPr>
+      </p:sp>
+      <p:sp>
+        <p:nvSpPr>
+          <p:cNvPr id="28" name="Text 26"/>
+          <p:cNvSpPr/>
+          <p:nvPr/>
+        </p:nvSpPr>
+        <p:spPr>
+          <a:xfrm>
+            <a:off x="1874520" y="3273552"/>
+            <a:ext cx="6903720" cy="658368"/>
+          </a:xfrm>
+          <a:prstGeom prst="rect">
+            <a:avLst/>
+          </a:prstGeom>
+          <a:noFill/>
+          <a:ln/>
+        </p:spPr>
+        <p:txBody>
+          <a:bodyPr wrap="square" rtlCol="0" anchor="ctr"/>
+          <a:lstStyle/>
+          <a:p>
+            <a:pPr algn="ctr" indent="0" marL="0">
+              <a:buNone/>
+            </a:pPr>
+            <a:r>
+              <a:rPr lang="en-US" sz="1100" i="1" dirty="0">
+                <a:solidFill>
+                  <a:srgbClr val="CBD5E1"/>
                 </a:solidFill>
                 <a:latin typeface="Calibri" pitchFamily="34" charset="0"/>
                 <a:ea typeface="Calibri" pitchFamily="34" charset="-122"/>
                 <a:cs typeface="Calibri" pitchFamily="34" charset="-120"/>
               </a:rPr>
-              <a:t>'t' + 'ion' makes /shun/</a:t>
-            </a:r>
-            <a:endParaRPr lang="en-US" sz="700" dirty="0"/>
-          </a:p>
-        </p:txBody>
-      </p:sp>
-      <p:sp>
-        <p:nvSpPr>
-          <p:cNvPr id="26" name="Shape 24"/>
-          <p:cNvSpPr/>
-          <p:nvPr/>
-        </p:nvSpPr>
-        <p:spPr>
-          <a:xfrm>
-            <a:off x="365760" y="3273552"/>
-            <a:ext cx="1371600" cy="658368"/>
+              <a:t>Write here...</a:t>
+            </a:r>
+            <a:endParaRPr lang="en-US" sz="1100" dirty="0"/>
+          </a:p>
+        </p:txBody>
+      </p:sp>
+      <p:sp>
+        <p:nvSpPr>
+          <p:cNvPr id="29" name="Shape 27"/>
+          <p:cNvSpPr/>
+          <p:nvPr/>
+        </p:nvSpPr>
+        <p:spPr>
+          <a:xfrm>
+            <a:off x="365760" y="4096512"/>
+            <a:ext cx="1371600" cy="804672"/>
           </a:xfrm>
           <a:prstGeom prst="rect">
             <a:avLst>
-              <a:gd name="adj" fmla="val 8333"/>
+              <a:gd name="adj" fmla="val 6818"/>
             </a:avLst>
           </a:prstGeom>
           <a:solidFill>
@@ -25208,14 +24791,14 @@
       </p:sp>
       <p:sp>
         <p:nvSpPr>
-          <p:cNvPr id="27" name="Text 25"/>
-          <p:cNvSpPr/>
-          <p:nvPr/>
-        </p:nvSpPr>
-        <p:spPr>
-          <a:xfrm>
-            <a:off x="365760" y="3273552"/>
-            <a:ext cx="1371600" cy="658368"/>
+          <p:cNvPr id="30" name="Text 28"/>
+          <p:cNvSpPr/>
+          <p:nvPr/>
+        </p:nvSpPr>
+        <p:spPr>
+          <a:xfrm>
+            <a:off x="365760" y="4096512"/>
+            <a:ext cx="1371600" cy="804672"/>
           </a:xfrm>
           <a:prstGeom prst="rect">
             <a:avLst/>
@@ -25239,7 +24822,7 @@
                 <a:ea typeface="Trebuchet MS" pitchFamily="34" charset="-122"/>
                 <a:cs typeface="Trebuchet MS" pitchFamily="34" charset="-120"/>
               </a:rPr>
-              <a:t>Syllables</a:t>
+              <a:t>Phonemes</a:t>
             </a:r>
             <a:endParaRPr lang="en-US" sz="1100" dirty="0"/>
           </a:p>
@@ -25247,80 +24830,14 @@
       </p:sp>
       <p:sp>
         <p:nvSpPr>
-          <p:cNvPr id="28" name="Shape 26"/>
-          <p:cNvSpPr/>
-          <p:nvPr/>
-        </p:nvSpPr>
-        <p:spPr>
-          <a:xfrm>
-            <a:off x="1874520" y="3273552"/>
-            <a:ext cx="6903720" cy="658368"/>
-          </a:xfrm>
-          <a:prstGeom prst="rect">
-            <a:avLst>
-              <a:gd name="adj" fmla="val 8333"/>
-            </a:avLst>
-          </a:prstGeom>
-          <a:solidFill>
-            <a:srgbClr val="F8FAFC"/>
-          </a:solidFill>
-          <a:ln w="12700">
-            <a:solidFill>
-              <a:srgbClr val="E2E8F0"/>
-            </a:solidFill>
-            <a:prstDash val="dash"/>
-          </a:ln>
-        </p:spPr>
-      </p:sp>
-      <p:sp>
-        <p:nvSpPr>
-          <p:cNvPr id="29" name="Text 27"/>
-          <p:cNvSpPr/>
-          <p:nvPr/>
-        </p:nvSpPr>
-        <p:spPr>
-          <a:xfrm>
-            <a:off x="1874520" y="3273552"/>
-            <a:ext cx="6903720" cy="658368"/>
-          </a:xfrm>
-          <a:prstGeom prst="rect">
-            <a:avLst/>
-          </a:prstGeom>
-          <a:noFill/>
-          <a:ln/>
-        </p:spPr>
-        <p:txBody>
-          <a:bodyPr wrap="square" rtlCol="0" anchor="ctr"/>
-          <a:lstStyle/>
-          <a:p>
-            <a:pPr algn="ctr" indent="0" marL="0">
-              <a:buNone/>
-            </a:pPr>
-            <a:r>
-              <a:rPr lang="en-US" sz="1100" i="1" dirty="0">
-                <a:solidFill>
-                  <a:srgbClr val="CBD5E1"/>
-                </a:solidFill>
-                <a:latin typeface="Calibri" pitchFamily="34" charset="0"/>
-                <a:ea typeface="Calibri" pitchFamily="34" charset="-122"/>
-                <a:cs typeface="Calibri" pitchFamily="34" charset="-120"/>
-              </a:rPr>
-              <a:t>Write here...</a:t>
-            </a:r>
-            <a:endParaRPr lang="en-US" sz="1100" dirty="0"/>
-          </a:p>
-        </p:txBody>
-      </p:sp>
-      <p:sp>
-        <p:nvSpPr>
-          <p:cNvPr id="30" name="Shape 28"/>
-          <p:cNvSpPr/>
-          <p:nvPr/>
-        </p:nvSpPr>
-        <p:spPr>
-          <a:xfrm>
-            <a:off x="365760" y="4096512"/>
-            <a:ext cx="1371600" cy="804672"/>
+          <p:cNvPr id="31" name="Shape 29"/>
+          <p:cNvSpPr/>
+          <p:nvPr/>
+        </p:nvSpPr>
+        <p:spPr>
+          <a:xfrm>
+            <a:off x="1874520" y="4096512"/>
+            <a:ext cx="6903720" cy="804672"/>
           </a:xfrm>
           <a:prstGeom prst="rect">
             <a:avLst>
@@ -25328,85 +24845,19 @@
             </a:avLst>
           </a:prstGeom>
           <a:solidFill>
-            <a:srgbClr val="E2E8F0"/>
+            <a:srgbClr val="F8FAFC"/>
           </a:solidFill>
           <a:ln w="12700">
             <a:solidFill>
               <a:srgbClr val="E2E8F0"/>
             </a:solidFill>
-            <a:prstDash val="solid"/>
-          </a:ln>
-        </p:spPr>
-      </p:sp>
-      <p:sp>
-        <p:nvSpPr>
-          <p:cNvPr id="31" name="Text 29"/>
-          <p:cNvSpPr/>
-          <p:nvPr/>
-        </p:nvSpPr>
-        <p:spPr>
-          <a:xfrm>
-            <a:off x="365760" y="4096512"/>
-            <a:ext cx="1371600" cy="804672"/>
-          </a:xfrm>
-          <a:prstGeom prst="rect">
-            <a:avLst/>
-          </a:prstGeom>
-          <a:noFill/>
-          <a:ln/>
-        </p:spPr>
-        <p:txBody>
-          <a:bodyPr wrap="square" lIns="0" tIns="0" rIns="0" bIns="0" rtlCol="0" anchor="ctr"/>
-          <a:lstStyle/>
-          <a:p>
-            <a:pPr algn="ctr" indent="0" marL="0">
-              <a:buNone/>
-            </a:pPr>
-            <a:r>
-              <a:rPr lang="en-US" sz="1100" b="1" dirty="0">
-                <a:solidFill>
-                  <a:srgbClr val="475569"/>
-                </a:solidFill>
-                <a:latin typeface="Trebuchet MS" pitchFamily="34" charset="0"/>
-                <a:ea typeface="Trebuchet MS" pitchFamily="34" charset="-122"/>
-                <a:cs typeface="Trebuchet MS" pitchFamily="34" charset="-120"/>
-              </a:rPr>
-              <a:t>Phonemes</a:t>
-            </a:r>
-            <a:endParaRPr lang="en-US" sz="1100" dirty="0"/>
-          </a:p>
-        </p:txBody>
-      </p:sp>
-      <p:sp>
-        <p:nvSpPr>
-          <p:cNvPr id="32" name="Shape 30"/>
-          <p:cNvSpPr/>
-          <p:nvPr/>
-        </p:nvSpPr>
-        <p:spPr>
-          <a:xfrm>
-            <a:off x="1874520" y="4096512"/>
-            <a:ext cx="6903720" cy="804672"/>
-          </a:xfrm>
-          <a:prstGeom prst="rect">
-            <a:avLst>
-              <a:gd name="adj" fmla="val 6818"/>
-            </a:avLst>
-          </a:prstGeom>
-          <a:solidFill>
-            <a:srgbClr val="F8FAFC"/>
-          </a:solidFill>
-          <a:ln w="12700">
-            <a:solidFill>
-              <a:srgbClr val="E2E8F0"/>
-            </a:solidFill>
             <a:prstDash val="dash"/>
           </a:ln>
         </p:spPr>
       </p:sp>
       <p:sp>
         <p:nvSpPr>
-          <p:cNvPr id="33" name="Text 31"/>
+          <p:cNvPr id="32" name="Text 30"/>
           <p:cNvSpPr/>
           <p:nvPr/>
         </p:nvSpPr>
@@ -26587,7 +26038,7 @@
                 <a:ea typeface="Trebuchet MS" pitchFamily="34" charset="-122"/>
                 <a:cs typeface="Trebuchet MS" pitchFamily="34" charset="-120"/>
               </a:rPr>
-              <a:t>reaction</a:t>
+              <a:t>overreact</a:t>
             </a:r>
             <a:endParaRPr lang="en-US" sz="2800" dirty="0"/>
           </a:p>
@@ -26726,7 +26177,7 @@
                 <a:ea typeface="Trebuchet MS" pitchFamily="34" charset="-122"/>
                 <a:cs typeface="Trebuchet MS" pitchFamily="34" charset="-120"/>
               </a:rPr>
-              <a:t>re</a:t>
+              <a:t>over</a:t>
             </a:r>
             <a:endParaRPr lang="en-US" sz="1300" dirty="0"/>
           </a:p>
@@ -26765,7 +26216,7 @@
                 <a:ea typeface="Calibri" pitchFamily="34" charset="-122"/>
                 <a:cs typeface="Calibri" pitchFamily="34" charset="-120"/>
               </a:rPr>
-              <a:t>again, back</a:t>
+              <a:t>too much, above</a:t>
             </a:r>
             <a:endParaRPr lang="en-US" sz="850" dirty="0"/>
           </a:p>
@@ -26788,11 +26239,11 @@
             </a:avLst>
           </a:prstGeom>
           <a:solidFill>
-            <a:srgbClr val="FCE7F3"/>
+            <a:srgbClr val="DDD6FE"/>
           </a:solidFill>
           <a:ln w="19050">
             <a:solidFill>
-              <a:srgbClr val="DB2777"/>
+              <a:srgbClr val="7C3AED"/>
             </a:solidFill>
             <a:prstDash val="solid"/>
           </a:ln>
@@ -26832,13 +26283,13 @@
             <a:r>
               <a:rPr lang="en-US" sz="1300" b="1" dirty="0">
                 <a:solidFill>
-                  <a:srgbClr val="9D174D"/>
+                  <a:srgbClr val="4C1D95"/>
                 </a:solidFill>
                 <a:latin typeface="Trebuchet MS" pitchFamily="34" charset="0"/>
                 <a:ea typeface="Trebuchet MS" pitchFamily="34" charset="-122"/>
                 <a:cs typeface="Trebuchet MS" pitchFamily="34" charset="-120"/>
               </a:rPr>
-              <a:t>act</a:t>
+              <a:t>re</a:t>
             </a:r>
             <a:endParaRPr lang="en-US" sz="1300" dirty="0"/>
           </a:p>
@@ -26877,7 +26328,7 @@
                 <a:ea typeface="Calibri" pitchFamily="34" charset="-122"/>
                 <a:cs typeface="Calibri" pitchFamily="34" charset="-120"/>
               </a:rPr>
-              <a:t>to do, to act</a:t>
+              <a:t>back, again</a:t>
             </a:r>
             <a:endParaRPr lang="en-US" sz="850" dirty="0"/>
           </a:p>
@@ -26950,7 +26401,7 @@
                 <a:ea typeface="Trebuchet MS" pitchFamily="34" charset="-122"/>
                 <a:cs typeface="Trebuchet MS" pitchFamily="34" charset="-120"/>
               </a:rPr>
-              <a:t>ion</a:t>
+              <a:t>act</a:t>
             </a:r>
             <a:endParaRPr lang="en-US" sz="1300" dirty="0"/>
           </a:p>
@@ -26989,7 +26440,7 @@
                 <a:ea typeface="Calibri" pitchFamily="34" charset="-122"/>
                 <a:cs typeface="Calibri" pitchFamily="34" charset="-120"/>
               </a:rPr>
-              <a:t>the act or result of</a:t>
+              <a:t>to do, to drive</a:t>
             </a:r>
             <a:endParaRPr lang="en-US" sz="850" dirty="0"/>
           </a:p>
@@ -26997,46 +26448,7 @@
       </p:sp>
       <p:sp>
         <p:nvSpPr>
-          <p:cNvPr id="25" name="Text 23"/>
-          <p:cNvSpPr/>
-          <p:nvPr/>
-        </p:nvSpPr>
-        <p:spPr>
-          <a:xfrm>
-            <a:off x="6519672" y="2752344"/>
-            <a:ext cx="1828800" cy="182880"/>
-          </a:xfrm>
-          <a:prstGeom prst="rect">
-            <a:avLst/>
-          </a:prstGeom>
-          <a:noFill/>
-          <a:ln/>
-        </p:spPr>
-        <p:txBody>
-          <a:bodyPr wrap="square" lIns="0" tIns="0" rIns="0" bIns="0" rtlCol="0" anchor="t"/>
-          <a:lstStyle/>
-          <a:p>
-            <a:pPr algn="ctr" indent="0" marL="0">
-              <a:buNone/>
-            </a:pPr>
-            <a:r>
-              <a:rPr lang="en-US" sz="700" i="1" dirty="0">
-                <a:solidFill>
-                  <a:srgbClr val="94A3B8"/>
-                </a:solidFill>
-                <a:latin typeface="Calibri" pitchFamily="34" charset="0"/>
-                <a:ea typeface="Calibri" pitchFamily="34" charset="-122"/>
-                <a:cs typeface="Calibri" pitchFamily="34" charset="-120"/>
-              </a:rPr>
-              <a:t>'t' + 'ion' makes /shun/</a:t>
-            </a:r>
-            <a:endParaRPr lang="en-US" sz="700" dirty="0"/>
-          </a:p>
-        </p:txBody>
-      </p:sp>
-      <p:sp>
-        <p:nvSpPr>
-          <p:cNvPr id="26" name="Shape 24"/>
+          <p:cNvPr id="25" name="Shape 23"/>
           <p:cNvSpPr/>
           <p:nvPr/>
         </p:nvSpPr>
@@ -27063,7 +26475,7 @@
       </p:sp>
       <p:sp>
         <p:nvSpPr>
-          <p:cNvPr id="27" name="Text 25"/>
+          <p:cNvPr id="26" name="Text 24"/>
           <p:cNvSpPr/>
           <p:nvPr/>
         </p:nvSpPr>
@@ -27102,7 +26514,7 @@
       </p:sp>
       <p:sp>
         <p:nvSpPr>
-          <p:cNvPr id="28" name="Shape 26"/>
+          <p:cNvPr id="27" name="Shape 25"/>
           <p:cNvSpPr/>
           <p:nvPr/>
         </p:nvSpPr>
@@ -27129,14 +26541,14 @@
       </p:sp>
       <p:sp>
         <p:nvSpPr>
-          <p:cNvPr id="29" name="Shape 27"/>
-          <p:cNvSpPr/>
-          <p:nvPr/>
-        </p:nvSpPr>
-        <p:spPr>
-          <a:xfrm>
-            <a:off x="2313432" y="3364992"/>
-            <a:ext cx="1645920" cy="475488"/>
+          <p:cNvPr id="28" name="Shape 26"/>
+          <p:cNvSpPr/>
+          <p:nvPr/>
+        </p:nvSpPr>
+        <p:spPr>
+          <a:xfrm>
+            <a:off x="1975104" y="3364992"/>
+            <a:ext cx="1554480" cy="475488"/>
           </a:xfrm>
           <a:prstGeom prst="rect">
             <a:avLst>
@@ -27156,14 +26568,14 @@
       </p:sp>
       <p:sp>
         <p:nvSpPr>
-          <p:cNvPr id="30" name="Text 28"/>
-          <p:cNvSpPr/>
-          <p:nvPr/>
-        </p:nvSpPr>
-        <p:spPr>
-          <a:xfrm>
-            <a:off x="2313432" y="3364992"/>
-            <a:ext cx="1645920" cy="475488"/>
+          <p:cNvPr id="29" name="Text 27"/>
+          <p:cNvSpPr/>
+          <p:nvPr/>
+        </p:nvSpPr>
+        <p:spPr>
+          <a:xfrm>
+            <a:off x="1975104" y="3364992"/>
+            <a:ext cx="1554480" cy="475488"/>
           </a:xfrm>
           <a:prstGeom prst="rect">
             <a:avLst/>
@@ -27187,7 +26599,7 @@
                 <a:ea typeface="Trebuchet MS" pitchFamily="34" charset="-122"/>
                 <a:cs typeface="Trebuchet MS" pitchFamily="34" charset="-120"/>
               </a:rPr>
-              <a:t>re</a:t>
+              <a:t>o</a:t>
             </a:r>
             <a:endParaRPr lang="en-US" sz="1400" dirty="0"/>
           </a:p>
@@ -27195,14 +26607,14 @@
       </p:sp>
       <p:sp>
         <p:nvSpPr>
-          <p:cNvPr id="31" name="Text 29"/>
-          <p:cNvSpPr/>
-          <p:nvPr/>
-        </p:nvSpPr>
-        <p:spPr>
-          <a:xfrm>
-            <a:off x="3959352" y="3364992"/>
-            <a:ext cx="411480" cy="475488"/>
+          <p:cNvPr id="30" name="Text 28"/>
+          <p:cNvSpPr/>
+          <p:nvPr/>
+        </p:nvSpPr>
+        <p:spPr>
+          <a:xfrm>
+            <a:off x="3529584" y="3364992"/>
+            <a:ext cx="73152" cy="475488"/>
           </a:xfrm>
           <a:prstGeom prst="rect">
             <a:avLst/>
@@ -27234,14 +26646,14 @@
       </p:sp>
       <p:sp>
         <p:nvSpPr>
-          <p:cNvPr id="32" name="Shape 30"/>
-          <p:cNvSpPr/>
-          <p:nvPr/>
-        </p:nvSpPr>
-        <p:spPr>
-          <a:xfrm>
-            <a:off x="4370832" y="3364992"/>
-            <a:ext cx="1645920" cy="475488"/>
+          <p:cNvPr id="31" name="Shape 29"/>
+          <p:cNvSpPr/>
+          <p:nvPr/>
+        </p:nvSpPr>
+        <p:spPr>
+          <a:xfrm>
+            <a:off x="3602736" y="3364992"/>
+            <a:ext cx="1554480" cy="475488"/>
           </a:xfrm>
           <a:prstGeom prst="rect">
             <a:avLst>
@@ -27261,14 +26673,14 @@
       </p:sp>
       <p:sp>
         <p:nvSpPr>
-          <p:cNvPr id="33" name="Text 31"/>
-          <p:cNvSpPr/>
-          <p:nvPr/>
-        </p:nvSpPr>
-        <p:spPr>
-          <a:xfrm>
-            <a:off x="4370832" y="3364992"/>
-            <a:ext cx="1645920" cy="475488"/>
+          <p:cNvPr id="32" name="Text 30"/>
+          <p:cNvSpPr/>
+          <p:nvPr/>
+        </p:nvSpPr>
+        <p:spPr>
+          <a:xfrm>
+            <a:off x="3602736" y="3364992"/>
+            <a:ext cx="1554480" cy="475488"/>
           </a:xfrm>
           <a:prstGeom prst="rect">
             <a:avLst/>
@@ -27292,7 +26704,7 @@
                 <a:ea typeface="Trebuchet MS" pitchFamily="34" charset="-122"/>
                 <a:cs typeface="Trebuchet MS" pitchFamily="34" charset="-120"/>
               </a:rPr>
-              <a:t>ac</a:t>
+              <a:t>ver</a:t>
             </a:r>
             <a:endParaRPr lang="en-US" sz="1400" dirty="0"/>
           </a:p>
@@ -27300,14 +26712,14 @@
       </p:sp>
       <p:sp>
         <p:nvSpPr>
-          <p:cNvPr id="34" name="Text 32"/>
-          <p:cNvSpPr/>
-          <p:nvPr/>
-        </p:nvSpPr>
-        <p:spPr>
-          <a:xfrm>
-            <a:off x="6016752" y="3364992"/>
-            <a:ext cx="411480" cy="475488"/>
+          <p:cNvPr id="33" name="Text 31"/>
+          <p:cNvSpPr/>
+          <p:nvPr/>
+        </p:nvSpPr>
+        <p:spPr>
+          <a:xfrm>
+            <a:off x="5157216" y="3364992"/>
+            <a:ext cx="73152" cy="475488"/>
           </a:xfrm>
           <a:prstGeom prst="rect">
             <a:avLst/>
@@ -27339,14 +26751,14 @@
       </p:sp>
       <p:sp>
         <p:nvSpPr>
-          <p:cNvPr id="35" name="Shape 33"/>
-          <p:cNvSpPr/>
-          <p:nvPr/>
-        </p:nvSpPr>
-        <p:spPr>
-          <a:xfrm>
-            <a:off x="6428232" y="3364992"/>
-            <a:ext cx="1645920" cy="475488"/>
+          <p:cNvPr id="34" name="Shape 32"/>
+          <p:cNvSpPr/>
+          <p:nvPr/>
+        </p:nvSpPr>
+        <p:spPr>
+          <a:xfrm>
+            <a:off x="5230368" y="3364992"/>
+            <a:ext cx="1554480" cy="475488"/>
           </a:xfrm>
           <a:prstGeom prst="rect">
             <a:avLst>
@@ -27366,14 +26778,14 @@
       </p:sp>
       <p:sp>
         <p:nvSpPr>
-          <p:cNvPr id="36" name="Text 34"/>
-          <p:cNvSpPr/>
-          <p:nvPr/>
-        </p:nvSpPr>
-        <p:spPr>
-          <a:xfrm>
-            <a:off x="6428232" y="3364992"/>
-            <a:ext cx="1645920" cy="475488"/>
+          <p:cNvPr id="35" name="Text 33"/>
+          <p:cNvSpPr/>
+          <p:nvPr/>
+        </p:nvSpPr>
+        <p:spPr>
+          <a:xfrm>
+            <a:off x="5230368" y="3364992"/>
+            <a:ext cx="1554480" cy="475488"/>
           </a:xfrm>
           <a:prstGeom prst="rect">
             <a:avLst/>
@@ -27397,7 +26809,7 @@
                 <a:ea typeface="Trebuchet MS" pitchFamily="34" charset="-122"/>
                 <a:cs typeface="Trebuchet MS" pitchFamily="34" charset="-120"/>
               </a:rPr>
-              <a:t>tion</a:t>
+              <a:t>re</a:t>
             </a:r>
             <a:endParaRPr lang="en-US" sz="1400" dirty="0"/>
           </a:p>
@@ -27405,7 +26817,112 @@
       </p:sp>
       <p:sp>
         <p:nvSpPr>
+          <p:cNvPr id="36" name="Text 34"/>
+          <p:cNvSpPr/>
+          <p:nvPr/>
+        </p:nvSpPr>
+        <p:spPr>
+          <a:xfrm>
+            <a:off x="6784848" y="3364992"/>
+            <a:ext cx="73152" cy="475488"/>
+          </a:xfrm>
+          <a:prstGeom prst="rect">
+            <a:avLst/>
+          </a:prstGeom>
+          <a:noFill/>
+          <a:ln/>
+        </p:spPr>
+        <p:txBody>
+          <a:bodyPr wrap="square" lIns="0" tIns="0" rIns="0" bIns="0" rtlCol="0" anchor="ctr"/>
+          <a:lstStyle/>
+          <a:p>
+            <a:pPr algn="ctr" indent="0" marL="0">
+              <a:buNone/>
+            </a:pPr>
+            <a:r>
+              <a:rPr lang="en-US" sz="1600" b="1" dirty="0">
+                <a:solidFill>
+                  <a:srgbClr val="0D9488"/>
+                </a:solidFill>
+                <a:latin typeface="Trebuchet MS" pitchFamily="34" charset="0"/>
+                <a:ea typeface="Trebuchet MS" pitchFamily="34" charset="-122"/>
+                <a:cs typeface="Trebuchet MS" pitchFamily="34" charset="-120"/>
+              </a:rPr>
+              <a:t>·</a:t>
+            </a:r>
+            <a:endParaRPr lang="en-US" sz="1600" dirty="0"/>
+          </a:p>
+        </p:txBody>
+      </p:sp>
+      <p:sp>
+        <p:nvSpPr>
           <p:cNvPr id="37" name="Shape 35"/>
+          <p:cNvSpPr/>
+          <p:nvPr/>
+        </p:nvSpPr>
+        <p:spPr>
+          <a:xfrm>
+            <a:off x="6858000" y="3364992"/>
+            <a:ext cx="1554480" cy="475488"/>
+          </a:xfrm>
+          <a:prstGeom prst="rect">
+            <a:avLst>
+              <a:gd name="adj" fmla="val 9615"/>
+            </a:avLst>
+          </a:prstGeom>
+          <a:solidFill>
+            <a:srgbClr val="FFFFFF"/>
+          </a:solidFill>
+          <a:ln w="12700">
+            <a:solidFill>
+              <a:srgbClr val="0D9488"/>
+            </a:solidFill>
+            <a:prstDash val="solid"/>
+          </a:ln>
+        </p:spPr>
+      </p:sp>
+      <p:sp>
+        <p:nvSpPr>
+          <p:cNvPr id="38" name="Text 36"/>
+          <p:cNvSpPr/>
+          <p:nvPr/>
+        </p:nvSpPr>
+        <p:spPr>
+          <a:xfrm>
+            <a:off x="6858000" y="3364992"/>
+            <a:ext cx="1554480" cy="475488"/>
+          </a:xfrm>
+          <a:prstGeom prst="rect">
+            <a:avLst/>
+          </a:prstGeom>
+          <a:noFill/>
+          <a:ln/>
+        </p:spPr>
+        <p:txBody>
+          <a:bodyPr wrap="square" lIns="0" tIns="0" rIns="0" bIns="0" rtlCol="0" anchor="ctr"/>
+          <a:lstStyle/>
+          <a:p>
+            <a:pPr algn="ctr" indent="0" marL="0">
+              <a:buNone/>
+            </a:pPr>
+            <a:r>
+              <a:rPr lang="en-US" sz="1400" b="1" dirty="0">
+                <a:solidFill>
+                  <a:srgbClr val="0D9488"/>
+                </a:solidFill>
+                <a:latin typeface="Trebuchet MS" pitchFamily="34" charset="0"/>
+                <a:ea typeface="Trebuchet MS" pitchFamily="34" charset="-122"/>
+                <a:cs typeface="Trebuchet MS" pitchFamily="34" charset="-120"/>
+              </a:rPr>
+              <a:t>act</a:t>
+            </a:r>
+            <a:endParaRPr lang="en-US" sz="1400" dirty="0"/>
+          </a:p>
+        </p:txBody>
+      </p:sp>
+      <p:sp>
+        <p:nvSpPr>
+          <p:cNvPr id="39" name="Shape 37"/>
           <p:cNvSpPr/>
           <p:nvPr/>
         </p:nvSpPr>
@@ -27432,7 +26949,7 @@
       </p:sp>
       <p:sp>
         <p:nvSpPr>
-          <p:cNvPr id="38" name="Text 36"/>
+          <p:cNvPr id="40" name="Text 38"/>
           <p:cNvSpPr/>
           <p:nvPr/>
         </p:nvSpPr>
@@ -27471,7 +26988,7 @@
       </p:sp>
       <p:sp>
         <p:nvSpPr>
-          <p:cNvPr id="39" name="Shape 37"/>
+          <p:cNvPr id="41" name="Shape 39"/>
           <p:cNvSpPr/>
           <p:nvPr/>
         </p:nvSpPr>
@@ -27498,7 +27015,7 @@
       </p:sp>
       <p:sp>
         <p:nvSpPr>
-          <p:cNvPr id="40" name="Text 38"/>
+          <p:cNvPr id="42" name="Text 40"/>
           <p:cNvSpPr/>
           <p:nvPr/>
         </p:nvSpPr>
@@ -27960,7 +27477,7 @@
                 <a:ea typeface="Trebuchet MS" pitchFamily="34" charset="-122"/>
                 <a:cs typeface="Trebuchet MS" pitchFamily="34" charset="-120"/>
               </a:rPr>
-              <a:t>reaction</a:t>
+              <a:t>overreact</a:t>
             </a:r>
             <a:endParaRPr lang="en-US" sz="2800" dirty="0"/>
           </a:p>
@@ -28099,7 +27616,7 @@
                 <a:ea typeface="Trebuchet MS" pitchFamily="34" charset="-122"/>
                 <a:cs typeface="Trebuchet MS" pitchFamily="34" charset="-120"/>
               </a:rPr>
-              <a:t>re</a:t>
+              <a:t>over</a:t>
             </a:r>
             <a:endParaRPr lang="en-US" sz="1300" dirty="0"/>
           </a:p>
@@ -28138,7 +27655,7 @@
                 <a:ea typeface="Calibri" pitchFamily="34" charset="-122"/>
                 <a:cs typeface="Calibri" pitchFamily="34" charset="-120"/>
               </a:rPr>
-              <a:t>again, back</a:t>
+              <a:t>too much, above</a:t>
             </a:r>
             <a:endParaRPr lang="en-US" sz="850" dirty="0"/>
           </a:p>
@@ -28161,11 +27678,11 @@
             </a:avLst>
           </a:prstGeom>
           <a:solidFill>
-            <a:srgbClr val="FCE7F3"/>
+            <a:srgbClr val="DDD6FE"/>
           </a:solidFill>
           <a:ln w="19050">
             <a:solidFill>
-              <a:srgbClr val="DB2777"/>
+              <a:srgbClr val="7C3AED"/>
             </a:solidFill>
             <a:prstDash val="solid"/>
           </a:ln>
@@ -28205,13 +27722,13 @@
             <a:r>
               <a:rPr lang="en-US" sz="1300" b="1" dirty="0">
                 <a:solidFill>
-                  <a:srgbClr val="9D174D"/>
+                  <a:srgbClr val="4C1D95"/>
                 </a:solidFill>
                 <a:latin typeface="Trebuchet MS" pitchFamily="34" charset="0"/>
                 <a:ea typeface="Trebuchet MS" pitchFamily="34" charset="-122"/>
                 <a:cs typeface="Trebuchet MS" pitchFamily="34" charset="-120"/>
               </a:rPr>
-              <a:t>act</a:t>
+              <a:t>re</a:t>
             </a:r>
             <a:endParaRPr lang="en-US" sz="1300" dirty="0"/>
           </a:p>
@@ -28250,7 +27767,7 @@
                 <a:ea typeface="Calibri" pitchFamily="34" charset="-122"/>
                 <a:cs typeface="Calibri" pitchFamily="34" charset="-120"/>
               </a:rPr>
-              <a:t>to do, to act</a:t>
+              <a:t>back, again</a:t>
             </a:r>
             <a:endParaRPr lang="en-US" sz="850" dirty="0"/>
           </a:p>
@@ -28323,7 +27840,7 @@
                 <a:ea typeface="Trebuchet MS" pitchFamily="34" charset="-122"/>
                 <a:cs typeface="Trebuchet MS" pitchFamily="34" charset="-120"/>
               </a:rPr>
-              <a:t>ion</a:t>
+              <a:t>act</a:t>
             </a:r>
             <a:endParaRPr lang="en-US" sz="1300" dirty="0"/>
           </a:p>
@@ -28362,7 +27879,7 @@
                 <a:ea typeface="Calibri" pitchFamily="34" charset="-122"/>
                 <a:cs typeface="Calibri" pitchFamily="34" charset="-120"/>
               </a:rPr>
-              <a:t>the act or result of</a:t>
+              <a:t>to do, to drive</a:t>
             </a:r>
             <a:endParaRPr lang="en-US" sz="850" dirty="0"/>
           </a:p>
@@ -28370,46 +27887,7 @@
       </p:sp>
       <p:sp>
         <p:nvSpPr>
-          <p:cNvPr id="25" name="Text 23"/>
-          <p:cNvSpPr/>
-          <p:nvPr/>
-        </p:nvSpPr>
-        <p:spPr>
-          <a:xfrm>
-            <a:off x="6519672" y="2752344"/>
-            <a:ext cx="1828800" cy="182880"/>
-          </a:xfrm>
-          <a:prstGeom prst="rect">
-            <a:avLst/>
-          </a:prstGeom>
-          <a:noFill/>
-          <a:ln/>
-        </p:spPr>
-        <p:txBody>
-          <a:bodyPr wrap="square" lIns="0" tIns="0" rIns="0" bIns="0" rtlCol="0" anchor="t"/>
-          <a:lstStyle/>
-          <a:p>
-            <a:pPr algn="ctr" indent="0" marL="0">
-              <a:buNone/>
-            </a:pPr>
-            <a:r>
-              <a:rPr lang="en-US" sz="700" i="1" dirty="0">
-                <a:solidFill>
-                  <a:srgbClr val="94A3B8"/>
-                </a:solidFill>
-                <a:latin typeface="Calibri" pitchFamily="34" charset="0"/>
-                <a:ea typeface="Calibri" pitchFamily="34" charset="-122"/>
-                <a:cs typeface="Calibri" pitchFamily="34" charset="-120"/>
-              </a:rPr>
-              <a:t>'t' + 'ion' makes /shun/</a:t>
-            </a:r>
-            <a:endParaRPr lang="en-US" sz="700" dirty="0"/>
-          </a:p>
-        </p:txBody>
-      </p:sp>
-      <p:sp>
-        <p:nvSpPr>
-          <p:cNvPr id="26" name="Shape 24"/>
+          <p:cNvPr id="25" name="Shape 23"/>
           <p:cNvSpPr/>
           <p:nvPr/>
         </p:nvSpPr>
@@ -28436,7 +27914,7 @@
       </p:sp>
       <p:sp>
         <p:nvSpPr>
-          <p:cNvPr id="27" name="Text 25"/>
+          <p:cNvPr id="26" name="Text 24"/>
           <p:cNvSpPr/>
           <p:nvPr/>
         </p:nvSpPr>
@@ -28475,7 +27953,7 @@
       </p:sp>
       <p:sp>
         <p:nvSpPr>
-          <p:cNvPr id="28" name="Shape 26"/>
+          <p:cNvPr id="27" name="Shape 25"/>
           <p:cNvSpPr/>
           <p:nvPr/>
         </p:nvSpPr>
@@ -28502,14 +27980,14 @@
       </p:sp>
       <p:sp>
         <p:nvSpPr>
-          <p:cNvPr id="29" name="Shape 27"/>
-          <p:cNvSpPr/>
-          <p:nvPr/>
-        </p:nvSpPr>
-        <p:spPr>
-          <a:xfrm>
-            <a:off x="2313432" y="3364992"/>
-            <a:ext cx="1645920" cy="475488"/>
+          <p:cNvPr id="28" name="Shape 26"/>
+          <p:cNvSpPr/>
+          <p:nvPr/>
+        </p:nvSpPr>
+        <p:spPr>
+          <a:xfrm>
+            <a:off x="1975104" y="3364992"/>
+            <a:ext cx="1554480" cy="475488"/>
           </a:xfrm>
           <a:prstGeom prst="rect">
             <a:avLst>
@@ -28529,14 +28007,14 @@
       </p:sp>
       <p:sp>
         <p:nvSpPr>
-          <p:cNvPr id="30" name="Text 28"/>
-          <p:cNvSpPr/>
-          <p:nvPr/>
-        </p:nvSpPr>
-        <p:spPr>
-          <a:xfrm>
-            <a:off x="2313432" y="3364992"/>
-            <a:ext cx="1645920" cy="475488"/>
+          <p:cNvPr id="29" name="Text 27"/>
+          <p:cNvSpPr/>
+          <p:nvPr/>
+        </p:nvSpPr>
+        <p:spPr>
+          <a:xfrm>
+            <a:off x="1975104" y="3364992"/>
+            <a:ext cx="1554480" cy="475488"/>
           </a:xfrm>
           <a:prstGeom prst="rect">
             <a:avLst/>
@@ -28560,7 +28038,7 @@
                 <a:ea typeface="Trebuchet MS" pitchFamily="34" charset="-122"/>
                 <a:cs typeface="Trebuchet MS" pitchFamily="34" charset="-120"/>
               </a:rPr>
-              <a:t>re</a:t>
+              <a:t>o</a:t>
             </a:r>
             <a:endParaRPr lang="en-US" sz="1400" dirty="0"/>
           </a:p>
@@ -28568,14 +28046,14 @@
       </p:sp>
       <p:sp>
         <p:nvSpPr>
-          <p:cNvPr id="31" name="Text 29"/>
-          <p:cNvSpPr/>
-          <p:nvPr/>
-        </p:nvSpPr>
-        <p:spPr>
-          <a:xfrm>
-            <a:off x="3959352" y="3364992"/>
-            <a:ext cx="411480" cy="475488"/>
+          <p:cNvPr id="30" name="Text 28"/>
+          <p:cNvSpPr/>
+          <p:nvPr/>
+        </p:nvSpPr>
+        <p:spPr>
+          <a:xfrm>
+            <a:off x="3529584" y="3364992"/>
+            <a:ext cx="73152" cy="475488"/>
           </a:xfrm>
           <a:prstGeom prst="rect">
             <a:avLst/>
@@ -28607,14 +28085,14 @@
       </p:sp>
       <p:sp>
         <p:nvSpPr>
-          <p:cNvPr id="32" name="Shape 30"/>
-          <p:cNvSpPr/>
-          <p:nvPr/>
-        </p:nvSpPr>
-        <p:spPr>
-          <a:xfrm>
-            <a:off x="4370832" y="3364992"/>
-            <a:ext cx="1645920" cy="475488"/>
+          <p:cNvPr id="31" name="Shape 29"/>
+          <p:cNvSpPr/>
+          <p:nvPr/>
+        </p:nvSpPr>
+        <p:spPr>
+          <a:xfrm>
+            <a:off x="3602736" y="3364992"/>
+            <a:ext cx="1554480" cy="475488"/>
           </a:xfrm>
           <a:prstGeom prst="rect">
             <a:avLst>
@@ -28634,14 +28112,14 @@
       </p:sp>
       <p:sp>
         <p:nvSpPr>
-          <p:cNvPr id="33" name="Text 31"/>
-          <p:cNvSpPr/>
-          <p:nvPr/>
-        </p:nvSpPr>
-        <p:spPr>
-          <a:xfrm>
-            <a:off x="4370832" y="3364992"/>
-            <a:ext cx="1645920" cy="475488"/>
+          <p:cNvPr id="32" name="Text 30"/>
+          <p:cNvSpPr/>
+          <p:nvPr/>
+        </p:nvSpPr>
+        <p:spPr>
+          <a:xfrm>
+            <a:off x="3602736" y="3364992"/>
+            <a:ext cx="1554480" cy="475488"/>
           </a:xfrm>
           <a:prstGeom prst="rect">
             <a:avLst/>
@@ -28665,7 +28143,7 @@
                 <a:ea typeface="Trebuchet MS" pitchFamily="34" charset="-122"/>
                 <a:cs typeface="Trebuchet MS" pitchFamily="34" charset="-120"/>
               </a:rPr>
-              <a:t>ac</a:t>
+              <a:t>ver</a:t>
             </a:r>
             <a:endParaRPr lang="en-US" sz="1400" dirty="0"/>
           </a:p>
@@ -28673,14 +28151,14 @@
       </p:sp>
       <p:sp>
         <p:nvSpPr>
-          <p:cNvPr id="34" name="Text 32"/>
-          <p:cNvSpPr/>
-          <p:nvPr/>
-        </p:nvSpPr>
-        <p:spPr>
-          <a:xfrm>
-            <a:off x="6016752" y="3364992"/>
-            <a:ext cx="411480" cy="475488"/>
+          <p:cNvPr id="33" name="Text 31"/>
+          <p:cNvSpPr/>
+          <p:nvPr/>
+        </p:nvSpPr>
+        <p:spPr>
+          <a:xfrm>
+            <a:off x="5157216" y="3364992"/>
+            <a:ext cx="73152" cy="475488"/>
           </a:xfrm>
           <a:prstGeom prst="rect">
             <a:avLst/>
@@ -28712,14 +28190,14 @@
       </p:sp>
       <p:sp>
         <p:nvSpPr>
-          <p:cNvPr id="35" name="Shape 33"/>
-          <p:cNvSpPr/>
-          <p:nvPr/>
-        </p:nvSpPr>
-        <p:spPr>
-          <a:xfrm>
-            <a:off x="6428232" y="3364992"/>
-            <a:ext cx="1645920" cy="475488"/>
+          <p:cNvPr id="34" name="Shape 32"/>
+          <p:cNvSpPr/>
+          <p:nvPr/>
+        </p:nvSpPr>
+        <p:spPr>
+          <a:xfrm>
+            <a:off x="5230368" y="3364992"/>
+            <a:ext cx="1554480" cy="475488"/>
           </a:xfrm>
           <a:prstGeom prst="rect">
             <a:avLst>
@@ -28739,14 +28217,14 @@
       </p:sp>
       <p:sp>
         <p:nvSpPr>
-          <p:cNvPr id="36" name="Text 34"/>
-          <p:cNvSpPr/>
-          <p:nvPr/>
-        </p:nvSpPr>
-        <p:spPr>
-          <a:xfrm>
-            <a:off x="6428232" y="3364992"/>
-            <a:ext cx="1645920" cy="475488"/>
+          <p:cNvPr id="35" name="Text 33"/>
+          <p:cNvSpPr/>
+          <p:nvPr/>
+        </p:nvSpPr>
+        <p:spPr>
+          <a:xfrm>
+            <a:off x="5230368" y="3364992"/>
+            <a:ext cx="1554480" cy="475488"/>
           </a:xfrm>
           <a:prstGeom prst="rect">
             <a:avLst/>
@@ -28770,7 +28248,7 @@
                 <a:ea typeface="Trebuchet MS" pitchFamily="34" charset="-122"/>
                 <a:cs typeface="Trebuchet MS" pitchFamily="34" charset="-120"/>
               </a:rPr>
-              <a:t>tion</a:t>
+              <a:t>re</a:t>
             </a:r>
             <a:endParaRPr lang="en-US" sz="1400" dirty="0"/>
           </a:p>
@@ -28778,7 +28256,112 @@
       </p:sp>
       <p:sp>
         <p:nvSpPr>
+          <p:cNvPr id="36" name="Text 34"/>
+          <p:cNvSpPr/>
+          <p:nvPr/>
+        </p:nvSpPr>
+        <p:spPr>
+          <a:xfrm>
+            <a:off x="6784848" y="3364992"/>
+            <a:ext cx="73152" cy="475488"/>
+          </a:xfrm>
+          <a:prstGeom prst="rect">
+            <a:avLst/>
+          </a:prstGeom>
+          <a:noFill/>
+          <a:ln/>
+        </p:spPr>
+        <p:txBody>
+          <a:bodyPr wrap="square" lIns="0" tIns="0" rIns="0" bIns="0" rtlCol="0" anchor="ctr"/>
+          <a:lstStyle/>
+          <a:p>
+            <a:pPr algn="ctr" indent="0" marL="0">
+              <a:buNone/>
+            </a:pPr>
+            <a:r>
+              <a:rPr lang="en-US" sz="1600" b="1" dirty="0">
+                <a:solidFill>
+                  <a:srgbClr val="0D9488"/>
+                </a:solidFill>
+                <a:latin typeface="Trebuchet MS" pitchFamily="34" charset="0"/>
+                <a:ea typeface="Trebuchet MS" pitchFamily="34" charset="-122"/>
+                <a:cs typeface="Trebuchet MS" pitchFamily="34" charset="-120"/>
+              </a:rPr>
+              <a:t>·</a:t>
+            </a:r>
+            <a:endParaRPr lang="en-US" sz="1600" dirty="0"/>
+          </a:p>
+        </p:txBody>
+      </p:sp>
+      <p:sp>
+        <p:nvSpPr>
           <p:cNvPr id="37" name="Shape 35"/>
+          <p:cNvSpPr/>
+          <p:nvPr/>
+        </p:nvSpPr>
+        <p:spPr>
+          <a:xfrm>
+            <a:off x="6858000" y="3364992"/>
+            <a:ext cx="1554480" cy="475488"/>
+          </a:xfrm>
+          <a:prstGeom prst="rect">
+            <a:avLst>
+              <a:gd name="adj" fmla="val 9615"/>
+            </a:avLst>
+          </a:prstGeom>
+          <a:solidFill>
+            <a:srgbClr val="FFFFFF"/>
+          </a:solidFill>
+          <a:ln w="12700">
+            <a:solidFill>
+              <a:srgbClr val="0D9488"/>
+            </a:solidFill>
+            <a:prstDash val="solid"/>
+          </a:ln>
+        </p:spPr>
+      </p:sp>
+      <p:sp>
+        <p:nvSpPr>
+          <p:cNvPr id="38" name="Text 36"/>
+          <p:cNvSpPr/>
+          <p:nvPr/>
+        </p:nvSpPr>
+        <p:spPr>
+          <a:xfrm>
+            <a:off x="6858000" y="3364992"/>
+            <a:ext cx="1554480" cy="475488"/>
+          </a:xfrm>
+          <a:prstGeom prst="rect">
+            <a:avLst/>
+          </a:prstGeom>
+          <a:noFill/>
+          <a:ln/>
+        </p:spPr>
+        <p:txBody>
+          <a:bodyPr wrap="square" lIns="0" tIns="0" rIns="0" bIns="0" rtlCol="0" anchor="ctr"/>
+          <a:lstStyle/>
+          <a:p>
+            <a:pPr algn="ctr" indent="0" marL="0">
+              <a:buNone/>
+            </a:pPr>
+            <a:r>
+              <a:rPr lang="en-US" sz="1400" b="1" dirty="0">
+                <a:solidFill>
+                  <a:srgbClr val="0D9488"/>
+                </a:solidFill>
+                <a:latin typeface="Trebuchet MS" pitchFamily="34" charset="0"/>
+                <a:ea typeface="Trebuchet MS" pitchFamily="34" charset="-122"/>
+                <a:cs typeface="Trebuchet MS" pitchFamily="34" charset="-120"/>
+              </a:rPr>
+              <a:t>act</a:t>
+            </a:r>
+            <a:endParaRPr lang="en-US" sz="1400" dirty="0"/>
+          </a:p>
+        </p:txBody>
+      </p:sp>
+      <p:sp>
+        <p:nvSpPr>
+          <p:cNvPr id="39" name="Shape 37"/>
           <p:cNvSpPr/>
           <p:nvPr/>
         </p:nvSpPr>
@@ -28805,7 +28388,7 @@
       </p:sp>
       <p:sp>
         <p:nvSpPr>
-          <p:cNvPr id="38" name="Text 36"/>
+          <p:cNvPr id="40" name="Text 38"/>
           <p:cNvSpPr/>
           <p:nvPr/>
         </p:nvSpPr>
@@ -28844,18 +28427,18 @@
       </p:sp>
       <p:sp>
         <p:nvSpPr>
-          <p:cNvPr id="39" name="Shape 37"/>
+          <p:cNvPr id="41" name="Shape 39"/>
           <p:cNvSpPr/>
           <p:nvPr/>
         </p:nvSpPr>
         <p:spPr>
           <a:xfrm>
             <a:off x="1874520" y="4096512"/>
-            <a:ext cx="6903720" cy="804672"/>
+            <a:ext cx="6903720" cy="658368"/>
           </a:xfrm>
           <a:prstGeom prst="rect">
             <a:avLst>
-              <a:gd name="adj" fmla="val 6818"/>
+              <a:gd name="adj" fmla="val 8333"/>
             </a:avLst>
           </a:prstGeom>
           <a:solidFill>
@@ -28871,18 +28454,18 @@
       </p:sp>
       <p:sp>
         <p:nvSpPr>
-          <p:cNvPr id="40" name="Shape 38"/>
-          <p:cNvSpPr/>
-          <p:nvPr/>
-        </p:nvSpPr>
-        <p:spPr>
-          <a:xfrm>
-            <a:off x="2124837" y="4169664"/>
-            <a:ext cx="685800" cy="384048"/>
+          <p:cNvPr id="42" name="Shape 40"/>
+          <p:cNvSpPr/>
+          <p:nvPr/>
+        </p:nvSpPr>
+        <p:spPr>
+          <a:xfrm>
+            <a:off x="2023872" y="4169664"/>
+            <a:ext cx="685800" cy="475488"/>
           </a:xfrm>
           <a:prstGeom prst="rect">
             <a:avLst>
-              <a:gd name="adj" fmla="val 9524"/>
+              <a:gd name="adj" fmla="val 7692"/>
             </a:avLst>
           </a:prstGeom>
           <a:solidFill>
@@ -28898,14 +28481,14 @@
       </p:sp>
       <p:sp>
         <p:nvSpPr>
-          <p:cNvPr id="41" name="Text 39"/>
-          <p:cNvSpPr/>
-          <p:nvPr/>
-        </p:nvSpPr>
-        <p:spPr>
-          <a:xfrm>
-            <a:off x="2124837" y="4169664"/>
-            <a:ext cx="685800" cy="384048"/>
+          <p:cNvPr id="43" name="Text 41"/>
+          <p:cNvSpPr/>
+          <p:nvPr/>
+        </p:nvSpPr>
+        <p:spPr>
+          <a:xfrm>
+            <a:off x="2023872" y="4169664"/>
+            <a:ext cx="685800" cy="475488"/>
           </a:xfrm>
           <a:prstGeom prst="rect">
             <a:avLst/>
@@ -28929,7 +28512,7 @@
                 <a:ea typeface="Trebuchet MS" pitchFamily="34" charset="-122"/>
                 <a:cs typeface="Trebuchet MS" pitchFamily="34" charset="-120"/>
               </a:rPr>
-              <a:t>r</a:t>
+              <a:t>o</a:t>
             </a:r>
             <a:endParaRPr lang="en-US" sz="900" dirty="0"/>
           </a:p>
@@ -28937,18 +28520,18 @@
       </p:sp>
       <p:sp>
         <p:nvSpPr>
-          <p:cNvPr id="42" name="Shape 40"/>
-          <p:cNvSpPr/>
-          <p:nvPr/>
-        </p:nvSpPr>
-        <p:spPr>
-          <a:xfrm>
-            <a:off x="3033522" y="4169664"/>
-            <a:ext cx="685800" cy="384048"/>
+          <p:cNvPr id="44" name="Shape 42"/>
+          <p:cNvSpPr/>
+          <p:nvPr/>
+        </p:nvSpPr>
+        <p:spPr>
+          <a:xfrm>
+            <a:off x="2831592" y="4169664"/>
+            <a:ext cx="685800" cy="475488"/>
           </a:xfrm>
           <a:prstGeom prst="rect">
             <a:avLst>
-              <a:gd name="adj" fmla="val 9524"/>
+              <a:gd name="adj" fmla="val 7692"/>
             </a:avLst>
           </a:prstGeom>
           <a:solidFill>
@@ -28964,14 +28547,14 @@
       </p:sp>
       <p:sp>
         <p:nvSpPr>
-          <p:cNvPr id="43" name="Text 41"/>
-          <p:cNvSpPr/>
-          <p:nvPr/>
-        </p:nvSpPr>
-        <p:spPr>
-          <a:xfrm>
-            <a:off x="3033522" y="4169664"/>
-            <a:ext cx="685800" cy="384048"/>
+          <p:cNvPr id="45" name="Text 43"/>
+          <p:cNvSpPr/>
+          <p:nvPr/>
+        </p:nvSpPr>
+        <p:spPr>
+          <a:xfrm>
+            <a:off x="2831592" y="4169664"/>
+            <a:ext cx="685800" cy="475488"/>
           </a:xfrm>
           <a:prstGeom prst="rect">
             <a:avLst/>
@@ -28995,7 +28578,7 @@
                 <a:ea typeface="Trebuchet MS" pitchFamily="34" charset="-122"/>
                 <a:cs typeface="Trebuchet MS" pitchFamily="34" charset="-120"/>
               </a:rPr>
-              <a:t>e</a:t>
+              <a:t>v</a:t>
             </a:r>
             <a:endParaRPr lang="en-US" sz="900" dirty="0"/>
           </a:p>
@@ -29003,18 +28586,18 @@
       </p:sp>
       <p:sp>
         <p:nvSpPr>
-          <p:cNvPr id="44" name="Shape 42"/>
-          <p:cNvSpPr/>
-          <p:nvPr/>
-        </p:nvSpPr>
-        <p:spPr>
-          <a:xfrm>
-            <a:off x="3942207" y="4169664"/>
-            <a:ext cx="685800" cy="384048"/>
+          <p:cNvPr id="46" name="Shape 44"/>
+          <p:cNvSpPr/>
+          <p:nvPr/>
+        </p:nvSpPr>
+        <p:spPr>
+          <a:xfrm>
+            <a:off x="3639312" y="4169664"/>
+            <a:ext cx="685800" cy="475488"/>
           </a:xfrm>
           <a:prstGeom prst="rect">
             <a:avLst>
-              <a:gd name="adj" fmla="val 9524"/>
+              <a:gd name="adj" fmla="val 7692"/>
             </a:avLst>
           </a:prstGeom>
           <a:solidFill>
@@ -29030,14 +28613,14 @@
       </p:sp>
       <p:sp>
         <p:nvSpPr>
-          <p:cNvPr id="45" name="Text 43"/>
-          <p:cNvSpPr/>
-          <p:nvPr/>
-        </p:nvSpPr>
-        <p:spPr>
-          <a:xfrm>
-            <a:off x="3942207" y="4169664"/>
-            <a:ext cx="685800" cy="384048"/>
+          <p:cNvPr id="47" name="Text 45"/>
+          <p:cNvSpPr/>
+          <p:nvPr/>
+        </p:nvSpPr>
+        <p:spPr>
+          <a:xfrm>
+            <a:off x="3639312" y="4169664"/>
+            <a:ext cx="685800" cy="475488"/>
           </a:xfrm>
           <a:prstGeom prst="rect">
             <a:avLst/>
@@ -29061,7 +28644,7 @@
                 <a:ea typeface="Trebuchet MS" pitchFamily="34" charset="-122"/>
                 <a:cs typeface="Trebuchet MS" pitchFamily="34" charset="-120"/>
               </a:rPr>
-              <a:t>a</a:t>
+              <a:t>er</a:t>
             </a:r>
             <a:endParaRPr lang="en-US" sz="900" dirty="0"/>
           </a:p>
@@ -29069,18 +28652,18 @@
       </p:sp>
       <p:sp>
         <p:nvSpPr>
-          <p:cNvPr id="46" name="Shape 44"/>
-          <p:cNvSpPr/>
-          <p:nvPr/>
-        </p:nvSpPr>
-        <p:spPr>
-          <a:xfrm>
-            <a:off x="4850892" y="4169664"/>
-            <a:ext cx="685800" cy="384048"/>
+          <p:cNvPr id="48" name="Shape 46"/>
+          <p:cNvSpPr/>
+          <p:nvPr/>
+        </p:nvSpPr>
+        <p:spPr>
+          <a:xfrm>
+            <a:off x="4447032" y="4169664"/>
+            <a:ext cx="685800" cy="475488"/>
           </a:xfrm>
           <a:prstGeom prst="rect">
             <a:avLst>
-              <a:gd name="adj" fmla="val 9524"/>
+              <a:gd name="adj" fmla="val 7692"/>
             </a:avLst>
           </a:prstGeom>
           <a:solidFill>
@@ -29096,14 +28679,14 @@
       </p:sp>
       <p:sp>
         <p:nvSpPr>
-          <p:cNvPr id="47" name="Text 45"/>
-          <p:cNvSpPr/>
-          <p:nvPr/>
-        </p:nvSpPr>
-        <p:spPr>
-          <a:xfrm>
-            <a:off x="4850892" y="4169664"/>
-            <a:ext cx="685800" cy="384048"/>
+          <p:cNvPr id="49" name="Text 47"/>
+          <p:cNvSpPr/>
+          <p:nvPr/>
+        </p:nvSpPr>
+        <p:spPr>
+          <a:xfrm>
+            <a:off x="4447032" y="4169664"/>
+            <a:ext cx="685800" cy="475488"/>
           </a:xfrm>
           <a:prstGeom prst="rect">
             <a:avLst/>
@@ -29127,7 +28710,7 @@
                 <a:ea typeface="Trebuchet MS" pitchFamily="34" charset="-122"/>
                 <a:cs typeface="Trebuchet MS" pitchFamily="34" charset="-120"/>
               </a:rPr>
-              <a:t>c</a:t>
+              <a:t>r</a:t>
             </a:r>
             <a:endParaRPr lang="en-US" sz="900" dirty="0"/>
           </a:p>
@@ -29135,57 +28718,18 @@
       </p:sp>
       <p:sp>
         <p:nvSpPr>
-          <p:cNvPr id="48" name="Text 46"/>
-          <p:cNvSpPr/>
-          <p:nvPr/>
-        </p:nvSpPr>
-        <p:spPr>
-          <a:xfrm>
-            <a:off x="4850892" y="4572000"/>
-            <a:ext cx="685800" cy="219456"/>
-          </a:xfrm>
-          <a:prstGeom prst="rect">
-            <a:avLst/>
-          </a:prstGeom>
-          <a:noFill/>
-          <a:ln/>
-        </p:spPr>
-        <p:txBody>
-          <a:bodyPr wrap="square" lIns="0" tIns="0" rIns="0" bIns="0" rtlCol="0" anchor="t"/>
-          <a:lstStyle/>
-          <a:p>
-            <a:pPr algn="ctr" indent="0" marL="0">
-              <a:buNone/>
-            </a:pPr>
-            <a:r>
-              <a:rPr lang="en-US" sz="750" i="1" dirty="0">
-                <a:solidFill>
-                  <a:srgbClr val="94A3B8"/>
-                </a:solidFill>
-                <a:latin typeface="Calibri" pitchFamily="34" charset="0"/>
-                <a:ea typeface="Calibri" pitchFamily="34" charset="-122"/>
-                <a:cs typeface="Calibri" pitchFamily="34" charset="-120"/>
-              </a:rPr>
-              <a:t>/k/</a:t>
-            </a:r>
-            <a:endParaRPr lang="en-US" sz="750" dirty="0"/>
-          </a:p>
-        </p:txBody>
-      </p:sp>
-      <p:sp>
-        <p:nvSpPr>
-          <p:cNvPr id="49" name="Shape 47"/>
-          <p:cNvSpPr/>
-          <p:nvPr/>
-        </p:nvSpPr>
-        <p:spPr>
-          <a:xfrm>
-            <a:off x="5759577" y="4169664"/>
-            <a:ext cx="685800" cy="384048"/>
+          <p:cNvPr id="50" name="Shape 48"/>
+          <p:cNvSpPr/>
+          <p:nvPr/>
+        </p:nvSpPr>
+        <p:spPr>
+          <a:xfrm>
+            <a:off x="5254752" y="4169664"/>
+            <a:ext cx="685800" cy="475488"/>
           </a:xfrm>
           <a:prstGeom prst="rect">
             <a:avLst>
-              <a:gd name="adj" fmla="val 9524"/>
+              <a:gd name="adj" fmla="val 7692"/>
             </a:avLst>
           </a:prstGeom>
           <a:solidFill>
@@ -29201,14 +28745,14 @@
       </p:sp>
       <p:sp>
         <p:nvSpPr>
-          <p:cNvPr id="50" name="Text 48"/>
-          <p:cNvSpPr/>
-          <p:nvPr/>
-        </p:nvSpPr>
-        <p:spPr>
-          <a:xfrm>
-            <a:off x="5759577" y="4169664"/>
-            <a:ext cx="685800" cy="384048"/>
+          <p:cNvPr id="51" name="Text 49"/>
+          <p:cNvSpPr/>
+          <p:nvPr/>
+        </p:nvSpPr>
+        <p:spPr>
+          <a:xfrm>
+            <a:off x="5254752" y="4169664"/>
+            <a:ext cx="685800" cy="475488"/>
           </a:xfrm>
           <a:prstGeom prst="rect">
             <a:avLst/>
@@ -29232,7 +28776,7 @@
                 <a:ea typeface="Trebuchet MS" pitchFamily="34" charset="-122"/>
                 <a:cs typeface="Trebuchet MS" pitchFamily="34" charset="-120"/>
               </a:rPr>
-              <a:t>t</a:t>
+              <a:t>e</a:t>
             </a:r>
             <a:endParaRPr lang="en-US" sz="900" dirty="0"/>
           </a:p>
@@ -29240,18 +28784,18 @@
       </p:sp>
       <p:sp>
         <p:nvSpPr>
-          <p:cNvPr id="51" name="Shape 49"/>
-          <p:cNvSpPr/>
-          <p:nvPr/>
-        </p:nvSpPr>
-        <p:spPr>
-          <a:xfrm>
-            <a:off x="6668262" y="4169664"/>
-            <a:ext cx="685800" cy="384048"/>
+          <p:cNvPr id="52" name="Shape 50"/>
+          <p:cNvSpPr/>
+          <p:nvPr/>
+        </p:nvSpPr>
+        <p:spPr>
+          <a:xfrm>
+            <a:off x="6062472" y="4169664"/>
+            <a:ext cx="685800" cy="475488"/>
           </a:xfrm>
           <a:prstGeom prst="rect">
             <a:avLst>
-              <a:gd name="adj" fmla="val 9524"/>
+              <a:gd name="adj" fmla="val 7692"/>
             </a:avLst>
           </a:prstGeom>
           <a:solidFill>
@@ -29267,14 +28811,14 @@
       </p:sp>
       <p:sp>
         <p:nvSpPr>
-          <p:cNvPr id="52" name="Text 50"/>
-          <p:cNvSpPr/>
-          <p:nvPr/>
-        </p:nvSpPr>
-        <p:spPr>
-          <a:xfrm>
-            <a:off x="6668262" y="4169664"/>
-            <a:ext cx="685800" cy="384048"/>
+          <p:cNvPr id="53" name="Text 51"/>
+          <p:cNvSpPr/>
+          <p:nvPr/>
+        </p:nvSpPr>
+        <p:spPr>
+          <a:xfrm>
+            <a:off x="6062472" y="4169664"/>
+            <a:ext cx="685800" cy="475488"/>
           </a:xfrm>
           <a:prstGeom prst="rect">
             <a:avLst/>
@@ -29298,7 +28842,7 @@
                 <a:ea typeface="Trebuchet MS" pitchFamily="34" charset="-122"/>
                 <a:cs typeface="Trebuchet MS" pitchFamily="34" charset="-120"/>
               </a:rPr>
-              <a:t>io</a:t>
+              <a:t>a</a:t>
             </a:r>
             <a:endParaRPr lang="en-US" sz="900" dirty="0"/>
           </a:p>
@@ -29306,57 +28850,18 @@
       </p:sp>
       <p:sp>
         <p:nvSpPr>
-          <p:cNvPr id="53" name="Text 51"/>
-          <p:cNvSpPr/>
-          <p:nvPr/>
-        </p:nvSpPr>
-        <p:spPr>
-          <a:xfrm>
-            <a:off x="6668262" y="4572000"/>
-            <a:ext cx="685800" cy="219456"/>
-          </a:xfrm>
-          <a:prstGeom prst="rect">
-            <a:avLst/>
-          </a:prstGeom>
-          <a:noFill/>
-          <a:ln/>
-        </p:spPr>
-        <p:txBody>
-          <a:bodyPr wrap="square" lIns="0" tIns="0" rIns="0" bIns="0" rtlCol="0" anchor="t"/>
-          <a:lstStyle/>
-          <a:p>
-            <a:pPr algn="ctr" indent="0" marL="0">
-              <a:buNone/>
-            </a:pPr>
-            <a:r>
-              <a:rPr lang="en-US" sz="750" i="1" dirty="0">
-                <a:solidFill>
-                  <a:srgbClr val="94A3B8"/>
-                </a:solidFill>
-                <a:latin typeface="Calibri" pitchFamily="34" charset="0"/>
-                <a:ea typeface="Calibri" pitchFamily="34" charset="-122"/>
-                <a:cs typeface="Calibri" pitchFamily="34" charset="-120"/>
-              </a:rPr>
-              <a:t>/sh/</a:t>
-            </a:r>
-            <a:endParaRPr lang="en-US" sz="750" dirty="0"/>
-          </a:p>
-        </p:txBody>
-      </p:sp>
-      <p:sp>
-        <p:nvSpPr>
           <p:cNvPr id="54" name="Shape 52"/>
           <p:cNvSpPr/>
           <p:nvPr/>
         </p:nvSpPr>
         <p:spPr>
           <a:xfrm>
-            <a:off x="7576947" y="4169664"/>
-            <a:ext cx="685800" cy="384048"/>
+            <a:off x="6870192" y="4169664"/>
+            <a:ext cx="685800" cy="475488"/>
           </a:xfrm>
           <a:prstGeom prst="rect">
             <a:avLst>
-              <a:gd name="adj" fmla="val 9524"/>
+              <a:gd name="adj" fmla="val 7692"/>
             </a:avLst>
           </a:prstGeom>
           <a:solidFill>
@@ -29378,8 +28883,8 @@
         </p:nvSpPr>
         <p:spPr>
           <a:xfrm>
-            <a:off x="7576947" y="4169664"/>
-            <a:ext cx="685800" cy="384048"/>
+            <a:off x="6870192" y="4169664"/>
+            <a:ext cx="685800" cy="475488"/>
           </a:xfrm>
           <a:prstGeom prst="rect">
             <a:avLst/>
@@ -29403,7 +28908,73 @@
                 <a:ea typeface="Trebuchet MS" pitchFamily="34" charset="-122"/>
                 <a:cs typeface="Trebuchet MS" pitchFamily="34" charset="-120"/>
               </a:rPr>
-              <a:t>n</a:t>
+              <a:t>c</a:t>
+            </a:r>
+            <a:endParaRPr lang="en-US" sz="900" dirty="0"/>
+          </a:p>
+        </p:txBody>
+      </p:sp>
+      <p:sp>
+        <p:nvSpPr>
+          <p:cNvPr id="56" name="Shape 54"/>
+          <p:cNvSpPr/>
+          <p:nvPr/>
+        </p:nvSpPr>
+        <p:spPr>
+          <a:xfrm>
+            <a:off x="7677912" y="4169664"/>
+            <a:ext cx="685800" cy="475488"/>
+          </a:xfrm>
+          <a:prstGeom prst="rect">
+            <a:avLst>
+              <a:gd name="adj" fmla="val 7692"/>
+            </a:avLst>
+          </a:prstGeom>
+          <a:solidFill>
+            <a:srgbClr val="FFFFFF"/>
+          </a:solidFill>
+          <a:ln w="12700">
+            <a:solidFill>
+              <a:srgbClr val="DB2777"/>
+            </a:solidFill>
+            <a:prstDash val="solid"/>
+          </a:ln>
+        </p:spPr>
+      </p:sp>
+      <p:sp>
+        <p:nvSpPr>
+          <p:cNvPr id="57" name="Text 55"/>
+          <p:cNvSpPr/>
+          <p:nvPr/>
+        </p:nvSpPr>
+        <p:spPr>
+          <a:xfrm>
+            <a:off x="7677912" y="4169664"/>
+            <a:ext cx="685800" cy="475488"/>
+          </a:xfrm>
+          <a:prstGeom prst="rect">
+            <a:avLst/>
+          </a:prstGeom>
+          <a:noFill/>
+          <a:ln/>
+        </p:spPr>
+        <p:txBody>
+          <a:bodyPr wrap="square" lIns="0" tIns="0" rIns="0" bIns="0" rtlCol="0" anchor="ctr"/>
+          <a:lstStyle/>
+          <a:p>
+            <a:pPr algn="ctr" indent="0" marL="0">
+              <a:buNone/>
+            </a:pPr>
+            <a:r>
+              <a:rPr lang="en-US" sz="900" b="1" dirty="0">
+                <a:solidFill>
+                  <a:srgbClr val="9D174D"/>
+                </a:solidFill>
+                <a:latin typeface="Trebuchet MS" pitchFamily="34" charset="0"/>
+                <a:ea typeface="Trebuchet MS" pitchFamily="34" charset="-122"/>
+                <a:cs typeface="Trebuchet MS" pitchFamily="34" charset="-120"/>
+              </a:rPr>
+              <a:t>t</a:t>
             </a:r>
             <a:endParaRPr lang="en-US" sz="900" dirty="0"/>
           </a:p>
@@ -29834,7 +29405,7 @@
                 <a:ea typeface="Trebuchet MS" pitchFamily="34" charset="-122"/>
                 <a:cs typeface="Trebuchet MS" pitchFamily="34" charset="-120"/>
               </a:rPr>
-              <a:t>reactive</a:t>
+              <a:t>reactor</a:t>
             </a:r>
             <a:endParaRPr lang="en-US" sz="2800" dirty="0"/>
           </a:p>
@@ -30661,7 +30232,7 @@
                 <a:ea typeface="Trebuchet MS" pitchFamily="34" charset="-122"/>
                 <a:cs typeface="Trebuchet MS" pitchFamily="34" charset="-120"/>
               </a:rPr>
-              <a:t>reactive</a:t>
+              <a:t>reactor</a:t>
             </a:r>
             <a:endParaRPr lang="en-US" sz="2800" dirty="0"/>
           </a:p>
@@ -30839,7 +30410,7 @@
                 <a:ea typeface="Calibri" pitchFamily="34" charset="-122"/>
                 <a:cs typeface="Calibri" pitchFamily="34" charset="-120"/>
               </a:rPr>
-              <a:t>again, back</a:t>
+              <a:t>back, again</a:t>
             </a:r>
             <a:endParaRPr lang="en-US" sz="850" dirty="0"/>
           </a:p>
@@ -30951,7 +30522,7 @@
                 <a:ea typeface="Calibri" pitchFamily="34" charset="-122"/>
                 <a:cs typeface="Calibri" pitchFamily="34" charset="-120"/>
               </a:rPr>
-              <a:t>to do, to act</a:t>
+              <a:t>to do, to drive</a:t>
             </a:r>
             <a:endParaRPr lang="en-US" sz="850" dirty="0"/>
           </a:p>
@@ -31024,7 +30595,7 @@
                 <a:ea typeface="Trebuchet MS" pitchFamily="34" charset="-122"/>
                 <a:cs typeface="Trebuchet MS" pitchFamily="34" charset="-120"/>
               </a:rPr>
-              <a:t>ive</a:t>
+              <a:t>or</a:t>
             </a:r>
             <a:endParaRPr lang="en-US" sz="1300" dirty="0"/>
           </a:p>
@@ -31063,7 +30634,7 @@
                 <a:ea typeface="Calibri" pitchFamily="34" charset="-122"/>
                 <a:cs typeface="Calibri" pitchFamily="34" charset="-120"/>
               </a:rPr>
-              <a:t>tending to, having the quality of</a:t>
+              <a:t>a person or thing that does</a:t>
             </a:r>
             <a:endParaRPr lang="en-US" sz="850" dirty="0"/>
           </a:p>
@@ -31758,7 +31329,7 @@
                 <a:ea typeface="Trebuchet MS" pitchFamily="34" charset="-122"/>
                 <a:cs typeface="Trebuchet MS" pitchFamily="34" charset="-120"/>
               </a:rPr>
-              <a:t>reactive</a:t>
+              <a:t>reactor</a:t>
             </a:r>
             <a:endParaRPr lang="en-US" sz="2800" dirty="0"/>
           </a:p>
@@ -31936,7 +31507,7 @@
                 <a:ea typeface="Calibri" pitchFamily="34" charset="-122"/>
                 <a:cs typeface="Calibri" pitchFamily="34" charset="-120"/>
               </a:rPr>
-              <a:t>again, back</a:t>
+              <a:t>back, again</a:t>
             </a:r>
             <a:endParaRPr lang="en-US" sz="850" dirty="0"/>
           </a:p>
@@ -32048,7 +31619,7 @@
                 <a:ea typeface="Calibri" pitchFamily="34" charset="-122"/>
                 <a:cs typeface="Calibri" pitchFamily="34" charset="-120"/>
               </a:rPr>
-              <a:t>to do, to act</a:t>
+              <a:t>to do, to drive</a:t>
             </a:r>
             <a:endParaRPr lang="en-US" sz="850" dirty="0"/>
           </a:p>
@@ -32121,7 +31692,7 @@
                 <a:ea typeface="Trebuchet MS" pitchFamily="34" charset="-122"/>
                 <a:cs typeface="Trebuchet MS" pitchFamily="34" charset="-120"/>
               </a:rPr>
-              <a:t>ive</a:t>
+              <a:t>or</a:t>
             </a:r>
             <a:endParaRPr lang="en-US" sz="1300" dirty="0"/>
           </a:p>
@@ -32160,7 +31731,7 @@
                 <a:ea typeface="Calibri" pitchFamily="34" charset="-122"/>
                 <a:cs typeface="Calibri" pitchFamily="34" charset="-120"/>
               </a:rPr>
-              <a:t>tending to, having the quality of</a:t>
+              <a:t>a person or thing that does</a:t>
             </a:r>
             <a:endParaRPr lang="en-US" sz="850" dirty="0"/>
           </a:p>
@@ -32529,7 +32100,7 @@
                 <a:ea typeface="Trebuchet MS" pitchFamily="34" charset="-122"/>
                 <a:cs typeface="Trebuchet MS" pitchFamily="34" charset="-120"/>
               </a:rPr>
-              <a:t>tive</a:t>
+              <a:t>tor</a:t>
             </a:r>
             <a:endParaRPr lang="en-US" sz="1400" dirty="0"/>
           </a:p>
@@ -33092,7 +32663,7 @@
                 <a:ea typeface="Trebuchet MS" pitchFamily="34" charset="-122"/>
                 <a:cs typeface="Trebuchet MS" pitchFamily="34" charset="-120"/>
               </a:rPr>
-              <a:t>reactive</a:t>
+              <a:t>reactor</a:t>
             </a:r>
             <a:endParaRPr lang="en-US" sz="2800" dirty="0"/>
           </a:p>
@@ -33270,7 +32841,7 @@
                 <a:ea typeface="Calibri" pitchFamily="34" charset="-122"/>
                 <a:cs typeface="Calibri" pitchFamily="34" charset="-120"/>
               </a:rPr>
-              <a:t>again, back</a:t>
+              <a:t>back, again</a:t>
             </a:r>
             <a:endParaRPr lang="en-US" sz="850" dirty="0"/>
           </a:p>
@@ -33382,7 +32953,7 @@
                 <a:ea typeface="Calibri" pitchFamily="34" charset="-122"/>
                 <a:cs typeface="Calibri" pitchFamily="34" charset="-120"/>
               </a:rPr>
-              <a:t>to do, to act</a:t>
+              <a:t>to do, to drive</a:t>
             </a:r>
             <a:endParaRPr lang="en-US" sz="850" dirty="0"/>
           </a:p>
@@ -33455,7 +33026,7 @@
                 <a:ea typeface="Trebuchet MS" pitchFamily="34" charset="-122"/>
                 <a:cs typeface="Trebuchet MS" pitchFamily="34" charset="-120"/>
               </a:rPr>
-              <a:t>ive</a:t>
+              <a:t>or</a:t>
             </a:r>
             <a:endParaRPr lang="en-US" sz="1300" dirty="0"/>
           </a:p>
@@ -33494,7 +33065,7 @@
                 <a:ea typeface="Calibri" pitchFamily="34" charset="-122"/>
                 <a:cs typeface="Calibri" pitchFamily="34" charset="-120"/>
               </a:rPr>
-              <a:t>tending to, having the quality of</a:t>
+              <a:t>a person or thing that does</a:t>
             </a:r>
             <a:endParaRPr lang="en-US" sz="850" dirty="0"/>
           </a:p>
@@ -33863,7 +33434,7 @@
                 <a:ea typeface="Trebuchet MS" pitchFamily="34" charset="-122"/>
                 <a:cs typeface="Trebuchet MS" pitchFamily="34" charset="-120"/>
               </a:rPr>
-              <a:t>tive</a:t>
+              <a:t>tor</a:t>
             </a:r>
             <a:endParaRPr lang="en-US" sz="1400" dirty="0"/>
           </a:p>
@@ -33944,11 +33515,11 @@
         <p:spPr>
           <a:xfrm>
             <a:off x="1874520" y="4096512"/>
-            <a:ext cx="6903720" cy="804672"/>
+            <a:ext cx="6903720" cy="658368"/>
           </a:xfrm>
           <a:prstGeom prst="rect">
             <a:avLst>
-              <a:gd name="adj" fmla="val 6818"/>
+              <a:gd name="adj" fmla="val 8333"/>
             </a:avLst>
           </a:prstGeom>
           <a:solidFill>
@@ -33970,12 +33541,12 @@
         </p:nvSpPr>
         <p:spPr>
           <a:xfrm>
-            <a:off x="2124837" y="4169664"/>
-            <a:ext cx="685800" cy="384048"/>
+            <a:off x="2254649" y="4169664"/>
+            <a:ext cx="685800" cy="475488"/>
           </a:xfrm>
           <a:prstGeom prst="rect">
             <a:avLst>
-              <a:gd name="adj" fmla="val 9524"/>
+              <a:gd name="adj" fmla="val 7692"/>
             </a:avLst>
           </a:prstGeom>
           <a:solidFill>
@@ -33997,8 +33568,8 @@
         </p:nvSpPr>
         <p:spPr>
           <a:xfrm>
-            <a:off x="2124837" y="4169664"/>
-            <a:ext cx="685800" cy="384048"/>
+            <a:off x="2254649" y="4169664"/>
+            <a:ext cx="685800" cy="475488"/>
           </a:xfrm>
           <a:prstGeom prst="rect">
             <a:avLst/>
@@ -34036,12 +33607,12 @@
         </p:nvSpPr>
         <p:spPr>
           <a:xfrm>
-            <a:off x="3033522" y="4169664"/>
-            <a:ext cx="685800" cy="384048"/>
+            <a:off x="3293146" y="4169664"/>
+            <a:ext cx="685800" cy="475488"/>
           </a:xfrm>
           <a:prstGeom prst="rect">
             <a:avLst>
-              <a:gd name="adj" fmla="val 9524"/>
+              <a:gd name="adj" fmla="val 7692"/>
             </a:avLst>
           </a:prstGeom>
           <a:solidFill>
@@ -34063,8 +33634,8 @@
         </p:nvSpPr>
         <p:spPr>
           <a:xfrm>
-            <a:off x="3033522" y="4169664"/>
-            <a:ext cx="685800" cy="384048"/>
+            <a:off x="3293146" y="4169664"/>
+            <a:ext cx="685800" cy="475488"/>
           </a:xfrm>
           <a:prstGeom prst="rect">
             <a:avLst/>
@@ -34102,12 +33673,12 @@
         </p:nvSpPr>
         <p:spPr>
           <a:xfrm>
-            <a:off x="3942207" y="4169664"/>
-            <a:ext cx="685800" cy="384048"/>
+            <a:off x="4331643" y="4169664"/>
+            <a:ext cx="685800" cy="475488"/>
           </a:xfrm>
           <a:prstGeom prst="rect">
             <a:avLst>
-              <a:gd name="adj" fmla="val 9524"/>
+              <a:gd name="adj" fmla="val 7692"/>
             </a:avLst>
           </a:prstGeom>
           <a:solidFill>
@@ -34129,8 +33700,8 @@
         </p:nvSpPr>
         <p:spPr>
           <a:xfrm>
-            <a:off x="3942207" y="4169664"/>
-            <a:ext cx="685800" cy="384048"/>
+            <a:off x="4331643" y="4169664"/>
+            <a:ext cx="685800" cy="475488"/>
           </a:xfrm>
           <a:prstGeom prst="rect">
             <a:avLst/>
@@ -34168,12 +33739,12 @@
         </p:nvSpPr>
         <p:spPr>
           <a:xfrm>
-            <a:off x="4850892" y="4169664"/>
-            <a:ext cx="685800" cy="384048"/>
+            <a:off x="5370141" y="4169664"/>
+            <a:ext cx="685800" cy="475488"/>
           </a:xfrm>
           <a:prstGeom prst="rect">
             <a:avLst>
-              <a:gd name="adj" fmla="val 9524"/>
+              <a:gd name="adj" fmla="val 7692"/>
             </a:avLst>
           </a:prstGeom>
           <a:solidFill>
@@ -34195,8 +33766,8 @@
         </p:nvSpPr>
         <p:spPr>
           <a:xfrm>
-            <a:off x="4850892" y="4169664"/>
-            <a:ext cx="685800" cy="384048"/>
+            <a:off x="5370141" y="4169664"/>
+            <a:ext cx="685800" cy="475488"/>
           </a:xfrm>
           <a:prstGeom prst="rect">
             <a:avLst/>
@@ -34228,57 +33799,18 @@
       </p:sp>
       <p:sp>
         <p:nvSpPr>
-          <p:cNvPr id="47" name="Text 45"/>
-          <p:cNvSpPr/>
-          <p:nvPr/>
-        </p:nvSpPr>
-        <p:spPr>
-          <a:xfrm>
-            <a:off x="4850892" y="4572000"/>
-            <a:ext cx="685800" cy="219456"/>
-          </a:xfrm>
-          <a:prstGeom prst="rect">
-            <a:avLst/>
-          </a:prstGeom>
-          <a:noFill/>
-          <a:ln/>
-        </p:spPr>
-        <p:txBody>
-          <a:bodyPr wrap="square" lIns="0" tIns="0" rIns="0" bIns="0" rtlCol="0" anchor="t"/>
-          <a:lstStyle/>
-          <a:p>
-            <a:pPr algn="ctr" indent="0" marL="0">
-              <a:buNone/>
-            </a:pPr>
-            <a:r>
-              <a:rPr lang="en-US" sz="750" i="1" dirty="0">
-                <a:solidFill>
-                  <a:srgbClr val="94A3B8"/>
-                </a:solidFill>
-                <a:latin typeface="Calibri" pitchFamily="34" charset="0"/>
-                <a:ea typeface="Calibri" pitchFamily="34" charset="-122"/>
-                <a:cs typeface="Calibri" pitchFamily="34" charset="-120"/>
-              </a:rPr>
-              <a:t>/k/</a:t>
-            </a:r>
-            <a:endParaRPr lang="en-US" sz="750" dirty="0"/>
-          </a:p>
-        </p:txBody>
-      </p:sp>
-      <p:sp>
-        <p:nvSpPr>
-          <p:cNvPr id="48" name="Shape 46"/>
-          <p:cNvSpPr/>
-          <p:nvPr/>
-        </p:nvSpPr>
-        <p:spPr>
-          <a:xfrm>
-            <a:off x="5759577" y="4169664"/>
-            <a:ext cx="685800" cy="384048"/>
+          <p:cNvPr id="47" name="Shape 45"/>
+          <p:cNvSpPr/>
+          <p:nvPr/>
+        </p:nvSpPr>
+        <p:spPr>
+          <a:xfrm>
+            <a:off x="6408638" y="4169664"/>
+            <a:ext cx="685800" cy="475488"/>
           </a:xfrm>
           <a:prstGeom prst="rect">
             <a:avLst>
-              <a:gd name="adj" fmla="val 9524"/>
+              <a:gd name="adj" fmla="val 7692"/>
             </a:avLst>
           </a:prstGeom>
           <a:solidFill>
@@ -34294,14 +33826,14 @@
       </p:sp>
       <p:sp>
         <p:nvSpPr>
-          <p:cNvPr id="49" name="Text 47"/>
-          <p:cNvSpPr/>
-          <p:nvPr/>
-        </p:nvSpPr>
-        <p:spPr>
-          <a:xfrm>
-            <a:off x="5759577" y="4169664"/>
-            <a:ext cx="685800" cy="384048"/>
+          <p:cNvPr id="48" name="Text 46"/>
+          <p:cNvSpPr/>
+          <p:nvPr/>
+        </p:nvSpPr>
+        <p:spPr>
+          <a:xfrm>
+            <a:off x="6408638" y="4169664"/>
+            <a:ext cx="685800" cy="475488"/>
           </a:xfrm>
           <a:prstGeom prst="rect">
             <a:avLst/>
@@ -34333,18 +33865,18 @@
       </p:sp>
       <p:sp>
         <p:nvSpPr>
-          <p:cNvPr id="50" name="Shape 48"/>
-          <p:cNvSpPr/>
-          <p:nvPr/>
-        </p:nvSpPr>
-        <p:spPr>
-          <a:xfrm>
-            <a:off x="6668262" y="4169664"/>
-            <a:ext cx="685800" cy="384048"/>
+          <p:cNvPr id="49" name="Shape 47"/>
+          <p:cNvSpPr/>
+          <p:nvPr/>
+        </p:nvSpPr>
+        <p:spPr>
+          <a:xfrm>
+            <a:off x="7447135" y="4169664"/>
+            <a:ext cx="685800" cy="475488"/>
           </a:xfrm>
           <a:prstGeom prst="rect">
             <a:avLst>
-              <a:gd name="adj" fmla="val 9524"/>
+              <a:gd name="adj" fmla="val 7692"/>
             </a:avLst>
           </a:prstGeom>
           <a:solidFill>
@@ -34360,14 +33892,14 @@
       </p:sp>
       <p:sp>
         <p:nvSpPr>
-          <p:cNvPr id="51" name="Text 49"/>
-          <p:cNvSpPr/>
-          <p:nvPr/>
-        </p:nvSpPr>
-        <p:spPr>
-          <a:xfrm>
-            <a:off x="6668262" y="4169664"/>
-            <a:ext cx="685800" cy="384048"/>
+          <p:cNvPr id="50" name="Text 48"/>
+          <p:cNvSpPr/>
+          <p:nvPr/>
+        </p:nvSpPr>
+        <p:spPr>
+          <a:xfrm>
+            <a:off x="7447135" y="4169664"/>
+            <a:ext cx="685800" cy="475488"/>
           </a:xfrm>
           <a:prstGeom prst="rect">
             <a:avLst/>
@@ -34391,114 +33923,9 @@
                 <a:ea typeface="Trebuchet MS" pitchFamily="34" charset="-122"/>
                 <a:cs typeface="Trebuchet MS" pitchFamily="34" charset="-120"/>
               </a:rPr>
-              <a:t>i</a:t>
+              <a:t>or</a:t>
             </a:r>
             <a:endParaRPr lang="en-US" sz="900" dirty="0"/>
-          </a:p>
-        </p:txBody>
-      </p:sp>
-      <p:sp>
-        <p:nvSpPr>
-          <p:cNvPr id="52" name="Shape 50"/>
-          <p:cNvSpPr/>
-          <p:nvPr/>
-        </p:nvSpPr>
-        <p:spPr>
-          <a:xfrm>
-            <a:off x="7576947" y="4169664"/>
-            <a:ext cx="685800" cy="384048"/>
-          </a:xfrm>
-          <a:prstGeom prst="rect">
-            <a:avLst>
-              <a:gd name="adj" fmla="val 9524"/>
-            </a:avLst>
-          </a:prstGeom>
-          <a:solidFill>
-            <a:srgbClr val="FFFFFF"/>
-          </a:solidFill>
-          <a:ln w="12700">
-            <a:solidFill>
-              <a:srgbClr val="DB2777"/>
-            </a:solidFill>
-            <a:prstDash val="solid"/>
-          </a:ln>
-        </p:spPr>
-      </p:sp>
-      <p:sp>
-        <p:nvSpPr>
-          <p:cNvPr id="53" name="Text 51"/>
-          <p:cNvSpPr/>
-          <p:nvPr/>
-        </p:nvSpPr>
-        <p:spPr>
-          <a:xfrm>
-            <a:off x="7576947" y="4169664"/>
-            <a:ext cx="685800" cy="384048"/>
-          </a:xfrm>
-          <a:prstGeom prst="rect">
-            <a:avLst/>
-          </a:prstGeom>
-          <a:noFill/>
-          <a:ln/>
-        </p:spPr>
-        <p:txBody>
-          <a:bodyPr wrap="square" lIns="0" tIns="0" rIns="0" bIns="0" rtlCol="0" anchor="ctr"/>
-          <a:lstStyle/>
-          <a:p>
-            <a:pPr algn="ctr" indent="0" marL="0">
-              <a:buNone/>
-            </a:pPr>
-            <a:r>
-              <a:rPr lang="en-US" sz="900" b="1" dirty="0">
-                <a:solidFill>
-                  <a:srgbClr val="9D174D"/>
-                </a:solidFill>
-                <a:latin typeface="Trebuchet MS" pitchFamily="34" charset="0"/>
-                <a:ea typeface="Trebuchet MS" pitchFamily="34" charset="-122"/>
-                <a:cs typeface="Trebuchet MS" pitchFamily="34" charset="-120"/>
-              </a:rPr>
-              <a:t>ve</a:t>
-            </a:r>
-            <a:endParaRPr lang="en-US" sz="900" dirty="0"/>
-          </a:p>
-        </p:txBody>
-      </p:sp>
-      <p:sp>
-        <p:nvSpPr>
-          <p:cNvPr id="54" name="Text 52"/>
-          <p:cNvSpPr/>
-          <p:nvPr/>
-        </p:nvSpPr>
-        <p:spPr>
-          <a:xfrm>
-            <a:off x="7576947" y="4572000"/>
-            <a:ext cx="685800" cy="219456"/>
-          </a:xfrm>
-          <a:prstGeom prst="rect">
-            <a:avLst/>
-          </a:prstGeom>
-          <a:noFill/>
-          <a:ln/>
-        </p:spPr>
-        <p:txBody>
-          <a:bodyPr wrap="square" lIns="0" tIns="0" rIns="0" bIns="0" rtlCol="0" anchor="t"/>
-          <a:lstStyle/>
-          <a:p>
-            <a:pPr algn="ctr" indent="0" marL="0">
-              <a:buNone/>
-            </a:pPr>
-            <a:r>
-              <a:rPr lang="en-US" sz="750" i="1" dirty="0">
-                <a:solidFill>
-                  <a:srgbClr val="94A3B8"/>
-                </a:solidFill>
-                <a:latin typeface="Calibri" pitchFamily="34" charset="0"/>
-                <a:ea typeface="Calibri" pitchFamily="34" charset="-122"/>
-                <a:cs typeface="Calibri" pitchFamily="34" charset="-120"/>
-              </a:rPr>
-              <a:t>/v/</a:t>
-            </a:r>
-            <a:endParaRPr lang="en-US" sz="750" dirty="0"/>
           </a:p>
         </p:txBody>
       </p:sp>
@@ -36603,7 +36030,7 @@
                 <a:ea typeface="Trebuchet MS" pitchFamily="34" charset="-122"/>
                 <a:cs typeface="Trebuchet MS" pitchFamily="34" charset="-120"/>
               </a:rPr>
-              <a:t>inter-</a:t>
+              <a:t>counter-</a:t>
             </a:r>
             <a:endParaRPr lang="en-US" sz="1300" dirty="0"/>
           </a:p>
@@ -36756,7 +36183,7 @@
                 <a:ea typeface="Trebuchet MS" pitchFamily="34" charset="-122"/>
                 <a:cs typeface="Trebuchet MS" pitchFamily="34" charset="-120"/>
               </a:rPr>
-              <a:t>counter-</a:t>
+              <a:t>inter-</a:t>
             </a:r>
             <a:endParaRPr lang="en-US" sz="1300" dirty="0"/>
           </a:p>
@@ -37433,7 +36860,7 @@
                 <a:ea typeface="Trebuchet MS" pitchFamily="34" charset="-122"/>
                 <a:cs typeface="Trebuchet MS" pitchFamily="34" charset="-120"/>
               </a:rPr>
-              <a:t>reactance</a:t>
+              <a:t>reacted</a:t>
             </a:r>
             <a:endParaRPr lang="en-US" sz="1200" dirty="0"/>
           </a:p>
@@ -37499,7 +36926,7 @@
                 <a:ea typeface="Trebuchet MS" pitchFamily="34" charset="-122"/>
                 <a:cs typeface="Trebuchet MS" pitchFamily="34" charset="-120"/>
               </a:rPr>
-              <a:t>reacted</a:t>
+              <a:t>reactance</a:t>
             </a:r>
             <a:endParaRPr lang="en-US" sz="1200" dirty="0"/>
           </a:p>
@@ -37565,7 +36992,7 @@
                 <a:ea typeface="Trebuchet MS" pitchFamily="34" charset="-122"/>
                 <a:cs typeface="Trebuchet MS" pitchFamily="34" charset="-120"/>
               </a:rPr>
-              <a:t>interreact</a:t>
+              <a:t>counterreact</a:t>
             </a:r>
             <a:endParaRPr lang="en-US" sz="1200" dirty="0"/>
           </a:p>
@@ -38753,7 +38180,7 @@
                 <a:ea typeface="Calibri" pitchFamily="34" charset="-122"/>
                 <a:cs typeface="Calibri" pitchFamily="34" charset="-120"/>
               </a:rPr>
-              <a:t>1.  The root 'react' comes from Latin.</a:t>
+              <a:t>1.  The prefix 're-' in 'react' means 'back' or 'again'.</a:t>
             </a:r>
             <a:endParaRPr lang="en-US" sz="1300" dirty="0"/>
           </a:p>
@@ -38892,7 +38319,7 @@
                 <a:ea typeface="Calibri" pitchFamily="34" charset="-122"/>
                 <a:cs typeface="Calibri" pitchFamily="34" charset="-120"/>
               </a:rPr>
-              <a:t>2.  'Overreact' means to respond in exactly the right way.</a:t>
+              <a:t>2.  Adding the suffix '-ion' to 'react' makes the noun 'reaction'.</a:t>
             </a:r>
             <a:endParaRPr lang="en-US" sz="1300" dirty="0"/>
           </a:p>
@@ -38915,11 +38342,11 @@
             </a:avLst>
           </a:prstGeom>
           <a:solidFill>
-            <a:srgbClr val="FEE2E2"/>
-          </a:solidFill>
-          <a:ln w="12700">
-            <a:solidFill>
-              <a:srgbClr val="DC2626"/>
+            <a:srgbClr val="DCFCE7"/>
+          </a:solidFill>
+          <a:ln w="12700">
+            <a:solidFill>
+              <a:srgbClr val="16A34A"/>
             </a:solidFill>
             <a:prstDash val="solid"/>
           </a:ln>
@@ -38952,13 +38379,13 @@
             <a:r>
               <a:rPr lang="en-US" sz="1100" b="1" dirty="0">
                 <a:solidFill>
-                  <a:srgbClr val="DC2626"/>
+                  <a:srgbClr val="16A34A"/>
                 </a:solidFill>
                 <a:latin typeface="Trebuchet MS" pitchFamily="34" charset="0"/>
                 <a:ea typeface="Trebuchet MS" pitchFamily="34" charset="-122"/>
                 <a:cs typeface="Trebuchet MS" pitchFamily="34" charset="-120"/>
               </a:rPr>
-              <a:t>FALSE</a:t>
+              <a:t>TRUE</a:t>
             </a:r>
             <a:endParaRPr lang="en-US" sz="1100" dirty="0"/>
           </a:p>
@@ -39031,7 +38458,7 @@
                 <a:ea typeface="Calibri" pitchFamily="34" charset="-122"/>
                 <a:cs typeface="Calibri" pitchFamily="34" charset="-120"/>
               </a:rPr>
-              <a:t>3.  A 'reaction' is what happens in response to something.</a:t>
+              <a:t>3.  The root 'react' comes from the Greek word meaning 'to speak'.</a:t>
             </a:r>
             <a:endParaRPr lang="en-US" sz="1300" dirty="0"/>
           </a:p>
@@ -39054,11 +38481,11 @@
             </a:avLst>
           </a:prstGeom>
           <a:solidFill>
-            <a:srgbClr val="DCFCE7"/>
-          </a:solidFill>
-          <a:ln w="12700">
-            <a:solidFill>
-              <a:srgbClr val="16A34A"/>
+            <a:srgbClr val="FEE2E2"/>
+          </a:solidFill>
+          <a:ln w="12700">
+            <a:solidFill>
+              <a:srgbClr val="DC2626"/>
             </a:solidFill>
             <a:prstDash val="solid"/>
           </a:ln>
@@ -39091,13 +38518,13 @@
             <a:r>
               <a:rPr lang="en-US" sz="1100" b="1" dirty="0">
                 <a:solidFill>
-                  <a:srgbClr val="16A34A"/>
+                  <a:srgbClr val="DC2626"/>
                 </a:solidFill>
                 <a:latin typeface="Trebuchet MS" pitchFamily="34" charset="0"/>
                 <a:ea typeface="Trebuchet MS" pitchFamily="34" charset="-122"/>
                 <a:cs typeface="Trebuchet MS" pitchFamily="34" charset="-120"/>
               </a:rPr>
-              <a:t>TRUE</a:t>
+              <a:t>FALSE</a:t>
             </a:r>
             <a:endParaRPr lang="en-US" sz="1100" dirty="0"/>
           </a:p>
@@ -39170,7 +38597,7 @@
                 <a:ea typeface="Calibri" pitchFamily="34" charset="-122"/>
                 <a:cs typeface="Calibri" pitchFamily="34" charset="-120"/>
               </a:rPr>
-              <a:t>4.  The suffix '-ive' in 'reactive' means tending to do something.</a:t>
+              <a:t>4.  A 'reactor' is a person who writes about reactions in a diary.</a:t>
             </a:r>
             <a:endParaRPr lang="en-US" sz="1300" dirty="0"/>
           </a:p>
@@ -39193,11 +38620,11 @@
             </a:avLst>
           </a:prstGeom>
           <a:solidFill>
-            <a:srgbClr val="DCFCE7"/>
-          </a:solidFill>
-          <a:ln w="12700">
-            <a:solidFill>
-              <a:srgbClr val="16A34A"/>
+            <a:srgbClr val="FEE2E2"/>
+          </a:solidFill>
+          <a:ln w="12700">
+            <a:solidFill>
+              <a:srgbClr val="DC2626"/>
             </a:solidFill>
             <a:prstDash val="solid"/>
           </a:ln>
@@ -39230,13 +38657,13 @@
             <a:r>
               <a:rPr lang="en-US" sz="1100" b="1" dirty="0">
                 <a:solidFill>
-                  <a:srgbClr val="16A34A"/>
+                  <a:srgbClr val="DC2626"/>
                 </a:solidFill>
                 <a:latin typeface="Trebuchet MS" pitchFamily="34" charset="0"/>
                 <a:ea typeface="Trebuchet MS" pitchFamily="34" charset="-122"/>
                 <a:cs typeface="Trebuchet MS" pitchFamily="34" charset="-120"/>
               </a:rPr>
-              <a:t>TRUE</a:t>
+              <a:t>FALSE</a:t>
             </a:r>
             <a:endParaRPr lang="en-US" sz="1100" dirty="0"/>
           </a:p>
@@ -39309,7 +38736,7 @@
                 <a:ea typeface="Calibri" pitchFamily="34" charset="-122"/>
                 <a:cs typeface="Calibri" pitchFamily="34" charset="-120"/>
               </a:rPr>
-              <a:t>5.  The root 'react' means to ignore what is happening.</a:t>
+              <a:t>5.  The word 'overreact' means to respond in a much bigger way than is needed.</a:t>
             </a:r>
             <a:endParaRPr lang="en-US" sz="1300" dirty="0"/>
           </a:p>
@@ -39332,11 +38759,11 @@
             </a:avLst>
           </a:prstGeom>
           <a:solidFill>
-            <a:srgbClr val="FEE2E2"/>
-          </a:solidFill>
-          <a:ln w="12700">
-            <a:solidFill>
-              <a:srgbClr val="DC2626"/>
+            <a:srgbClr val="DCFCE7"/>
+          </a:solidFill>
+          <a:ln w="12700">
+            <a:solidFill>
+              <a:srgbClr val="16A34A"/>
             </a:solidFill>
             <a:prstDash val="solid"/>
           </a:ln>
@@ -39369,13 +38796,13 @@
             <a:r>
               <a:rPr lang="en-US" sz="1100" b="1" dirty="0">
                 <a:solidFill>
-                  <a:srgbClr val="DC2626"/>
+                  <a:srgbClr val="16A34A"/>
                 </a:solidFill>
                 <a:latin typeface="Trebuchet MS" pitchFamily="34" charset="0"/>
                 <a:ea typeface="Trebuchet MS" pitchFamily="34" charset="-122"/>
                 <a:cs typeface="Trebuchet MS" pitchFamily="34" charset="-120"/>
               </a:rPr>
-              <a:t>FALSE</a:t>
+              <a:t>TRUE</a:t>
             </a:r>
             <a:endParaRPr lang="en-US" sz="1100" dirty="0"/>
           </a:p>
@@ -40278,7 +39705,7 @@
                 <a:ea typeface="Trebuchet MS" pitchFamily="34" charset="-122"/>
                 <a:cs typeface="Trebuchet MS" pitchFamily="34" charset="-120"/>
               </a:rPr>
-              <a:t>reactance</a:t>
+              <a:t>reacted</a:t>
             </a:r>
             <a:endParaRPr lang="en-US" sz="1300" dirty="0"/>
           </a:p>
@@ -40344,7 +39771,7 @@
                 <a:ea typeface="Trebuchet MS" pitchFamily="34" charset="-122"/>
                 <a:cs typeface="Trebuchet MS" pitchFamily="34" charset="-120"/>
               </a:rPr>
-              <a:t>reacted</a:t>
+              <a:t>reactance</a:t>
             </a:r>
             <a:endParaRPr lang="en-US" sz="1300" dirty="0"/>
           </a:p>
@@ -41282,7 +40709,7 @@
                 <a:ea typeface="Trebuchet MS" pitchFamily="34" charset="-122"/>
                 <a:cs typeface="Trebuchet MS" pitchFamily="34" charset="-120"/>
               </a:rPr>
-              <a:t>inter-</a:t>
+              <a:t>counter-</a:t>
             </a:r>
             <a:endParaRPr lang="en-US" sz="1300" dirty="0"/>
           </a:p>
@@ -41435,7 +40862,7 @@
                 <a:ea typeface="Trebuchet MS" pitchFamily="34" charset="-122"/>
                 <a:cs typeface="Trebuchet MS" pitchFamily="34" charset="-120"/>
               </a:rPr>
-              <a:t>counter-</a:t>
+              <a:t>inter-</a:t>
             </a:r>
             <a:endParaRPr lang="en-US" sz="1300" dirty="0"/>
           </a:p>
@@ -42588,7 +42015,7 @@
                 <a:ea typeface="Calibri" pitchFamily="34" charset="-122"/>
                 <a:cs typeface="Calibri" pitchFamily="34" charset="-120"/>
               </a:rPr>
-              <a:t>To respond to something in a way that is much stronger than needed.</a:t>
+              <a:t>To respond to something in a way that is much bigger or stronger than needed.</a:t>
             </a:r>
             <a:endParaRPr lang="en-US" sz="1200" dirty="0"/>
           </a:p>
@@ -42727,7 +42154,7 @@
                 <a:ea typeface="Calibri" pitchFamily="34" charset="-122"/>
                 <a:cs typeface="Calibri" pitchFamily="34" charset="-120"/>
               </a:rPr>
-              <a:t>A machine or device that causes or controls a chemical or nuclear reaction.</a:t>
+              <a:t>A machine or device that produces a chemical or nuclear reaction in a controlled way.</a:t>
             </a:r>
             <a:endParaRPr lang="en-US" sz="1200" dirty="0"/>
           </a:p>
@@ -42866,7 +42293,7 @@
                 <a:ea typeface="Calibri" pitchFamily="34" charset="-122"/>
                 <a:cs typeface="Calibri" pitchFamily="34" charset="-120"/>
               </a:rPr>
-              <a:t>Tending to respond quickly or strongly to things that happen.</a:t>
+              <a:t>Tending to respond quickly to things that happen, rather than planning ahead.</a:t>
             </a:r>
             <a:endParaRPr lang="en-US" sz="1200" dirty="0"/>
           </a:p>
@@ -43005,7 +42432,7 @@
                 <a:ea typeface="Calibri" pitchFamily="34" charset="-122"/>
                 <a:cs typeface="Calibri" pitchFamily="34" charset="-120"/>
               </a:rPr>
-              <a:t>The past tense of react — having already responded to something.</a:t>
+              <a:t>The quality of resisting or pushing back against something, used in science and everyday life.</a:t>
             </a:r>
             <a:endParaRPr lang="en-US" sz="1200" dirty="0"/>
           </a:p>
@@ -43144,7 +42571,7 @@
                 <a:ea typeface="Calibri" pitchFamily="34" charset="-122"/>
                 <a:cs typeface="Calibri" pitchFamily="34" charset="-120"/>
               </a:rPr>
-              <a:t>To do or feel something in response to what happens around you.</a:t>
+              <a:t>To do or feel something in response to what happened — like jumping when you hear a loud noise.</a:t>
             </a:r>
             <a:endParaRPr lang="en-US" sz="1200" dirty="0"/>
           </a:p>
@@ -43217,7 +42644,7 @@
                 <a:ea typeface="Trebuchet MS" pitchFamily="34" charset="-122"/>
                 <a:cs typeface="Trebuchet MS" pitchFamily="34" charset="-120"/>
               </a:rPr>
-              <a:t>reactance</a:t>
+              <a:t>reacted</a:t>
             </a:r>
             <a:endParaRPr lang="en-US" sz="1200" dirty="0"/>
           </a:p>
@@ -43283,7 +42710,7 @@
                 <a:ea typeface="Calibri" pitchFamily="34" charset="-122"/>
                 <a:cs typeface="Calibri" pitchFamily="34" charset="-120"/>
               </a:rPr>
-              <a:t>The quality of resisting or pushing back against something.</a:t>
+              <a:t>Already responded to something that happened — like how the crowd reacted to the goal.</a:t>
             </a:r>
             <a:endParaRPr lang="en-US" sz="1200" dirty="0"/>
           </a:p>
@@ -43356,7 +42783,7 @@
                 <a:ea typeface="Trebuchet MS" pitchFamily="34" charset="-122"/>
                 <a:cs typeface="Trebuchet MS" pitchFamily="34" charset="-120"/>
               </a:rPr>
-              <a:t>reacted</a:t>
+              <a:t>reactance</a:t>
             </a:r>
             <a:endParaRPr lang="en-US" sz="1200" dirty="0"/>
           </a:p>
@@ -43422,7 +42849,7 @@
                 <a:ea typeface="Calibri" pitchFamily="34" charset="-122"/>
                 <a:cs typeface="Calibri" pitchFamily="34" charset="-120"/>
               </a:rPr>
-              <a:t>What happens or how someone feels in response to something.</a:t>
+              <a:t>What happens or how someone feels after something else occurs — like laughing at a funny joke.</a:t>
             </a:r>
             <a:endParaRPr lang="en-US" sz="1200" dirty="0"/>
           </a:p>
@@ -43917,7 +43344,7 @@
                 <a:ea typeface="Calibri" pitchFamily="34" charset="-122"/>
                 <a:cs typeface="Calibri" pitchFamily="34" charset="-120"/>
               </a:rPr>
-              <a:t>How did you react when you found out the excursion was cancelled?</a:t>
+              <a:t>The crowd began to react with cheers when the winning goal was scored.</a:t>
             </a:r>
             <a:endParaRPr lang="en-US" sz="1500" dirty="0"/>
           </a:p>
@@ -44081,7 +43508,7 @@
                 <a:ea typeface="Calibri" pitchFamily="34" charset="-122"/>
                 <a:cs typeface="Calibri" pitchFamily="34" charset="-120"/>
               </a:rPr>
-              <a:t>The scientist watched carefully to see what reaction would happen when she mixed the two liquids together.</a:t>
+              <a:t>Her reaction to the surprise party was one of total disbelief and joy.</a:t>
             </a:r>
             <a:endParaRPr lang="en-US" sz="1500" dirty="0"/>
           </a:p>
@@ -44245,7 +43672,7 @@
                 <a:ea typeface="Calibri" pitchFamily="34" charset="-122"/>
                 <a:cs typeface="Calibri" pitchFamily="34" charset="-120"/>
               </a:rPr>
-              <a:t>Try not to overreact if something goes wrong — take a deep breath first.</a:t>
+              <a:t>It is important not to overreact when something small goes wrong.</a:t>
             </a:r>
             <a:endParaRPr lang="en-US" sz="1500" dirty="0"/>
           </a:p>
